--- a/Copy/Unstructured_Workstream_CIO_Briefing.pptx
+++ b/Copy/Unstructured_Workstream_CIO_Briefing.pptx
@@ -3486,439 +3486,2920 @@
           </a:p>
         </p:txBody>
       </p:sp>
-      <p:sp>
-        <p:nvSpPr>
-          <p:cNvPr id="6" name="Shape 4"/>
-          <p:cNvSpPr/>
-          <p:nvPr/>
-        </p:nvSpPr>
-        <p:spPr>
-          <a:xfrm>
-            <a:off x="594360" y="2011680"/>
-            <a:ext cx="11155680" cy="502920"/>
-          </a:xfrm>
-          <a:prstGeom prst="roundRect">
-            <a:avLst>
-              <a:gd name="adj" fmla="val 10909"/>
-            </a:avLst>
-          </a:prstGeom>
-          <a:solidFill>
-            <a:srgbClr val="1A2B5C"/>
-          </a:solidFill>
-          <a:ln w="9525">
-            <a:solidFill>
-              <a:srgbClr val="1A2B5C"/>
-            </a:solidFill>
-            <a:prstDash val="solid"/>
-          </a:ln>
-        </p:spPr>
-      </p:sp>
-      <p:sp>
-        <p:nvSpPr>
-          <p:cNvPr id="7" name="Text 5"/>
-          <p:cNvSpPr/>
-          <p:nvPr/>
-        </p:nvSpPr>
-        <p:spPr>
-          <a:xfrm>
-            <a:off x="594360" y="2011680"/>
-            <a:ext cx="11155680" cy="502920"/>
-          </a:xfrm>
-          <a:prstGeom prst="rect">
-            <a:avLst/>
-          </a:prstGeom>
-          <a:noFill/>
-          <a:ln/>
-        </p:spPr>
-        <p:txBody>
-          <a:bodyPr wrap="square" lIns="0" tIns="0" rIns="0" bIns="0" rtlCol="0" anchor="ctr"/>
-          <a:lstStyle/>
-          <a:p>
-            <a:pPr algn="ctr" indent="0" marL="0">
-              <a:buNone/>
-            </a:pPr>
-            <a:r>
-              <a:rPr lang="en-US" sz="2200" b="1" dirty="0">
-                <a:solidFill>
-                  <a:srgbClr val="FFFFFF"/>
-                </a:solidFill>
-                <a:latin typeface="Calibri" pitchFamily="34" charset="0"/>
-                <a:ea typeface="Calibri" pitchFamily="34" charset="-122"/>
-                <a:cs typeface="Calibri" pitchFamily="34" charset="-120"/>
-              </a:rPr>
-              <a:t>6</a:t>
-            </a:r>
-            <a:pPr algn="ctr" indent="0" marL="0">
-              <a:buNone/>
-            </a:pPr>
-            <a:r>
-              <a:rPr lang="en-US" sz="1000" spc="400" kern="0" dirty="0">
-                <a:solidFill>
-                  <a:srgbClr val="94A3B8"/>
-                </a:solidFill>
-                <a:latin typeface="Calibri" pitchFamily="34" charset="0"/>
-                <a:ea typeface="Calibri" pitchFamily="34" charset="-122"/>
-                <a:cs typeface="Calibri" pitchFamily="34" charset="-120"/>
-              </a:rPr>
-              <a:t>  ITEMS  </a:t>
-            </a:r>
-            <a:pPr algn="ctr" indent="0" marL="0">
-              <a:buNone/>
-            </a:pPr>
-            <a:r>
-              <a:rPr lang="en-US" sz="1000" dirty="0">
-                <a:solidFill>
-                  <a:srgbClr val="94A3B8"/>
-                </a:solidFill>
-                <a:latin typeface="Calibri" pitchFamily="34" charset="0"/>
-                <a:ea typeface="Calibri" pitchFamily="34" charset="-122"/>
-                <a:cs typeface="Calibri" pitchFamily="34" charset="-120"/>
-              </a:rPr>
-              <a:t>  ·  </a:t>
-            </a:r>
-            <a:pPr algn="ctr" indent="0" marL="0">
-              <a:buNone/>
-            </a:pPr>
-            <a:r>
-              <a:rPr lang="en-US" sz="2200" b="1" dirty="0">
-                <a:solidFill>
-                  <a:srgbClr val="FFFBEB"/>
-                </a:solidFill>
-                <a:latin typeface="Calibri" pitchFamily="34" charset="0"/>
-                <a:ea typeface="Calibri" pitchFamily="34" charset="-122"/>
-                <a:cs typeface="Calibri" pitchFamily="34" charset="-120"/>
-              </a:rPr>
-              <a:t>4</a:t>
-            </a:r>
-            <a:pPr algn="ctr" indent="0" marL="0">
-              <a:buNone/>
-            </a:pPr>
-            <a:r>
-              <a:rPr lang="en-US" sz="1000" spc="400" kern="0" dirty="0">
-                <a:solidFill>
-                  <a:srgbClr val="FFFBEB"/>
-                </a:solidFill>
-                <a:latin typeface="Calibri" pitchFamily="34" charset="0"/>
-                <a:ea typeface="Calibri" pitchFamily="34" charset="-122"/>
-                <a:cs typeface="Calibri" pitchFamily="34" charset="-120"/>
-              </a:rPr>
-              <a:t>  DECISIONS NEEDED  </a:t>
-            </a:r>
-            <a:pPr algn="ctr" indent="0" marL="0">
-              <a:buNone/>
-            </a:pPr>
-            <a:r>
-              <a:rPr lang="en-US" sz="1000" dirty="0">
-                <a:solidFill>
-                  <a:srgbClr val="94A3B8"/>
-                </a:solidFill>
-                <a:latin typeface="Calibri" pitchFamily="34" charset="0"/>
-                <a:ea typeface="Calibri" pitchFamily="34" charset="-122"/>
-                <a:cs typeface="Calibri" pitchFamily="34" charset="-120"/>
-              </a:rPr>
-              <a:t>  ·  </a:t>
-            </a:r>
-            <a:pPr algn="ctr" indent="0" marL="0">
-              <a:buNone/>
-            </a:pPr>
-            <a:r>
-              <a:rPr lang="en-US" sz="2200" b="1" dirty="0">
-                <a:solidFill>
-                  <a:srgbClr val="ECFDF5"/>
-                </a:solidFill>
-                <a:latin typeface="Calibri" pitchFamily="34" charset="0"/>
-                <a:ea typeface="Calibri" pitchFamily="34" charset="-122"/>
-                <a:cs typeface="Calibri" pitchFamily="34" charset="-120"/>
-              </a:rPr>
-              <a:t>2</a:t>
-            </a:r>
-            <a:pPr algn="ctr" indent="0" marL="0">
-              <a:buNone/>
-            </a:pPr>
-            <a:r>
-              <a:rPr lang="en-US" sz="1000" spc="400" kern="0" dirty="0">
-                <a:solidFill>
-                  <a:srgbClr val="ECFDF5"/>
-                </a:solidFill>
-                <a:latin typeface="Calibri" pitchFamily="34" charset="0"/>
-                <a:ea typeface="Calibri" pitchFamily="34" charset="-122"/>
-                <a:cs typeface="Calibri" pitchFamily="34" charset="-120"/>
-              </a:rPr>
-              <a:t>  WORKSTREAM-LED</a:t>
-            </a:r>
-            <a:endParaRPr lang="en-US" sz="2200" dirty="0"/>
-          </a:p>
-        </p:txBody>
-      </p:sp>
-      <p:sp>
-        <p:nvSpPr>
-          <p:cNvPr id="8" name="Text 6"/>
-          <p:cNvSpPr/>
-          <p:nvPr/>
-        </p:nvSpPr>
-        <p:spPr>
-          <a:xfrm>
-            <a:off x="594360" y="2697480"/>
-            <a:ext cx="2194560" cy="274320"/>
-          </a:xfrm>
-          <a:prstGeom prst="rect">
-            <a:avLst/>
-          </a:prstGeom>
-          <a:noFill/>
-          <a:ln/>
-        </p:spPr>
-        <p:txBody>
-          <a:bodyPr wrap="square" lIns="0" tIns="0" rIns="0" bIns="0" rtlCol="0" anchor="ctr"/>
-          <a:lstStyle/>
-          <a:p>
-            <a:pPr indent="0" marL="0">
-              <a:buNone/>
-            </a:pPr>
-            <a:r>
-              <a:rPr lang="en-US" sz="900" b="1" spc="400" kern="0" dirty="0">
-                <a:solidFill>
-                  <a:srgbClr val="94A3B8"/>
-                </a:solidFill>
-                <a:latin typeface="Calibri" pitchFamily="34" charset="0"/>
-                <a:ea typeface="Calibri" pitchFamily="34" charset="-122"/>
-                <a:cs typeface="Calibri" pitchFamily="34" charset="-120"/>
-              </a:rPr>
-              <a:t>Theme</a:t>
-            </a:r>
-            <a:endParaRPr lang="en-US" sz="900" dirty="0"/>
-          </a:p>
-        </p:txBody>
-      </p:sp>
-      <p:sp>
-        <p:nvSpPr>
-          <p:cNvPr id="9" name="Text 7"/>
-          <p:cNvSpPr/>
-          <p:nvPr/>
-        </p:nvSpPr>
-        <p:spPr>
-          <a:xfrm>
-            <a:off x="2788920" y="2697480"/>
-            <a:ext cx="2331720" cy="274320"/>
-          </a:xfrm>
-          <a:prstGeom prst="rect">
-            <a:avLst/>
-          </a:prstGeom>
-          <a:noFill/>
-          <a:ln/>
-        </p:spPr>
-        <p:txBody>
-          <a:bodyPr wrap="square" lIns="0" tIns="0" rIns="0" bIns="0" rtlCol="0" anchor="ctr"/>
-          <a:lstStyle/>
-          <a:p>
-            <a:pPr indent="0" marL="0">
-              <a:buNone/>
-            </a:pPr>
-            <a:r>
-              <a:rPr lang="en-US" sz="900" b="1" spc="400" kern="0" dirty="0">
-                <a:solidFill>
-                  <a:srgbClr val="94A3B8"/>
-                </a:solidFill>
-                <a:latin typeface="Calibri" pitchFamily="34" charset="0"/>
-                <a:ea typeface="Calibri" pitchFamily="34" charset="-122"/>
-                <a:cs typeface="Calibri" pitchFamily="34" charset="-120"/>
-              </a:rPr>
-              <a:t>Root cause</a:t>
-            </a:r>
-            <a:endParaRPr lang="en-US" sz="900" dirty="0"/>
-          </a:p>
-        </p:txBody>
-      </p:sp>
-      <p:sp>
-        <p:nvSpPr>
-          <p:cNvPr id="10" name="Text 8"/>
-          <p:cNvSpPr/>
-          <p:nvPr/>
-        </p:nvSpPr>
-        <p:spPr>
-          <a:xfrm>
-            <a:off x="5120640" y="2697480"/>
-            <a:ext cx="2743200" cy="274320"/>
-          </a:xfrm>
-          <a:prstGeom prst="rect">
-            <a:avLst/>
-          </a:prstGeom>
-          <a:noFill/>
-          <a:ln/>
-        </p:spPr>
-        <p:txBody>
-          <a:bodyPr wrap="square" lIns="0" tIns="0" rIns="0" bIns="0" rtlCol="0" anchor="ctr"/>
-          <a:lstStyle/>
-          <a:p>
-            <a:pPr indent="0" marL="0">
-              <a:buNone/>
-            </a:pPr>
-            <a:r>
-              <a:rPr lang="en-US" sz="900" b="1" spc="400" kern="0" dirty="0">
-                <a:solidFill>
-                  <a:srgbClr val="94A3B8"/>
-                </a:solidFill>
-                <a:latin typeface="Calibri" pitchFamily="34" charset="0"/>
-                <a:ea typeface="Calibri" pitchFamily="34" charset="-122"/>
-                <a:cs typeface="Calibri" pitchFamily="34" charset="-120"/>
-              </a:rPr>
-              <a:t>Solution / dependency</a:t>
-            </a:r>
-            <a:endParaRPr lang="en-US" sz="900" dirty="0"/>
-          </a:p>
-        </p:txBody>
-      </p:sp>
-      <p:sp>
-        <p:nvSpPr>
-          <p:cNvPr id="11" name="Text 9"/>
-          <p:cNvSpPr/>
-          <p:nvPr/>
-        </p:nvSpPr>
-        <p:spPr>
-          <a:xfrm>
-            <a:off x="7863840" y="2697480"/>
-            <a:ext cx="1874520" cy="274320"/>
-          </a:xfrm>
-          <a:prstGeom prst="rect">
-            <a:avLst/>
-          </a:prstGeom>
-          <a:noFill/>
-          <a:ln/>
-        </p:spPr>
-        <p:txBody>
-          <a:bodyPr wrap="square" lIns="0" tIns="0" rIns="0" bIns="0" rtlCol="0" anchor="ctr"/>
-          <a:lstStyle/>
-          <a:p>
-            <a:pPr indent="0" marL="0">
-              <a:buNone/>
-            </a:pPr>
-            <a:r>
-              <a:rPr lang="en-US" sz="900" b="1" spc="400" kern="0" dirty="0">
-                <a:solidFill>
-                  <a:srgbClr val="94A3B8"/>
-                </a:solidFill>
-                <a:latin typeface="Calibri" pitchFamily="34" charset="0"/>
-                <a:ea typeface="Calibri" pitchFamily="34" charset="-122"/>
-                <a:cs typeface="Calibri" pitchFamily="34" charset="-120"/>
-              </a:rPr>
-              <a:t>Why it helps</a:t>
-            </a:r>
-            <a:endParaRPr lang="en-US" sz="900" dirty="0"/>
-          </a:p>
-        </p:txBody>
-      </p:sp>
-      <p:sp>
-        <p:nvSpPr>
-          <p:cNvPr id="12" name="Text 10"/>
-          <p:cNvSpPr/>
-          <p:nvPr/>
-        </p:nvSpPr>
-        <p:spPr>
-          <a:xfrm>
-            <a:off x="9738360" y="2697480"/>
-            <a:ext cx="1005840" cy="274320"/>
-          </a:xfrm>
-          <a:prstGeom prst="rect">
-            <a:avLst/>
-          </a:prstGeom>
-          <a:noFill/>
-          <a:ln/>
-        </p:spPr>
-        <p:txBody>
-          <a:bodyPr wrap="square" lIns="0" tIns="0" rIns="0" bIns="0" rtlCol="0" anchor="ctr"/>
-          <a:lstStyle/>
-          <a:p>
-            <a:pPr indent="0" marL="0">
-              <a:buNone/>
-            </a:pPr>
-            <a:r>
-              <a:rPr lang="en-US" sz="900" b="1" spc="400" kern="0" dirty="0">
-                <a:solidFill>
-                  <a:srgbClr val="94A3B8"/>
-                </a:solidFill>
-                <a:latin typeface="Calibri" pitchFamily="34" charset="0"/>
-                <a:ea typeface="Calibri" pitchFamily="34" charset="-122"/>
-                <a:cs typeface="Calibri" pitchFamily="34" charset="-120"/>
-              </a:rPr>
-              <a:t>Deadline</a:t>
-            </a:r>
-            <a:endParaRPr lang="en-US" sz="900" dirty="0"/>
-          </a:p>
-        </p:txBody>
-      </p:sp>
-      <p:sp>
-        <p:nvSpPr>
-          <p:cNvPr id="13" name="Text 11"/>
-          <p:cNvSpPr/>
-          <p:nvPr/>
-        </p:nvSpPr>
-        <p:spPr>
-          <a:xfrm>
-            <a:off x="10744200" y="2697480"/>
-            <a:ext cx="1005840" cy="274320"/>
-          </a:xfrm>
-          <a:prstGeom prst="rect">
-            <a:avLst/>
-          </a:prstGeom>
-          <a:noFill/>
-          <a:ln/>
-        </p:spPr>
-        <p:txBody>
-          <a:bodyPr wrap="square" lIns="0" tIns="0" rIns="0" bIns="0" rtlCol="0" anchor="ctr"/>
-          <a:lstStyle/>
-          <a:p>
-            <a:pPr indent="0" marL="0">
-              <a:buNone/>
-            </a:pPr>
-            <a:r>
-              <a:rPr lang="en-US" sz="900" b="1" spc="400" kern="0" dirty="0">
-                <a:solidFill>
-                  <a:srgbClr val="94A3B8"/>
-                </a:solidFill>
-                <a:latin typeface="Calibri" pitchFamily="34" charset="0"/>
-                <a:ea typeface="Calibri" pitchFamily="34" charset="-122"/>
-                <a:cs typeface="Calibri" pitchFamily="34" charset="-120"/>
-              </a:rPr>
-              <a:t>Owner</a:t>
-            </a:r>
-            <a:endParaRPr lang="en-US" sz="900" dirty="0"/>
-          </a:p>
-        </p:txBody>
-      </p:sp>
-      <p:sp>
-        <p:nvSpPr>
-          <p:cNvPr id="14" name="Shape 12"/>
-          <p:cNvSpPr/>
-          <p:nvPr/>
-        </p:nvSpPr>
-        <p:spPr>
-          <a:xfrm>
-            <a:off x="594360" y="2990088"/>
-            <a:ext cx="11155680" cy="10973"/>
-          </a:xfrm>
-          <a:prstGeom prst="rect">
-            <a:avLst/>
-          </a:prstGeom>
-          <a:solidFill>
-            <a:srgbClr val="CBD5E1"/>
-          </a:solidFill>
-          <a:ln w="12700">
-            <a:solidFill>
-              <a:srgbClr val="CBD5E1"/>
-            </a:solidFill>
-            <a:prstDash val="solid"/>
-          </a:ln>
-        </p:spPr>
-      </p:sp>
-      <p:sp>
-        <p:nvSpPr>
-          <p:cNvPr id="15" name="Shape 13"/>
-          <p:cNvSpPr/>
-          <p:nvPr/>
-        </p:nvSpPr>
-        <p:spPr>
-          <a:xfrm>
-            <a:off x="594360" y="3081528"/>
-            <a:ext cx="45720" cy="475488"/>
+      <p:graphicFrame>
+        <p:nvGraphicFramePr>
+          <p:cNvPr id="3" name="Table 0"/>
+          <p:cNvGraphicFramePr>
+            <a:graphicFrameLocks noGrp="1"/>
+          </p:cNvGraphicFramePr>
+          <p:nvPr>
+            <p:extLst>
+              <p:ext uri="{D42A27DB-BD31-4B8C-83A1-F6EECF244321}">
+                <p14:modId xmlns:p14="http://schemas.microsoft.com/office/powerpoint/2010/main" val="1579011935"/>
+              </p:ext>
+            </p:extLst>
+          </p:nvPr>
+        </p:nvGraphicFramePr>
+        <p:xfrm>
+          <a:off x="594360" y="2011680"/>
+          <a:ext cx="11155680" cy="914400"/>
+        </p:xfrm>
+        <a:graphic>
+          <a:graphicData uri="http://schemas.openxmlformats.org/drawingml/2006/table">
+            <a:tbl>
+              <a:tblPr/>
+              <a:tblGrid>
+                <a:gridCol w="2011680"/>
+                <a:gridCol w="2331720"/>
+                <a:gridCol w="2743200"/>
+                <a:gridCol w="1920240"/>
+                <a:gridCol w="1097280"/>
+                <a:gridCol w="1051560"/>
+              </a:tblGrid>
+              <a:tr h="566928">
+                <a:tc>
+                  <a:txBody>
+                    <a:bodyPr/>
+                    <a:lstStyle/>
+                    <a:p>
+                      <a:pPr algn="l" indent="0" marL="0">
+                        <a:buNone/>
+                      </a:pPr>
+                      <a:r>
+                        <a:rPr lang="en-US" sz="1100" b="1" dirty="0">
+                          <a:solidFill>
+                            <a:srgbClr val="FFFFFF"/>
+                          </a:solidFill>
+                          <a:latin typeface="Calibri" pitchFamily="34" charset="0"/>
+                          <a:ea typeface="Calibri" pitchFamily="34" charset="-122"/>
+                          <a:cs typeface="Calibri" pitchFamily="34" charset="-120"/>
+                        </a:rPr>
+                        <a:t>Theme</a:t>
+                      </a:r>
+                      <a:endParaRPr lang="en-US" sz="1100" dirty="0">
+                        <a:latin typeface="Calibri" charset="0"/>
+                        <a:ea typeface="Calibri" charset="0"/>
+                        <a:cs typeface="Calibri" charset="0"/>
+                      </a:endParaRPr>
+                    </a:p>
+                  </a:txBody>
+                  <a:tcPr marL="73152" marR="73152" marT="73152" marB="73152" anchor="ctr">
+                    <a:lnL w="6350" cap="flat" cmpd="sng" algn="ctr">
+                      <a:solidFill>
+                        <a:srgbClr val="E2E8F0"/>
+                      </a:solidFill>
+                      <a:prstDash val="solid"/>
+                      <a:round/>
+                      <a:headEnd type="none" w="med" len="med"/>
+                      <a:tailEnd type="none" w="med" len="med"/>
+                    </a:lnL>
+                    <a:lnR w="6350" cap="flat" cmpd="sng" algn="ctr">
+                      <a:solidFill>
+                        <a:srgbClr val="E2E8F0"/>
+                      </a:solidFill>
+                      <a:prstDash val="solid"/>
+                      <a:round/>
+                      <a:headEnd type="none" w="med" len="med"/>
+                      <a:tailEnd type="none" w="med" len="med"/>
+                    </a:lnR>
+                    <a:lnT w="6350" cap="flat" cmpd="sng" algn="ctr">
+                      <a:solidFill>
+                        <a:srgbClr val="E2E8F0"/>
+                      </a:solidFill>
+                      <a:prstDash val="solid"/>
+                      <a:round/>
+                      <a:headEnd type="none" w="med" len="med"/>
+                      <a:tailEnd type="none" w="med" len="med"/>
+                    </a:lnT>
+                    <a:lnB w="6350" cap="flat" cmpd="sng" algn="ctr">
+                      <a:solidFill>
+                        <a:srgbClr val="E2E8F0"/>
+                      </a:solidFill>
+                      <a:prstDash val="solid"/>
+                      <a:round/>
+                      <a:headEnd type="none" w="med" len="med"/>
+                      <a:tailEnd type="none" w="med" len="med"/>
+                    </a:lnB>
+                    <a:solidFill>
+                      <a:srgbClr val="1A2B5C"/>
+                    </a:solidFill>
+                  </a:tcPr>
+                </a:tc>
+                <a:tc>
+                  <a:txBody>
+                    <a:bodyPr/>
+                    <a:lstStyle/>
+                    <a:p>
+                      <a:pPr algn="l" indent="0" marL="0">
+                        <a:buNone/>
+                      </a:pPr>
+                      <a:r>
+                        <a:rPr lang="en-US" sz="1100" b="1" dirty="0">
+                          <a:solidFill>
+                            <a:srgbClr val="FFFFFF"/>
+                          </a:solidFill>
+                          <a:latin typeface="Calibri" pitchFamily="34" charset="0"/>
+                          <a:ea typeface="Calibri" pitchFamily="34" charset="-122"/>
+                          <a:cs typeface="Calibri" pitchFamily="34" charset="-120"/>
+                        </a:rPr>
+                        <a:t>Root cause</a:t>
+                      </a:r>
+                      <a:endParaRPr lang="en-US" sz="1100" dirty="0">
+                        <a:latin typeface="Calibri" charset="0"/>
+                        <a:ea typeface="Calibri" charset="0"/>
+                        <a:cs typeface="Calibri" charset="0"/>
+                      </a:endParaRPr>
+                    </a:p>
+                  </a:txBody>
+                  <a:tcPr marL="73152" marR="73152" marT="73152" marB="73152" anchor="ctr">
+                    <a:lnL w="6350" cap="flat" cmpd="sng" algn="ctr">
+                      <a:solidFill>
+                        <a:srgbClr val="E2E8F0"/>
+                      </a:solidFill>
+                      <a:prstDash val="solid"/>
+                      <a:round/>
+                      <a:headEnd type="none" w="med" len="med"/>
+                      <a:tailEnd type="none" w="med" len="med"/>
+                    </a:lnL>
+                    <a:lnR w="6350" cap="flat" cmpd="sng" algn="ctr">
+                      <a:solidFill>
+                        <a:srgbClr val="E2E8F0"/>
+                      </a:solidFill>
+                      <a:prstDash val="solid"/>
+                      <a:round/>
+                      <a:headEnd type="none" w="med" len="med"/>
+                      <a:tailEnd type="none" w="med" len="med"/>
+                    </a:lnR>
+                    <a:lnT w="6350" cap="flat" cmpd="sng" algn="ctr">
+                      <a:solidFill>
+                        <a:srgbClr val="E2E8F0"/>
+                      </a:solidFill>
+                      <a:prstDash val="solid"/>
+                      <a:round/>
+                      <a:headEnd type="none" w="med" len="med"/>
+                      <a:tailEnd type="none" w="med" len="med"/>
+                    </a:lnT>
+                    <a:lnB w="6350" cap="flat" cmpd="sng" algn="ctr">
+                      <a:solidFill>
+                        <a:srgbClr val="E2E8F0"/>
+                      </a:solidFill>
+                      <a:prstDash val="solid"/>
+                      <a:round/>
+                      <a:headEnd type="none" w="med" len="med"/>
+                      <a:tailEnd type="none" w="med" len="med"/>
+                    </a:lnB>
+                    <a:solidFill>
+                      <a:srgbClr val="1A2B5C"/>
+                    </a:solidFill>
+                  </a:tcPr>
+                </a:tc>
+                <a:tc>
+                  <a:txBody>
+                    <a:bodyPr/>
+                    <a:lstStyle/>
+                    <a:p>
+                      <a:pPr algn="l" indent="0" marL="0">
+                        <a:buNone/>
+                      </a:pPr>
+                      <a:r>
+                        <a:rPr lang="en-US" sz="1100" b="1" dirty="0">
+                          <a:solidFill>
+                            <a:srgbClr val="FFFFFF"/>
+                          </a:solidFill>
+                          <a:latin typeface="Calibri" pitchFamily="34" charset="0"/>
+                          <a:ea typeface="Calibri" pitchFamily="34" charset="-122"/>
+                          <a:cs typeface="Calibri" pitchFamily="34" charset="-120"/>
+                        </a:rPr>
+                        <a:t>Solution / dependency</a:t>
+                      </a:r>
+                      <a:endParaRPr lang="en-US" sz="1100" dirty="0">
+                        <a:latin typeface="Calibri" charset="0"/>
+                        <a:ea typeface="Calibri" charset="0"/>
+                        <a:cs typeface="Calibri" charset="0"/>
+                      </a:endParaRPr>
+                    </a:p>
+                  </a:txBody>
+                  <a:tcPr marL="73152" marR="73152" marT="73152" marB="73152" anchor="ctr">
+                    <a:lnL w="6350" cap="flat" cmpd="sng" algn="ctr">
+                      <a:solidFill>
+                        <a:srgbClr val="E2E8F0"/>
+                      </a:solidFill>
+                      <a:prstDash val="solid"/>
+                      <a:round/>
+                      <a:headEnd type="none" w="med" len="med"/>
+                      <a:tailEnd type="none" w="med" len="med"/>
+                    </a:lnL>
+                    <a:lnR w="6350" cap="flat" cmpd="sng" algn="ctr">
+                      <a:solidFill>
+                        <a:srgbClr val="E2E8F0"/>
+                      </a:solidFill>
+                      <a:prstDash val="solid"/>
+                      <a:round/>
+                      <a:headEnd type="none" w="med" len="med"/>
+                      <a:tailEnd type="none" w="med" len="med"/>
+                    </a:lnR>
+                    <a:lnT w="6350" cap="flat" cmpd="sng" algn="ctr">
+                      <a:solidFill>
+                        <a:srgbClr val="E2E8F0"/>
+                      </a:solidFill>
+                      <a:prstDash val="solid"/>
+                      <a:round/>
+                      <a:headEnd type="none" w="med" len="med"/>
+                      <a:tailEnd type="none" w="med" len="med"/>
+                    </a:lnT>
+                    <a:lnB w="6350" cap="flat" cmpd="sng" algn="ctr">
+                      <a:solidFill>
+                        <a:srgbClr val="E2E8F0"/>
+                      </a:solidFill>
+                      <a:prstDash val="solid"/>
+                      <a:round/>
+                      <a:headEnd type="none" w="med" len="med"/>
+                      <a:tailEnd type="none" w="med" len="med"/>
+                    </a:lnB>
+                    <a:solidFill>
+                      <a:srgbClr val="1A2B5C"/>
+                    </a:solidFill>
+                  </a:tcPr>
+                </a:tc>
+                <a:tc>
+                  <a:txBody>
+                    <a:bodyPr/>
+                    <a:lstStyle/>
+                    <a:p>
+                      <a:pPr algn="l" indent="0" marL="0">
+                        <a:buNone/>
+                      </a:pPr>
+                      <a:r>
+                        <a:rPr lang="en-US" sz="1100" b="1" dirty="0">
+                          <a:solidFill>
+                            <a:srgbClr val="FFFFFF"/>
+                          </a:solidFill>
+                          <a:latin typeface="Calibri" pitchFamily="34" charset="0"/>
+                          <a:ea typeface="Calibri" pitchFamily="34" charset="-122"/>
+                          <a:cs typeface="Calibri" pitchFamily="34" charset="-120"/>
+                        </a:rPr>
+                        <a:t>Why it helps</a:t>
+                      </a:r>
+                      <a:endParaRPr lang="en-US" sz="1100" dirty="0">
+                        <a:latin typeface="Calibri" charset="0"/>
+                        <a:ea typeface="Calibri" charset="0"/>
+                        <a:cs typeface="Calibri" charset="0"/>
+                      </a:endParaRPr>
+                    </a:p>
+                  </a:txBody>
+                  <a:tcPr marL="73152" marR="73152" marT="73152" marB="73152" anchor="ctr">
+                    <a:lnL w="6350" cap="flat" cmpd="sng" algn="ctr">
+                      <a:solidFill>
+                        <a:srgbClr val="E2E8F0"/>
+                      </a:solidFill>
+                      <a:prstDash val="solid"/>
+                      <a:round/>
+                      <a:headEnd type="none" w="med" len="med"/>
+                      <a:tailEnd type="none" w="med" len="med"/>
+                    </a:lnL>
+                    <a:lnR w="6350" cap="flat" cmpd="sng" algn="ctr">
+                      <a:solidFill>
+                        <a:srgbClr val="E2E8F0"/>
+                      </a:solidFill>
+                      <a:prstDash val="solid"/>
+                      <a:round/>
+                      <a:headEnd type="none" w="med" len="med"/>
+                      <a:tailEnd type="none" w="med" len="med"/>
+                    </a:lnR>
+                    <a:lnT w="6350" cap="flat" cmpd="sng" algn="ctr">
+                      <a:solidFill>
+                        <a:srgbClr val="E2E8F0"/>
+                      </a:solidFill>
+                      <a:prstDash val="solid"/>
+                      <a:round/>
+                      <a:headEnd type="none" w="med" len="med"/>
+                      <a:tailEnd type="none" w="med" len="med"/>
+                    </a:lnT>
+                    <a:lnB w="6350" cap="flat" cmpd="sng" algn="ctr">
+                      <a:solidFill>
+                        <a:srgbClr val="E2E8F0"/>
+                      </a:solidFill>
+                      <a:prstDash val="solid"/>
+                      <a:round/>
+                      <a:headEnd type="none" w="med" len="med"/>
+                      <a:tailEnd type="none" w="med" len="med"/>
+                    </a:lnB>
+                    <a:solidFill>
+                      <a:srgbClr val="1A2B5C"/>
+                    </a:solidFill>
+                  </a:tcPr>
+                </a:tc>
+                <a:tc>
+                  <a:txBody>
+                    <a:bodyPr/>
+                    <a:lstStyle/>
+                    <a:p>
+                      <a:pPr algn="l" indent="0" marL="0">
+                        <a:buNone/>
+                      </a:pPr>
+                      <a:r>
+                        <a:rPr lang="en-US" sz="1100" b="1" dirty="0">
+                          <a:solidFill>
+                            <a:srgbClr val="FFFFFF"/>
+                          </a:solidFill>
+                          <a:latin typeface="Calibri" pitchFamily="34" charset="0"/>
+                          <a:ea typeface="Calibri" pitchFamily="34" charset="-122"/>
+                          <a:cs typeface="Calibri" pitchFamily="34" charset="-120"/>
+                        </a:rPr>
+                        <a:t>Deadline</a:t>
+                      </a:r>
+                      <a:endParaRPr lang="en-US" sz="1100" dirty="0">
+                        <a:latin typeface="Calibri" charset="0"/>
+                        <a:ea typeface="Calibri" charset="0"/>
+                        <a:cs typeface="Calibri" charset="0"/>
+                      </a:endParaRPr>
+                    </a:p>
+                  </a:txBody>
+                  <a:tcPr marL="73152" marR="73152" marT="73152" marB="73152" anchor="ctr">
+                    <a:lnL w="6350" cap="flat" cmpd="sng" algn="ctr">
+                      <a:solidFill>
+                        <a:srgbClr val="E2E8F0"/>
+                      </a:solidFill>
+                      <a:prstDash val="solid"/>
+                      <a:round/>
+                      <a:headEnd type="none" w="med" len="med"/>
+                      <a:tailEnd type="none" w="med" len="med"/>
+                    </a:lnL>
+                    <a:lnR w="6350" cap="flat" cmpd="sng" algn="ctr">
+                      <a:solidFill>
+                        <a:srgbClr val="E2E8F0"/>
+                      </a:solidFill>
+                      <a:prstDash val="solid"/>
+                      <a:round/>
+                      <a:headEnd type="none" w="med" len="med"/>
+                      <a:tailEnd type="none" w="med" len="med"/>
+                    </a:lnR>
+                    <a:lnT w="6350" cap="flat" cmpd="sng" algn="ctr">
+                      <a:solidFill>
+                        <a:srgbClr val="E2E8F0"/>
+                      </a:solidFill>
+                      <a:prstDash val="solid"/>
+                      <a:round/>
+                      <a:headEnd type="none" w="med" len="med"/>
+                      <a:tailEnd type="none" w="med" len="med"/>
+                    </a:lnT>
+                    <a:lnB w="6350" cap="flat" cmpd="sng" algn="ctr">
+                      <a:solidFill>
+                        <a:srgbClr val="E2E8F0"/>
+                      </a:solidFill>
+                      <a:prstDash val="solid"/>
+                      <a:round/>
+                      <a:headEnd type="none" w="med" len="med"/>
+                      <a:tailEnd type="none" w="med" len="med"/>
+                    </a:lnB>
+                    <a:solidFill>
+                      <a:srgbClr val="1A2B5C"/>
+                    </a:solidFill>
+                  </a:tcPr>
+                </a:tc>
+                <a:tc>
+                  <a:txBody>
+                    <a:bodyPr/>
+                    <a:lstStyle/>
+                    <a:p>
+                      <a:pPr algn="l" indent="0" marL="0">
+                        <a:buNone/>
+                      </a:pPr>
+                      <a:r>
+                        <a:rPr lang="en-US" sz="1100" b="1" dirty="0">
+                          <a:solidFill>
+                            <a:srgbClr val="FFFFFF"/>
+                          </a:solidFill>
+                          <a:latin typeface="Calibri" pitchFamily="34" charset="0"/>
+                          <a:ea typeface="Calibri" pitchFamily="34" charset="-122"/>
+                          <a:cs typeface="Calibri" pitchFamily="34" charset="-120"/>
+                        </a:rPr>
+                        <a:t>Owner</a:t>
+                      </a:r>
+                      <a:endParaRPr lang="en-US" sz="1100" dirty="0">
+                        <a:latin typeface="Calibri" charset="0"/>
+                        <a:ea typeface="Calibri" charset="0"/>
+                        <a:cs typeface="Calibri" charset="0"/>
+                      </a:endParaRPr>
+                    </a:p>
+                  </a:txBody>
+                  <a:tcPr marL="73152" marR="73152" marT="73152" marB="73152" anchor="ctr">
+                    <a:lnL w="6350" cap="flat" cmpd="sng" algn="ctr">
+                      <a:solidFill>
+                        <a:srgbClr val="E2E8F0"/>
+                      </a:solidFill>
+                      <a:prstDash val="solid"/>
+                      <a:round/>
+                      <a:headEnd type="none" w="med" len="med"/>
+                      <a:tailEnd type="none" w="med" len="med"/>
+                    </a:lnL>
+                    <a:lnR w="6350" cap="flat" cmpd="sng" algn="ctr">
+                      <a:solidFill>
+                        <a:srgbClr val="E2E8F0"/>
+                      </a:solidFill>
+                      <a:prstDash val="solid"/>
+                      <a:round/>
+                      <a:headEnd type="none" w="med" len="med"/>
+                      <a:tailEnd type="none" w="med" len="med"/>
+                    </a:lnR>
+                    <a:lnT w="6350" cap="flat" cmpd="sng" algn="ctr">
+                      <a:solidFill>
+                        <a:srgbClr val="E2E8F0"/>
+                      </a:solidFill>
+                      <a:prstDash val="solid"/>
+                      <a:round/>
+                      <a:headEnd type="none" w="med" len="med"/>
+                      <a:tailEnd type="none" w="med" len="med"/>
+                    </a:lnT>
+                    <a:lnB w="6350" cap="flat" cmpd="sng" algn="ctr">
+                      <a:solidFill>
+                        <a:srgbClr val="E2E8F0"/>
+                      </a:solidFill>
+                      <a:prstDash val="solid"/>
+                      <a:round/>
+                      <a:headEnd type="none" w="med" len="med"/>
+                      <a:tailEnd type="none" w="med" len="med"/>
+                    </a:lnB>
+                    <a:solidFill>
+                      <a:srgbClr val="1A2B5C"/>
+                    </a:solidFill>
+                  </a:tcPr>
+                </a:tc>
+              </a:tr>
+              <a:tr h="566928">
+                <a:tc>
+                  <a:txBody>
+                    <a:bodyPr/>
+                    <a:lstStyle/>
+                    <a:p>
+                      <a:pPr algn="l" indent="0" marL="0">
+                        <a:buNone/>
+                      </a:pPr>
+                      <a:r>
+                        <a:rPr lang="en-US" sz="1000" b="1" dirty="0">
+                          <a:solidFill>
+                            <a:srgbClr val="0B1530"/>
+                          </a:solidFill>
+                          <a:latin typeface="Calibri" pitchFamily="34" charset="0"/>
+                          <a:ea typeface="Calibri" pitchFamily="34" charset="-122"/>
+                          <a:cs typeface="Calibri" pitchFamily="34" charset="-120"/>
+                        </a:rPr>
+                        <a:t>Reference platform not confirmed</a:t>
+                      </a:r>
+                      <a:endParaRPr lang="en-US" sz="1000" dirty="0">
+                        <a:latin typeface="Calibri" charset="0"/>
+                        <a:ea typeface="Calibri" charset="0"/>
+                        <a:cs typeface="Calibri" charset="0"/>
+                      </a:endParaRPr>
+                    </a:p>
+                  </a:txBody>
+                  <a:tcPr marL="73152" marR="73152" marT="73152" marB="73152" anchor="ctr">
+                    <a:lnL w="6350" cap="flat" cmpd="sng" algn="ctr">
+                      <a:solidFill>
+                        <a:srgbClr val="E2E8F0"/>
+                      </a:solidFill>
+                      <a:prstDash val="solid"/>
+                      <a:round/>
+                      <a:headEnd type="none" w="med" len="med"/>
+                      <a:tailEnd type="none" w="med" len="med"/>
+                    </a:lnL>
+                    <a:lnR w="6350" cap="flat" cmpd="sng" algn="ctr">
+                      <a:solidFill>
+                        <a:srgbClr val="E2E8F0"/>
+                      </a:solidFill>
+                      <a:prstDash val="solid"/>
+                      <a:round/>
+                      <a:headEnd type="none" w="med" len="med"/>
+                      <a:tailEnd type="none" w="med" len="med"/>
+                    </a:lnR>
+                    <a:lnT w="6350" cap="flat" cmpd="sng" algn="ctr">
+                      <a:solidFill>
+                        <a:srgbClr val="E2E8F0"/>
+                      </a:solidFill>
+                      <a:prstDash val="solid"/>
+                      <a:round/>
+                      <a:headEnd type="none" w="med" len="med"/>
+                      <a:tailEnd type="none" w="med" len="med"/>
+                    </a:lnT>
+                    <a:lnB w="6350" cap="flat" cmpd="sng" algn="ctr">
+                      <a:solidFill>
+                        <a:srgbClr val="E2E8F0"/>
+                      </a:solidFill>
+                      <a:prstDash val="solid"/>
+                      <a:round/>
+                      <a:headEnd type="none" w="med" len="med"/>
+                      <a:tailEnd type="none" w="med" len="med"/>
+                    </a:lnB>
+                    <a:solidFill>
+                      <a:srgbClr val="FFFBEB"/>
+                    </a:solidFill>
+                  </a:tcPr>
+                </a:tc>
+                <a:tc>
+                  <a:txBody>
+                    <a:bodyPr/>
+                    <a:lstStyle/>
+                    <a:p>
+                      <a:pPr algn="l" indent="0" marL="0">
+                        <a:buNone/>
+                      </a:pPr>
+                      <a:r>
+                        <a:rPr lang="en-US" sz="1000" dirty="0">
+                          <a:solidFill>
+                            <a:srgbClr val="475569"/>
+                          </a:solidFill>
+                          <a:latin typeface="Calibri" pitchFamily="34" charset="0"/>
+                          <a:ea typeface="Calibri" pitchFamily="34" charset="-122"/>
+                          <a:cs typeface="Calibri" pitchFamily="34" charset="-120"/>
+                        </a:rPr>
+                        <a:t>No named platform has been agreed to host the first MVP-aligned data plane.</a:t>
+                      </a:r>
+                      <a:endParaRPr lang="en-US" sz="1000" dirty="0">
+                        <a:latin typeface="Calibri" charset="0"/>
+                        <a:ea typeface="Calibri" charset="0"/>
+                        <a:cs typeface="Calibri" charset="0"/>
+                      </a:endParaRPr>
+                    </a:p>
+                  </a:txBody>
+                  <a:tcPr marL="73152" marR="73152" marT="73152" marB="73152" anchor="ctr">
+                    <a:lnL w="6350" cap="flat" cmpd="sng" algn="ctr">
+                      <a:solidFill>
+                        <a:srgbClr val="E2E8F0"/>
+                      </a:solidFill>
+                      <a:prstDash val="solid"/>
+                      <a:round/>
+                      <a:headEnd type="none" w="med" len="med"/>
+                      <a:tailEnd type="none" w="med" len="med"/>
+                    </a:lnL>
+                    <a:lnR w="6350" cap="flat" cmpd="sng" algn="ctr">
+                      <a:solidFill>
+                        <a:srgbClr val="E2E8F0"/>
+                      </a:solidFill>
+                      <a:prstDash val="solid"/>
+                      <a:round/>
+                      <a:headEnd type="none" w="med" len="med"/>
+                      <a:tailEnd type="none" w="med" len="med"/>
+                    </a:lnR>
+                    <a:lnT w="6350" cap="flat" cmpd="sng" algn="ctr">
+                      <a:solidFill>
+                        <a:srgbClr val="E2E8F0"/>
+                      </a:solidFill>
+                      <a:prstDash val="solid"/>
+                      <a:round/>
+                      <a:headEnd type="none" w="med" len="med"/>
+                      <a:tailEnd type="none" w="med" len="med"/>
+                    </a:lnT>
+                    <a:lnB w="6350" cap="flat" cmpd="sng" algn="ctr">
+                      <a:solidFill>
+                        <a:srgbClr val="E2E8F0"/>
+                      </a:solidFill>
+                      <a:prstDash val="solid"/>
+                      <a:round/>
+                      <a:headEnd type="none" w="med" len="med"/>
+                      <a:tailEnd type="none" w="med" len="med"/>
+                    </a:lnB>
+                    <a:solidFill>
+                      <a:srgbClr val="FFFBEB"/>
+                    </a:solidFill>
+                  </a:tcPr>
+                </a:tc>
+                <a:tc>
+                  <a:txBody>
+                    <a:bodyPr/>
+                    <a:lstStyle/>
+                    <a:p>
+                      <a:pPr algn="l" indent="0" marL="0">
+                        <a:buNone/>
+                      </a:pPr>
+                      <a:r>
+                        <a:rPr lang="en-US" sz="1000" dirty="0">
+                          <a:solidFill>
+                            <a:srgbClr val="0B1530"/>
+                          </a:solidFill>
+                          <a:latin typeface="Calibri" pitchFamily="34" charset="0"/>
+                          <a:ea typeface="Calibri" pitchFamily="34" charset="-122"/>
+                          <a:cs typeface="Calibri" pitchFamily="34" charset="-120"/>
+                        </a:rPr>
+                        <a:t>Confirm the first reference data platform and accountable sponsor.</a:t>
+                      </a:r>
+                      <a:endParaRPr lang="en-US" sz="1000" dirty="0">
+                        <a:latin typeface="Calibri" charset="0"/>
+                        <a:ea typeface="Calibri" charset="0"/>
+                        <a:cs typeface="Calibri" charset="0"/>
+                      </a:endParaRPr>
+                    </a:p>
+                  </a:txBody>
+                  <a:tcPr marL="73152" marR="73152" marT="73152" marB="73152" anchor="ctr">
+                    <a:lnL w="6350" cap="flat" cmpd="sng" algn="ctr">
+                      <a:solidFill>
+                        <a:srgbClr val="E2E8F0"/>
+                      </a:solidFill>
+                      <a:prstDash val="solid"/>
+                      <a:round/>
+                      <a:headEnd type="none" w="med" len="med"/>
+                      <a:tailEnd type="none" w="med" len="med"/>
+                    </a:lnL>
+                    <a:lnR w="6350" cap="flat" cmpd="sng" algn="ctr">
+                      <a:solidFill>
+                        <a:srgbClr val="E2E8F0"/>
+                      </a:solidFill>
+                      <a:prstDash val="solid"/>
+                      <a:round/>
+                      <a:headEnd type="none" w="med" len="med"/>
+                      <a:tailEnd type="none" w="med" len="med"/>
+                    </a:lnR>
+                    <a:lnT w="6350" cap="flat" cmpd="sng" algn="ctr">
+                      <a:solidFill>
+                        <a:srgbClr val="E2E8F0"/>
+                      </a:solidFill>
+                      <a:prstDash val="solid"/>
+                      <a:round/>
+                      <a:headEnd type="none" w="med" len="med"/>
+                      <a:tailEnd type="none" w="med" len="med"/>
+                    </a:lnT>
+                    <a:lnB w="6350" cap="flat" cmpd="sng" algn="ctr">
+                      <a:solidFill>
+                        <a:srgbClr val="E2E8F0"/>
+                      </a:solidFill>
+                      <a:prstDash val="solid"/>
+                      <a:round/>
+                      <a:headEnd type="none" w="med" len="med"/>
+                      <a:tailEnd type="none" w="med" len="med"/>
+                    </a:lnB>
+                    <a:solidFill>
+                      <a:srgbClr val="FFFBEB"/>
+                    </a:solidFill>
+                  </a:tcPr>
+                </a:tc>
+                <a:tc>
+                  <a:txBody>
+                    <a:bodyPr/>
+                    <a:lstStyle/>
+                    <a:p>
+                      <a:pPr algn="l" indent="0" marL="0">
+                        <a:buNone/>
+                      </a:pPr>
+                      <a:r>
+                        <a:rPr lang="en-US" sz="1000" i="1" dirty="0">
+                          <a:solidFill>
+                            <a:srgbClr val="475569"/>
+                          </a:solidFill>
+                          <a:latin typeface="Calibri" pitchFamily="34" charset="0"/>
+                          <a:ea typeface="Calibri" pitchFamily="34" charset="-122"/>
+                          <a:cs typeface="Calibri" pitchFamily="34" charset="-120"/>
+                        </a:rPr>
+                        <a:t>Moves the workstream from theoretical design into executable build.</a:t>
+                      </a:r>
+                      <a:endParaRPr lang="en-US" sz="1000" dirty="0">
+                        <a:latin typeface="Calibri" charset="0"/>
+                        <a:ea typeface="Calibri" charset="0"/>
+                        <a:cs typeface="Calibri" charset="0"/>
+                      </a:endParaRPr>
+                    </a:p>
+                  </a:txBody>
+                  <a:tcPr marL="73152" marR="73152" marT="73152" marB="73152" anchor="ctr">
+                    <a:lnL w="6350" cap="flat" cmpd="sng" algn="ctr">
+                      <a:solidFill>
+                        <a:srgbClr val="E2E8F0"/>
+                      </a:solidFill>
+                      <a:prstDash val="solid"/>
+                      <a:round/>
+                      <a:headEnd type="none" w="med" len="med"/>
+                      <a:tailEnd type="none" w="med" len="med"/>
+                    </a:lnL>
+                    <a:lnR w="6350" cap="flat" cmpd="sng" algn="ctr">
+                      <a:solidFill>
+                        <a:srgbClr val="E2E8F0"/>
+                      </a:solidFill>
+                      <a:prstDash val="solid"/>
+                      <a:round/>
+                      <a:headEnd type="none" w="med" len="med"/>
+                      <a:tailEnd type="none" w="med" len="med"/>
+                    </a:lnR>
+                    <a:lnT w="6350" cap="flat" cmpd="sng" algn="ctr">
+                      <a:solidFill>
+                        <a:srgbClr val="E2E8F0"/>
+                      </a:solidFill>
+                      <a:prstDash val="solid"/>
+                      <a:round/>
+                      <a:headEnd type="none" w="med" len="med"/>
+                      <a:tailEnd type="none" w="med" len="med"/>
+                    </a:lnT>
+                    <a:lnB w="6350" cap="flat" cmpd="sng" algn="ctr">
+                      <a:solidFill>
+                        <a:srgbClr val="E2E8F0"/>
+                      </a:solidFill>
+                      <a:prstDash val="solid"/>
+                      <a:round/>
+                      <a:headEnd type="none" w="med" len="med"/>
+                      <a:tailEnd type="none" w="med" len="med"/>
+                    </a:lnB>
+                    <a:solidFill>
+                      <a:srgbClr val="FFFBEB"/>
+                    </a:solidFill>
+                  </a:tcPr>
+                </a:tc>
+                <a:tc>
+                  <a:txBody>
+                    <a:bodyPr/>
+                    <a:lstStyle/>
+                    <a:p>
+                      <a:pPr algn="ctr" indent="0" marL="0">
+                        <a:buNone/>
+                      </a:pPr>
+                      <a:r>
+                        <a:rPr lang="en-US" sz="1000" b="1" dirty="0">
+                          <a:solidFill>
+                            <a:srgbClr val="92400E"/>
+                          </a:solidFill>
+                          <a:latin typeface="Calibri" pitchFamily="34" charset="0"/>
+                          <a:ea typeface="Calibri" pitchFamily="34" charset="-122"/>
+                          <a:cs typeface="Calibri" pitchFamily="34" charset="-120"/>
+                        </a:rPr>
+                        <a:t>Immediate</a:t>
+                      </a:r>
+                      <a:endParaRPr lang="en-US" sz="1000" dirty="0">
+                        <a:latin typeface="Calibri" charset="0"/>
+                        <a:ea typeface="Calibri" charset="0"/>
+                        <a:cs typeface="Calibri" charset="0"/>
+                      </a:endParaRPr>
+                    </a:p>
+                  </a:txBody>
+                  <a:tcPr marL="73152" marR="73152" marT="73152" marB="73152" anchor="ctr">
+                    <a:lnL w="6350" cap="flat" cmpd="sng" algn="ctr">
+                      <a:solidFill>
+                        <a:srgbClr val="E2E8F0"/>
+                      </a:solidFill>
+                      <a:prstDash val="solid"/>
+                      <a:round/>
+                      <a:headEnd type="none" w="med" len="med"/>
+                      <a:tailEnd type="none" w="med" len="med"/>
+                    </a:lnL>
+                    <a:lnR w="6350" cap="flat" cmpd="sng" algn="ctr">
+                      <a:solidFill>
+                        <a:srgbClr val="E2E8F0"/>
+                      </a:solidFill>
+                      <a:prstDash val="solid"/>
+                      <a:round/>
+                      <a:headEnd type="none" w="med" len="med"/>
+                      <a:tailEnd type="none" w="med" len="med"/>
+                    </a:lnR>
+                    <a:lnT w="6350" cap="flat" cmpd="sng" algn="ctr">
+                      <a:solidFill>
+                        <a:srgbClr val="E2E8F0"/>
+                      </a:solidFill>
+                      <a:prstDash val="solid"/>
+                      <a:round/>
+                      <a:headEnd type="none" w="med" len="med"/>
+                      <a:tailEnd type="none" w="med" len="med"/>
+                    </a:lnT>
+                    <a:lnB w="6350" cap="flat" cmpd="sng" algn="ctr">
+                      <a:solidFill>
+                        <a:srgbClr val="E2E8F0"/>
+                      </a:solidFill>
+                      <a:prstDash val="solid"/>
+                      <a:round/>
+                      <a:headEnd type="none" w="med" len="med"/>
+                      <a:tailEnd type="none" w="med" len="med"/>
+                    </a:lnB>
+                    <a:solidFill>
+                      <a:srgbClr val="FFFBEB"/>
+                    </a:solidFill>
+                  </a:tcPr>
+                </a:tc>
+                <a:tc>
+                  <a:txBody>
+                    <a:bodyPr/>
+                    <a:lstStyle/>
+                    <a:p>
+                      <a:pPr algn="l" indent="0" marL="0">
+                        <a:buNone/>
+                      </a:pPr>
+                      <a:r>
+                        <a:rPr lang="en-US" sz="1000" b="1" dirty="0">
+                          <a:solidFill>
+                            <a:srgbClr val="0B1530"/>
+                          </a:solidFill>
+                          <a:latin typeface="Calibri" pitchFamily="34" charset="0"/>
+                          <a:ea typeface="Calibri" pitchFamily="34" charset="-122"/>
+                          <a:cs typeface="Calibri" pitchFamily="34" charset="-120"/>
+                        </a:rPr>
+                        <a:t>CTO + Platform sponsor</a:t>
+                      </a:r>
+                      <a:endParaRPr lang="en-US" sz="1000" dirty="0">
+                        <a:latin typeface="Calibri" charset="0"/>
+                        <a:ea typeface="Calibri" charset="0"/>
+                        <a:cs typeface="Calibri" charset="0"/>
+                      </a:endParaRPr>
+                    </a:p>
+                  </a:txBody>
+                  <a:tcPr marL="73152" marR="73152" marT="73152" marB="73152" anchor="ctr">
+                    <a:lnL w="6350" cap="flat" cmpd="sng" algn="ctr">
+                      <a:solidFill>
+                        <a:srgbClr val="E2E8F0"/>
+                      </a:solidFill>
+                      <a:prstDash val="solid"/>
+                      <a:round/>
+                      <a:headEnd type="none" w="med" len="med"/>
+                      <a:tailEnd type="none" w="med" len="med"/>
+                    </a:lnL>
+                    <a:lnR w="6350" cap="flat" cmpd="sng" algn="ctr">
+                      <a:solidFill>
+                        <a:srgbClr val="E2E8F0"/>
+                      </a:solidFill>
+                      <a:prstDash val="solid"/>
+                      <a:round/>
+                      <a:headEnd type="none" w="med" len="med"/>
+                      <a:tailEnd type="none" w="med" len="med"/>
+                    </a:lnR>
+                    <a:lnT w="6350" cap="flat" cmpd="sng" algn="ctr">
+                      <a:solidFill>
+                        <a:srgbClr val="E2E8F0"/>
+                      </a:solidFill>
+                      <a:prstDash val="solid"/>
+                      <a:round/>
+                      <a:headEnd type="none" w="med" len="med"/>
+                      <a:tailEnd type="none" w="med" len="med"/>
+                    </a:lnT>
+                    <a:lnB w="6350" cap="flat" cmpd="sng" algn="ctr">
+                      <a:solidFill>
+                        <a:srgbClr val="E2E8F0"/>
+                      </a:solidFill>
+                      <a:prstDash val="solid"/>
+                      <a:round/>
+                      <a:headEnd type="none" w="med" len="med"/>
+                      <a:tailEnd type="none" w="med" len="med"/>
+                    </a:lnB>
+                    <a:solidFill>
+                      <a:srgbClr val="FFFBEB"/>
+                    </a:solidFill>
+                  </a:tcPr>
+                </a:tc>
+              </a:tr>
+              <a:tr h="566928">
+                <a:tc>
+                  <a:txBody>
+                    <a:bodyPr/>
+                    <a:lstStyle/>
+                    <a:p>
+                      <a:pPr algn="l" indent="0" marL="0">
+                        <a:buNone/>
+                      </a:pPr>
+                      <a:r>
+                        <a:rPr lang="en-US" sz="1000" b="1" dirty="0">
+                          <a:solidFill>
+                            <a:srgbClr val="0B1530"/>
+                          </a:solidFill>
+                          <a:latin typeface="Calibri" pitchFamily="34" charset="0"/>
+                          <a:ea typeface="Calibri" pitchFamily="34" charset="-122"/>
+                          <a:cs typeface="Calibri" pitchFamily="34" charset="-120"/>
+                        </a:rPr>
+                        <a:t>Group AI embedding dependency</a:t>
+                      </a:r>
+                      <a:endParaRPr lang="en-US" sz="1000" dirty="0">
+                        <a:latin typeface="Calibri" charset="0"/>
+                        <a:ea typeface="Calibri" charset="0"/>
+                        <a:cs typeface="Calibri" charset="0"/>
+                      </a:endParaRPr>
+                    </a:p>
+                  </a:txBody>
+                  <a:tcPr marL="73152" marR="73152" marT="73152" marB="73152" anchor="ctr">
+                    <a:lnL w="6350" cap="flat" cmpd="sng" algn="ctr">
+                      <a:solidFill>
+                        <a:srgbClr val="E2E8F0"/>
+                      </a:solidFill>
+                      <a:prstDash val="solid"/>
+                      <a:round/>
+                      <a:headEnd type="none" w="med" len="med"/>
+                      <a:tailEnd type="none" w="med" len="med"/>
+                    </a:lnL>
+                    <a:lnR w="6350" cap="flat" cmpd="sng" algn="ctr">
+                      <a:solidFill>
+                        <a:srgbClr val="E2E8F0"/>
+                      </a:solidFill>
+                      <a:prstDash val="solid"/>
+                      <a:round/>
+                      <a:headEnd type="none" w="med" len="med"/>
+                      <a:tailEnd type="none" w="med" len="med"/>
+                    </a:lnR>
+                    <a:lnT w="6350" cap="flat" cmpd="sng" algn="ctr">
+                      <a:solidFill>
+                        <a:srgbClr val="E2E8F0"/>
+                      </a:solidFill>
+                      <a:prstDash val="solid"/>
+                      <a:round/>
+                      <a:headEnd type="none" w="med" len="med"/>
+                      <a:tailEnd type="none" w="med" len="med"/>
+                    </a:lnT>
+                    <a:lnB w="6350" cap="flat" cmpd="sng" algn="ctr">
+                      <a:solidFill>
+                        <a:srgbClr val="E2E8F0"/>
+                      </a:solidFill>
+                      <a:prstDash val="solid"/>
+                      <a:round/>
+                      <a:headEnd type="none" w="med" len="med"/>
+                      <a:tailEnd type="none" w="med" len="med"/>
+                    </a:lnB>
+                    <a:solidFill>
+                      <a:srgbClr val="FFFBEB"/>
+                    </a:solidFill>
+                  </a:tcPr>
+                </a:tc>
+                <a:tc>
+                  <a:txBody>
+                    <a:bodyPr/>
+                    <a:lstStyle/>
+                    <a:p>
+                      <a:pPr algn="l" indent="0" marL="0">
+                        <a:buNone/>
+                      </a:pPr>
+                      <a:r>
+                        <a:rPr lang="en-US" sz="1000" dirty="0">
+                          <a:solidFill>
+                            <a:srgbClr val="475569"/>
+                          </a:solidFill>
+                          <a:latin typeface="Calibri" pitchFamily="34" charset="0"/>
+                          <a:ea typeface="Calibri" pitchFamily="34" charset="-122"/>
+                          <a:cs typeface="Calibri" pitchFamily="34" charset="-120"/>
+                        </a:rPr>
+                        <a:t>Approved embedding path, lifecycle ownership and service commitment not yet formalised.</a:t>
+                      </a:r>
+                      <a:endParaRPr lang="en-US" sz="1000" dirty="0">
+                        <a:latin typeface="Calibri" charset="0"/>
+                        <a:ea typeface="Calibri" charset="0"/>
+                        <a:cs typeface="Calibri" charset="0"/>
+                      </a:endParaRPr>
+                    </a:p>
+                  </a:txBody>
+                  <a:tcPr marL="73152" marR="73152" marT="73152" marB="73152" anchor="ctr">
+                    <a:lnL w="6350" cap="flat" cmpd="sng" algn="ctr">
+                      <a:solidFill>
+                        <a:srgbClr val="E2E8F0"/>
+                      </a:solidFill>
+                      <a:prstDash val="solid"/>
+                      <a:round/>
+                      <a:headEnd type="none" w="med" len="med"/>
+                      <a:tailEnd type="none" w="med" len="med"/>
+                    </a:lnL>
+                    <a:lnR w="6350" cap="flat" cmpd="sng" algn="ctr">
+                      <a:solidFill>
+                        <a:srgbClr val="E2E8F0"/>
+                      </a:solidFill>
+                      <a:prstDash val="solid"/>
+                      <a:round/>
+                      <a:headEnd type="none" w="med" len="med"/>
+                      <a:tailEnd type="none" w="med" len="med"/>
+                    </a:lnR>
+                    <a:lnT w="6350" cap="flat" cmpd="sng" algn="ctr">
+                      <a:solidFill>
+                        <a:srgbClr val="E2E8F0"/>
+                      </a:solidFill>
+                      <a:prstDash val="solid"/>
+                      <a:round/>
+                      <a:headEnd type="none" w="med" len="med"/>
+                      <a:tailEnd type="none" w="med" len="med"/>
+                    </a:lnT>
+                    <a:lnB w="6350" cap="flat" cmpd="sng" algn="ctr">
+                      <a:solidFill>
+                        <a:srgbClr val="E2E8F0"/>
+                      </a:solidFill>
+                      <a:prstDash val="solid"/>
+                      <a:round/>
+                      <a:headEnd type="none" w="med" len="med"/>
+                      <a:tailEnd type="none" w="med" len="med"/>
+                    </a:lnB>
+                    <a:solidFill>
+                      <a:srgbClr val="FFFBEB"/>
+                    </a:solidFill>
+                  </a:tcPr>
+                </a:tc>
+                <a:tc>
+                  <a:txBody>
+                    <a:bodyPr/>
+                    <a:lstStyle/>
+                    <a:p>
+                      <a:pPr algn="l" indent="0" marL="0">
+                        <a:buNone/>
+                      </a:pPr>
+                      <a:r>
+                        <a:rPr lang="en-US" sz="1000" dirty="0">
+                          <a:solidFill>
+                            <a:srgbClr val="0B1530"/>
+                          </a:solidFill>
+                          <a:latin typeface="Calibri" pitchFamily="34" charset="0"/>
+                          <a:ea typeface="Calibri" pitchFamily="34" charset="-122"/>
+                          <a:cs typeface="Calibri" pitchFamily="34" charset="-120"/>
+                        </a:rPr>
+                        <a:t>Confirm Group AI as model-lifecycle owner; approved model; MCP access path; refresh model + MVP SLA.</a:t>
+                      </a:r>
+                      <a:endParaRPr lang="en-US" sz="1000" dirty="0">
+                        <a:latin typeface="Calibri" charset="0"/>
+                        <a:ea typeface="Calibri" charset="0"/>
+                        <a:cs typeface="Calibri" charset="0"/>
+                      </a:endParaRPr>
+                    </a:p>
+                  </a:txBody>
+                  <a:tcPr marL="73152" marR="73152" marT="73152" marB="73152" anchor="ctr">
+                    <a:lnL w="6350" cap="flat" cmpd="sng" algn="ctr">
+                      <a:solidFill>
+                        <a:srgbClr val="E2E8F0"/>
+                      </a:solidFill>
+                      <a:prstDash val="solid"/>
+                      <a:round/>
+                      <a:headEnd type="none" w="med" len="med"/>
+                      <a:tailEnd type="none" w="med" len="med"/>
+                    </a:lnL>
+                    <a:lnR w="6350" cap="flat" cmpd="sng" algn="ctr">
+                      <a:solidFill>
+                        <a:srgbClr val="E2E8F0"/>
+                      </a:solidFill>
+                      <a:prstDash val="solid"/>
+                      <a:round/>
+                      <a:headEnd type="none" w="med" len="med"/>
+                      <a:tailEnd type="none" w="med" len="med"/>
+                    </a:lnR>
+                    <a:lnT w="6350" cap="flat" cmpd="sng" algn="ctr">
+                      <a:solidFill>
+                        <a:srgbClr val="E2E8F0"/>
+                      </a:solidFill>
+                      <a:prstDash val="solid"/>
+                      <a:round/>
+                      <a:headEnd type="none" w="med" len="med"/>
+                      <a:tailEnd type="none" w="med" len="med"/>
+                    </a:lnT>
+                    <a:lnB w="6350" cap="flat" cmpd="sng" algn="ctr">
+                      <a:solidFill>
+                        <a:srgbClr val="E2E8F0"/>
+                      </a:solidFill>
+                      <a:prstDash val="solid"/>
+                      <a:round/>
+                      <a:headEnd type="none" w="med" len="med"/>
+                      <a:tailEnd type="none" w="med" len="med"/>
+                    </a:lnB>
+                    <a:solidFill>
+                      <a:srgbClr val="FFFBEB"/>
+                    </a:solidFill>
+                  </a:tcPr>
+                </a:tc>
+                <a:tc>
+                  <a:txBody>
+                    <a:bodyPr/>
+                    <a:lstStyle/>
+                    <a:p>
+                      <a:pPr algn="l" indent="0" marL="0">
+                        <a:buNone/>
+                      </a:pPr>
+                      <a:r>
+                        <a:rPr lang="en-US" sz="1000" i="1" dirty="0">
+                          <a:solidFill>
+                            <a:srgbClr val="475569"/>
+                          </a:solidFill>
+                          <a:latin typeface="Calibri" pitchFamily="34" charset="0"/>
+                          <a:ea typeface="Calibri" pitchFamily="34" charset="-122"/>
+                          <a:cs typeface="Calibri" pitchFamily="34" charset="-120"/>
+                        </a:rPr>
+                        <a:t>Removes the keystone dependency for VectorDBaaS and any semantic service.</a:t>
+                      </a:r>
+                      <a:endParaRPr lang="en-US" sz="1000" dirty="0">
+                        <a:latin typeface="Calibri" charset="0"/>
+                        <a:ea typeface="Calibri" charset="0"/>
+                        <a:cs typeface="Calibri" charset="0"/>
+                      </a:endParaRPr>
+                    </a:p>
+                  </a:txBody>
+                  <a:tcPr marL="73152" marR="73152" marT="73152" marB="73152" anchor="ctr">
+                    <a:lnL w="6350" cap="flat" cmpd="sng" algn="ctr">
+                      <a:solidFill>
+                        <a:srgbClr val="E2E8F0"/>
+                      </a:solidFill>
+                      <a:prstDash val="solid"/>
+                      <a:round/>
+                      <a:headEnd type="none" w="med" len="med"/>
+                      <a:tailEnd type="none" w="med" len="med"/>
+                    </a:lnL>
+                    <a:lnR w="6350" cap="flat" cmpd="sng" algn="ctr">
+                      <a:solidFill>
+                        <a:srgbClr val="E2E8F0"/>
+                      </a:solidFill>
+                      <a:prstDash val="solid"/>
+                      <a:round/>
+                      <a:headEnd type="none" w="med" len="med"/>
+                      <a:tailEnd type="none" w="med" len="med"/>
+                    </a:lnR>
+                    <a:lnT w="6350" cap="flat" cmpd="sng" algn="ctr">
+                      <a:solidFill>
+                        <a:srgbClr val="E2E8F0"/>
+                      </a:solidFill>
+                      <a:prstDash val="solid"/>
+                      <a:round/>
+                      <a:headEnd type="none" w="med" len="med"/>
+                      <a:tailEnd type="none" w="med" len="med"/>
+                    </a:lnT>
+                    <a:lnB w="6350" cap="flat" cmpd="sng" algn="ctr">
+                      <a:solidFill>
+                        <a:srgbClr val="E2E8F0"/>
+                      </a:solidFill>
+                      <a:prstDash val="solid"/>
+                      <a:round/>
+                      <a:headEnd type="none" w="med" len="med"/>
+                      <a:tailEnd type="none" w="med" len="med"/>
+                    </a:lnB>
+                    <a:solidFill>
+                      <a:srgbClr val="FFFBEB"/>
+                    </a:solidFill>
+                  </a:tcPr>
+                </a:tc>
+                <a:tc>
+                  <a:txBody>
+                    <a:bodyPr/>
+                    <a:lstStyle/>
+                    <a:p>
+                      <a:pPr algn="ctr" indent="0" marL="0">
+                        <a:buNone/>
+                      </a:pPr>
+                      <a:r>
+                        <a:rPr lang="en-US" sz="1000" b="1" dirty="0">
+                          <a:solidFill>
+                            <a:srgbClr val="92400E"/>
+                          </a:solidFill>
+                          <a:latin typeface="Calibri" pitchFamily="34" charset="0"/>
+                          <a:ea typeface="Calibri" pitchFamily="34" charset="-122"/>
+                          <a:cs typeface="Calibri" pitchFamily="34" charset="-120"/>
+                        </a:rPr>
+                        <a:t>Immediate</a:t>
+                      </a:r>
+                      <a:endParaRPr lang="en-US" sz="1000" dirty="0">
+                        <a:latin typeface="Calibri" charset="0"/>
+                        <a:ea typeface="Calibri" charset="0"/>
+                        <a:cs typeface="Calibri" charset="0"/>
+                      </a:endParaRPr>
+                    </a:p>
+                  </a:txBody>
+                  <a:tcPr marL="73152" marR="73152" marT="73152" marB="73152" anchor="ctr">
+                    <a:lnL w="6350" cap="flat" cmpd="sng" algn="ctr">
+                      <a:solidFill>
+                        <a:srgbClr val="E2E8F0"/>
+                      </a:solidFill>
+                      <a:prstDash val="solid"/>
+                      <a:round/>
+                      <a:headEnd type="none" w="med" len="med"/>
+                      <a:tailEnd type="none" w="med" len="med"/>
+                    </a:lnL>
+                    <a:lnR w="6350" cap="flat" cmpd="sng" algn="ctr">
+                      <a:solidFill>
+                        <a:srgbClr val="E2E8F0"/>
+                      </a:solidFill>
+                      <a:prstDash val="solid"/>
+                      <a:round/>
+                      <a:headEnd type="none" w="med" len="med"/>
+                      <a:tailEnd type="none" w="med" len="med"/>
+                    </a:lnR>
+                    <a:lnT w="6350" cap="flat" cmpd="sng" algn="ctr">
+                      <a:solidFill>
+                        <a:srgbClr val="E2E8F0"/>
+                      </a:solidFill>
+                      <a:prstDash val="solid"/>
+                      <a:round/>
+                      <a:headEnd type="none" w="med" len="med"/>
+                      <a:tailEnd type="none" w="med" len="med"/>
+                    </a:lnT>
+                    <a:lnB w="6350" cap="flat" cmpd="sng" algn="ctr">
+                      <a:solidFill>
+                        <a:srgbClr val="E2E8F0"/>
+                      </a:solidFill>
+                      <a:prstDash val="solid"/>
+                      <a:round/>
+                      <a:headEnd type="none" w="med" len="med"/>
+                      <a:tailEnd type="none" w="med" len="med"/>
+                    </a:lnB>
+                    <a:solidFill>
+                      <a:srgbClr val="FFFBEB"/>
+                    </a:solidFill>
+                  </a:tcPr>
+                </a:tc>
+                <a:tc>
+                  <a:txBody>
+                    <a:bodyPr/>
+                    <a:lstStyle/>
+                    <a:p>
+                      <a:pPr algn="l" indent="0" marL="0">
+                        <a:buNone/>
+                      </a:pPr>
+                      <a:r>
+                        <a:rPr lang="en-US" sz="1000" b="1" dirty="0">
+                          <a:solidFill>
+                            <a:srgbClr val="0B1530"/>
+                          </a:solidFill>
+                          <a:latin typeface="Calibri" pitchFamily="34" charset="0"/>
+                          <a:ea typeface="Calibri" pitchFamily="34" charset="-122"/>
+                          <a:cs typeface="Calibri" pitchFamily="34" charset="-120"/>
+                        </a:rPr>
+                        <a:t>CTO + Group AI Head</a:t>
+                      </a:r>
+                      <a:endParaRPr lang="en-US" sz="1000" dirty="0">
+                        <a:latin typeface="Calibri" charset="0"/>
+                        <a:ea typeface="Calibri" charset="0"/>
+                        <a:cs typeface="Calibri" charset="0"/>
+                      </a:endParaRPr>
+                    </a:p>
+                  </a:txBody>
+                  <a:tcPr marL="73152" marR="73152" marT="73152" marB="73152" anchor="ctr">
+                    <a:lnL w="6350" cap="flat" cmpd="sng" algn="ctr">
+                      <a:solidFill>
+                        <a:srgbClr val="E2E8F0"/>
+                      </a:solidFill>
+                      <a:prstDash val="solid"/>
+                      <a:round/>
+                      <a:headEnd type="none" w="med" len="med"/>
+                      <a:tailEnd type="none" w="med" len="med"/>
+                    </a:lnL>
+                    <a:lnR w="6350" cap="flat" cmpd="sng" algn="ctr">
+                      <a:solidFill>
+                        <a:srgbClr val="E2E8F0"/>
+                      </a:solidFill>
+                      <a:prstDash val="solid"/>
+                      <a:round/>
+                      <a:headEnd type="none" w="med" len="med"/>
+                      <a:tailEnd type="none" w="med" len="med"/>
+                    </a:lnR>
+                    <a:lnT w="6350" cap="flat" cmpd="sng" algn="ctr">
+                      <a:solidFill>
+                        <a:srgbClr val="E2E8F0"/>
+                      </a:solidFill>
+                      <a:prstDash val="solid"/>
+                      <a:round/>
+                      <a:headEnd type="none" w="med" len="med"/>
+                      <a:tailEnd type="none" w="med" len="med"/>
+                    </a:lnT>
+                    <a:lnB w="6350" cap="flat" cmpd="sng" algn="ctr">
+                      <a:solidFill>
+                        <a:srgbClr val="E2E8F0"/>
+                      </a:solidFill>
+                      <a:prstDash val="solid"/>
+                      <a:round/>
+                      <a:headEnd type="none" w="med" len="med"/>
+                      <a:tailEnd type="none" w="med" len="med"/>
+                    </a:lnB>
+                    <a:solidFill>
+                      <a:srgbClr val="FFFBEB"/>
+                    </a:solidFill>
+                  </a:tcPr>
+                </a:tc>
+              </a:tr>
+              <a:tr h="566928">
+                <a:tc>
+                  <a:txBody>
+                    <a:bodyPr/>
+                    <a:lstStyle/>
+                    <a:p>
+                      <a:pPr algn="l" indent="0" marL="0">
+                        <a:buNone/>
+                      </a:pPr>
+                      <a:r>
+                        <a:rPr lang="en-US" sz="1000" b="1" dirty="0">
+                          <a:solidFill>
+                            <a:srgbClr val="0B1530"/>
+                          </a:solidFill>
+                          <a:latin typeface="Calibri" pitchFamily="34" charset="0"/>
+                          <a:ea typeface="Calibri" pitchFamily="34" charset="-122"/>
+                          <a:cs typeface="Calibri" pitchFamily="34" charset="-120"/>
+                        </a:rPr>
+                        <a:t>Platform engineering capacity</a:t>
+                      </a:r>
+                      <a:endParaRPr lang="en-US" sz="1000" dirty="0">
+                        <a:latin typeface="Calibri" charset="0"/>
+                        <a:ea typeface="Calibri" charset="0"/>
+                        <a:cs typeface="Calibri" charset="0"/>
+                      </a:endParaRPr>
+                    </a:p>
+                  </a:txBody>
+                  <a:tcPr marL="73152" marR="73152" marT="73152" marB="73152" anchor="ctr">
+                    <a:lnL w="6350" cap="flat" cmpd="sng" algn="ctr">
+                      <a:solidFill>
+                        <a:srgbClr val="E2E8F0"/>
+                      </a:solidFill>
+                      <a:prstDash val="solid"/>
+                      <a:round/>
+                      <a:headEnd type="none" w="med" len="med"/>
+                      <a:tailEnd type="none" w="med" len="med"/>
+                    </a:lnL>
+                    <a:lnR w="6350" cap="flat" cmpd="sng" algn="ctr">
+                      <a:solidFill>
+                        <a:srgbClr val="E2E8F0"/>
+                      </a:solidFill>
+                      <a:prstDash val="solid"/>
+                      <a:round/>
+                      <a:headEnd type="none" w="med" len="med"/>
+                      <a:tailEnd type="none" w="med" len="med"/>
+                    </a:lnR>
+                    <a:lnT w="6350" cap="flat" cmpd="sng" algn="ctr">
+                      <a:solidFill>
+                        <a:srgbClr val="E2E8F0"/>
+                      </a:solidFill>
+                      <a:prstDash val="solid"/>
+                      <a:round/>
+                      <a:headEnd type="none" w="med" len="med"/>
+                      <a:tailEnd type="none" w="med" len="med"/>
+                    </a:lnT>
+                    <a:lnB w="6350" cap="flat" cmpd="sng" algn="ctr">
+                      <a:solidFill>
+                        <a:srgbClr val="E2E8F0"/>
+                      </a:solidFill>
+                      <a:prstDash val="solid"/>
+                      <a:round/>
+                      <a:headEnd type="none" w="med" len="med"/>
+                      <a:tailEnd type="none" w="med" len="med"/>
+                    </a:lnB>
+                    <a:solidFill>
+                      <a:srgbClr val="FFFBEB"/>
+                    </a:solidFill>
+                  </a:tcPr>
+                </a:tc>
+                <a:tc>
+                  <a:txBody>
+                    <a:bodyPr/>
+                    <a:lstStyle/>
+                    <a:p>
+                      <a:pPr algn="l" indent="0" marL="0">
+                        <a:buNone/>
+                      </a:pPr>
+                      <a:r>
+                        <a:rPr lang="en-US" sz="1000" dirty="0">
+                          <a:solidFill>
+                            <a:srgbClr val="475569"/>
+                          </a:solidFill>
+                          <a:latin typeface="Calibri" pitchFamily="34" charset="0"/>
+                          <a:ea typeface="Calibri" pitchFamily="34" charset="-122"/>
+                          <a:cs typeface="Calibri" pitchFamily="34" charset="-120"/>
+                        </a:rPr>
+                        <a:t>Delivery will stall if no platform engineering team is assigned to the reference platform.</a:t>
+                      </a:r>
+                      <a:endParaRPr lang="en-US" sz="1000" dirty="0">
+                        <a:latin typeface="Calibri" charset="0"/>
+                        <a:ea typeface="Calibri" charset="0"/>
+                        <a:cs typeface="Calibri" charset="0"/>
+                      </a:endParaRPr>
+                    </a:p>
+                  </a:txBody>
+                  <a:tcPr marL="73152" marR="73152" marT="73152" marB="73152" anchor="ctr">
+                    <a:lnL w="6350" cap="flat" cmpd="sng" algn="ctr">
+                      <a:solidFill>
+                        <a:srgbClr val="E2E8F0"/>
+                      </a:solidFill>
+                      <a:prstDash val="solid"/>
+                      <a:round/>
+                      <a:headEnd type="none" w="med" len="med"/>
+                      <a:tailEnd type="none" w="med" len="med"/>
+                    </a:lnL>
+                    <a:lnR w="6350" cap="flat" cmpd="sng" algn="ctr">
+                      <a:solidFill>
+                        <a:srgbClr val="E2E8F0"/>
+                      </a:solidFill>
+                      <a:prstDash val="solid"/>
+                      <a:round/>
+                      <a:headEnd type="none" w="med" len="med"/>
+                      <a:tailEnd type="none" w="med" len="med"/>
+                    </a:lnR>
+                    <a:lnT w="6350" cap="flat" cmpd="sng" algn="ctr">
+                      <a:solidFill>
+                        <a:srgbClr val="E2E8F0"/>
+                      </a:solidFill>
+                      <a:prstDash val="solid"/>
+                      <a:round/>
+                      <a:headEnd type="none" w="med" len="med"/>
+                      <a:tailEnd type="none" w="med" len="med"/>
+                    </a:lnT>
+                    <a:lnB w="6350" cap="flat" cmpd="sng" algn="ctr">
+                      <a:solidFill>
+                        <a:srgbClr val="E2E8F0"/>
+                      </a:solidFill>
+                      <a:prstDash val="solid"/>
+                      <a:round/>
+                      <a:headEnd type="none" w="med" len="med"/>
+                      <a:tailEnd type="none" w="med" len="med"/>
+                    </a:lnB>
+                    <a:solidFill>
+                      <a:srgbClr val="FFFBEB"/>
+                    </a:solidFill>
+                  </a:tcPr>
+                </a:tc>
+                <a:tc>
+                  <a:txBody>
+                    <a:bodyPr/>
+                    <a:lstStyle/>
+                    <a:p>
+                      <a:pPr algn="l" indent="0" marL="0">
+                        <a:buNone/>
+                      </a:pPr>
+                      <a:r>
+                        <a:rPr lang="en-US" sz="1000" dirty="0">
+                          <a:solidFill>
+                            <a:srgbClr val="0B1530"/>
+                          </a:solidFill>
+                          <a:latin typeface="Calibri" pitchFamily="34" charset="0"/>
+                          <a:ea typeface="Calibri" pitchFamily="34" charset="-122"/>
+                          <a:cs typeface="Calibri" pitchFamily="34" charset="-120"/>
+                        </a:rPr>
+                        <a:t>Commit named platform engineering capacity for the MVP.</a:t>
+                      </a:r>
+                      <a:endParaRPr lang="en-US" sz="1000" dirty="0">
+                        <a:latin typeface="Calibri" charset="0"/>
+                        <a:ea typeface="Calibri" charset="0"/>
+                        <a:cs typeface="Calibri" charset="0"/>
+                      </a:endParaRPr>
+                    </a:p>
+                  </a:txBody>
+                  <a:tcPr marL="73152" marR="73152" marT="73152" marB="73152" anchor="ctr">
+                    <a:lnL w="6350" cap="flat" cmpd="sng" algn="ctr">
+                      <a:solidFill>
+                        <a:srgbClr val="E2E8F0"/>
+                      </a:solidFill>
+                      <a:prstDash val="solid"/>
+                      <a:round/>
+                      <a:headEnd type="none" w="med" len="med"/>
+                      <a:tailEnd type="none" w="med" len="med"/>
+                    </a:lnL>
+                    <a:lnR w="6350" cap="flat" cmpd="sng" algn="ctr">
+                      <a:solidFill>
+                        <a:srgbClr val="E2E8F0"/>
+                      </a:solidFill>
+                      <a:prstDash val="solid"/>
+                      <a:round/>
+                      <a:headEnd type="none" w="med" len="med"/>
+                      <a:tailEnd type="none" w="med" len="med"/>
+                    </a:lnR>
+                    <a:lnT w="6350" cap="flat" cmpd="sng" algn="ctr">
+                      <a:solidFill>
+                        <a:srgbClr val="E2E8F0"/>
+                      </a:solidFill>
+                      <a:prstDash val="solid"/>
+                      <a:round/>
+                      <a:headEnd type="none" w="med" len="med"/>
+                      <a:tailEnd type="none" w="med" len="med"/>
+                    </a:lnT>
+                    <a:lnB w="6350" cap="flat" cmpd="sng" algn="ctr">
+                      <a:solidFill>
+                        <a:srgbClr val="E2E8F0"/>
+                      </a:solidFill>
+                      <a:prstDash val="solid"/>
+                      <a:round/>
+                      <a:headEnd type="none" w="med" len="med"/>
+                      <a:tailEnd type="none" w="med" len="med"/>
+                    </a:lnB>
+                    <a:solidFill>
+                      <a:srgbClr val="FFFBEB"/>
+                    </a:solidFill>
+                  </a:tcPr>
+                </a:tc>
+                <a:tc>
+                  <a:txBody>
+                    <a:bodyPr/>
+                    <a:lstStyle/>
+                    <a:p>
+                      <a:pPr algn="l" indent="0" marL="0">
+                        <a:buNone/>
+                      </a:pPr>
+                      <a:r>
+                        <a:rPr lang="en-US" sz="1000" i="1" dirty="0">
+                          <a:solidFill>
+                            <a:srgbClr val="475569"/>
+                          </a:solidFill>
+                          <a:latin typeface="Calibri" pitchFamily="34" charset="0"/>
+                          <a:ea typeface="Calibri" pitchFamily="34" charset="-122"/>
+                          <a:cs typeface="Calibri" pitchFamily="34" charset="-120"/>
+                        </a:rPr>
+                        <a:t>Without committed engineering hands, the roadmap remains a paper plan.</a:t>
+                      </a:r>
+                      <a:endParaRPr lang="en-US" sz="1000" dirty="0">
+                        <a:latin typeface="Calibri" charset="0"/>
+                        <a:ea typeface="Calibri" charset="0"/>
+                        <a:cs typeface="Calibri" charset="0"/>
+                      </a:endParaRPr>
+                    </a:p>
+                  </a:txBody>
+                  <a:tcPr marL="73152" marR="73152" marT="73152" marB="73152" anchor="ctr">
+                    <a:lnL w="6350" cap="flat" cmpd="sng" algn="ctr">
+                      <a:solidFill>
+                        <a:srgbClr val="E2E8F0"/>
+                      </a:solidFill>
+                      <a:prstDash val="solid"/>
+                      <a:round/>
+                      <a:headEnd type="none" w="med" len="med"/>
+                      <a:tailEnd type="none" w="med" len="med"/>
+                    </a:lnL>
+                    <a:lnR w="6350" cap="flat" cmpd="sng" algn="ctr">
+                      <a:solidFill>
+                        <a:srgbClr val="E2E8F0"/>
+                      </a:solidFill>
+                      <a:prstDash val="solid"/>
+                      <a:round/>
+                      <a:headEnd type="none" w="med" len="med"/>
+                      <a:tailEnd type="none" w="med" len="med"/>
+                    </a:lnR>
+                    <a:lnT w="6350" cap="flat" cmpd="sng" algn="ctr">
+                      <a:solidFill>
+                        <a:srgbClr val="E2E8F0"/>
+                      </a:solidFill>
+                      <a:prstDash val="solid"/>
+                      <a:round/>
+                      <a:headEnd type="none" w="med" len="med"/>
+                      <a:tailEnd type="none" w="med" len="med"/>
+                    </a:lnT>
+                    <a:lnB w="6350" cap="flat" cmpd="sng" algn="ctr">
+                      <a:solidFill>
+                        <a:srgbClr val="E2E8F0"/>
+                      </a:solidFill>
+                      <a:prstDash val="solid"/>
+                      <a:round/>
+                      <a:headEnd type="none" w="med" len="med"/>
+                      <a:tailEnd type="none" w="med" len="med"/>
+                    </a:lnB>
+                    <a:solidFill>
+                      <a:srgbClr val="FFFBEB"/>
+                    </a:solidFill>
+                  </a:tcPr>
+                </a:tc>
+                <a:tc>
+                  <a:txBody>
+                    <a:bodyPr/>
+                    <a:lstStyle/>
+                    <a:p>
+                      <a:pPr algn="ctr" indent="0" marL="0">
+                        <a:buNone/>
+                      </a:pPr>
+                      <a:r>
+                        <a:rPr lang="en-US" sz="1000" b="1" dirty="0">
+                          <a:solidFill>
+                            <a:srgbClr val="92400E"/>
+                          </a:solidFill>
+                          <a:latin typeface="Calibri" pitchFamily="34" charset="0"/>
+                          <a:ea typeface="Calibri" pitchFamily="34" charset="-122"/>
+                          <a:cs typeface="Calibri" pitchFamily="34" charset="-120"/>
+                        </a:rPr>
+                        <a:t>Immediate</a:t>
+                      </a:r>
+                      <a:endParaRPr lang="en-US" sz="1000" dirty="0">
+                        <a:latin typeface="Calibri" charset="0"/>
+                        <a:ea typeface="Calibri" charset="0"/>
+                        <a:cs typeface="Calibri" charset="0"/>
+                      </a:endParaRPr>
+                    </a:p>
+                  </a:txBody>
+                  <a:tcPr marL="73152" marR="73152" marT="73152" marB="73152" anchor="ctr">
+                    <a:lnL w="6350" cap="flat" cmpd="sng" algn="ctr">
+                      <a:solidFill>
+                        <a:srgbClr val="E2E8F0"/>
+                      </a:solidFill>
+                      <a:prstDash val="solid"/>
+                      <a:round/>
+                      <a:headEnd type="none" w="med" len="med"/>
+                      <a:tailEnd type="none" w="med" len="med"/>
+                    </a:lnL>
+                    <a:lnR w="6350" cap="flat" cmpd="sng" algn="ctr">
+                      <a:solidFill>
+                        <a:srgbClr val="E2E8F0"/>
+                      </a:solidFill>
+                      <a:prstDash val="solid"/>
+                      <a:round/>
+                      <a:headEnd type="none" w="med" len="med"/>
+                      <a:tailEnd type="none" w="med" len="med"/>
+                    </a:lnR>
+                    <a:lnT w="6350" cap="flat" cmpd="sng" algn="ctr">
+                      <a:solidFill>
+                        <a:srgbClr val="E2E8F0"/>
+                      </a:solidFill>
+                      <a:prstDash val="solid"/>
+                      <a:round/>
+                      <a:headEnd type="none" w="med" len="med"/>
+                      <a:tailEnd type="none" w="med" len="med"/>
+                    </a:lnT>
+                    <a:lnB w="6350" cap="flat" cmpd="sng" algn="ctr">
+                      <a:solidFill>
+                        <a:srgbClr val="E2E8F0"/>
+                      </a:solidFill>
+                      <a:prstDash val="solid"/>
+                      <a:round/>
+                      <a:headEnd type="none" w="med" len="med"/>
+                      <a:tailEnd type="none" w="med" len="med"/>
+                    </a:lnB>
+                    <a:solidFill>
+                      <a:srgbClr val="FFFBEB"/>
+                    </a:solidFill>
+                  </a:tcPr>
+                </a:tc>
+                <a:tc>
+                  <a:txBody>
+                    <a:bodyPr/>
+                    <a:lstStyle/>
+                    <a:p>
+                      <a:pPr algn="l" indent="0" marL="0">
+                        <a:buNone/>
+                      </a:pPr>
+                      <a:r>
+                        <a:rPr lang="en-US" sz="1000" b="1" dirty="0">
+                          <a:solidFill>
+                            <a:srgbClr val="0B1530"/>
+                          </a:solidFill>
+                          <a:latin typeface="Calibri" pitchFamily="34" charset="0"/>
+                          <a:ea typeface="Calibri" pitchFamily="34" charset="-122"/>
+                          <a:cs typeface="Calibri" pitchFamily="34" charset="-120"/>
+                        </a:rPr>
+                        <a:t>Platform sponsor + CTO</a:t>
+                      </a:r>
+                      <a:endParaRPr lang="en-US" sz="1000" dirty="0">
+                        <a:latin typeface="Calibri" charset="0"/>
+                        <a:ea typeface="Calibri" charset="0"/>
+                        <a:cs typeface="Calibri" charset="0"/>
+                      </a:endParaRPr>
+                    </a:p>
+                  </a:txBody>
+                  <a:tcPr marL="73152" marR="73152" marT="73152" marB="73152" anchor="ctr">
+                    <a:lnL w="6350" cap="flat" cmpd="sng" algn="ctr">
+                      <a:solidFill>
+                        <a:srgbClr val="E2E8F0"/>
+                      </a:solidFill>
+                      <a:prstDash val="solid"/>
+                      <a:round/>
+                      <a:headEnd type="none" w="med" len="med"/>
+                      <a:tailEnd type="none" w="med" len="med"/>
+                    </a:lnL>
+                    <a:lnR w="6350" cap="flat" cmpd="sng" algn="ctr">
+                      <a:solidFill>
+                        <a:srgbClr val="E2E8F0"/>
+                      </a:solidFill>
+                      <a:prstDash val="solid"/>
+                      <a:round/>
+                      <a:headEnd type="none" w="med" len="med"/>
+                      <a:tailEnd type="none" w="med" len="med"/>
+                    </a:lnR>
+                    <a:lnT w="6350" cap="flat" cmpd="sng" algn="ctr">
+                      <a:solidFill>
+                        <a:srgbClr val="E2E8F0"/>
+                      </a:solidFill>
+                      <a:prstDash val="solid"/>
+                      <a:round/>
+                      <a:headEnd type="none" w="med" len="med"/>
+                      <a:tailEnd type="none" w="med" len="med"/>
+                    </a:lnT>
+                    <a:lnB w="6350" cap="flat" cmpd="sng" algn="ctr">
+                      <a:solidFill>
+                        <a:srgbClr val="E2E8F0"/>
+                      </a:solidFill>
+                      <a:prstDash val="solid"/>
+                      <a:round/>
+                      <a:headEnd type="none" w="med" len="med"/>
+                      <a:tailEnd type="none" w="med" len="med"/>
+                    </a:lnB>
+                    <a:solidFill>
+                      <a:srgbClr val="FFFBEB"/>
+                    </a:solidFill>
+                  </a:tcPr>
+                </a:tc>
+              </a:tr>
+              <a:tr h="566928">
+                <a:tc>
+                  <a:txBody>
+                    <a:bodyPr/>
+                    <a:lstStyle/>
+                    <a:p>
+                      <a:pPr algn="l" indent="0" marL="0">
+                        <a:buNone/>
+                      </a:pPr>
+                      <a:r>
+                        <a:rPr lang="en-US" sz="1000" b="1" dirty="0">
+                          <a:solidFill>
+                            <a:srgbClr val="0B1530"/>
+                          </a:solidFill>
+                          <a:latin typeface="Calibri" pitchFamily="34" charset="0"/>
+                          <a:ea typeface="Calibri" pitchFamily="34" charset="-122"/>
+                          <a:cs typeface="Calibri" pitchFamily="34" charset="-120"/>
+                        </a:rPr>
+                        <a:t>Sequential control-function engagement</a:t>
+                      </a:r>
+                      <a:endParaRPr lang="en-US" sz="1000" dirty="0">
+                        <a:latin typeface="Calibri" charset="0"/>
+                        <a:ea typeface="Calibri" charset="0"/>
+                        <a:cs typeface="Calibri" charset="0"/>
+                      </a:endParaRPr>
+                    </a:p>
+                  </a:txBody>
+                  <a:tcPr marL="73152" marR="73152" marT="73152" marB="73152" anchor="ctr">
+                    <a:lnL w="6350" cap="flat" cmpd="sng" algn="ctr">
+                      <a:solidFill>
+                        <a:srgbClr val="E2E8F0"/>
+                      </a:solidFill>
+                      <a:prstDash val="solid"/>
+                      <a:round/>
+                      <a:headEnd type="none" w="med" len="med"/>
+                      <a:tailEnd type="none" w="med" len="med"/>
+                    </a:lnL>
+                    <a:lnR w="6350" cap="flat" cmpd="sng" algn="ctr">
+                      <a:solidFill>
+                        <a:srgbClr val="E2E8F0"/>
+                      </a:solidFill>
+                      <a:prstDash val="solid"/>
+                      <a:round/>
+                      <a:headEnd type="none" w="med" len="med"/>
+                      <a:tailEnd type="none" w="med" len="med"/>
+                    </a:lnR>
+                    <a:lnT w="6350" cap="flat" cmpd="sng" algn="ctr">
+                      <a:solidFill>
+                        <a:srgbClr val="E2E8F0"/>
+                      </a:solidFill>
+                      <a:prstDash val="solid"/>
+                      <a:round/>
+                      <a:headEnd type="none" w="med" len="med"/>
+                      <a:tailEnd type="none" w="med" len="med"/>
+                    </a:lnT>
+                    <a:lnB w="6350" cap="flat" cmpd="sng" algn="ctr">
+                      <a:solidFill>
+                        <a:srgbClr val="E2E8F0"/>
+                      </a:solidFill>
+                      <a:prstDash val="solid"/>
+                      <a:round/>
+                      <a:headEnd type="none" w="med" len="med"/>
+                      <a:tailEnd type="none" w="med" len="med"/>
+                    </a:lnB>
+                    <a:solidFill>
+                      <a:srgbClr val="FFFBEB"/>
+                    </a:solidFill>
+                  </a:tcPr>
+                </a:tc>
+                <a:tc>
+                  <a:txBody>
+                    <a:bodyPr/>
+                    <a:lstStyle/>
+                    <a:p>
+                      <a:pPr algn="l" indent="0" marL="0">
+                        <a:buNone/>
+                      </a:pPr>
+                      <a:r>
+                        <a:rPr lang="en-US" sz="1000" dirty="0">
+                          <a:solidFill>
+                            <a:srgbClr val="475569"/>
+                          </a:solidFill>
+                          <a:latin typeface="Calibri" pitchFamily="34" charset="0"/>
+                          <a:ea typeface="Calibri" pitchFamily="34" charset="-122"/>
+                          <a:cs typeface="Calibri" pitchFamily="34" charset="-120"/>
+                        </a:rPr>
+                        <a:t>Privacy, security, model risk, audit, resilience and TPRM may engage in series, not parallel.</a:t>
+                      </a:r>
+                      <a:endParaRPr lang="en-US" sz="1000" dirty="0">
+                        <a:latin typeface="Calibri" charset="0"/>
+                        <a:ea typeface="Calibri" charset="0"/>
+                        <a:cs typeface="Calibri" charset="0"/>
+                      </a:endParaRPr>
+                    </a:p>
+                  </a:txBody>
+                  <a:tcPr marL="73152" marR="73152" marT="73152" marB="73152" anchor="ctr">
+                    <a:lnL w="6350" cap="flat" cmpd="sng" algn="ctr">
+                      <a:solidFill>
+                        <a:srgbClr val="E2E8F0"/>
+                      </a:solidFill>
+                      <a:prstDash val="solid"/>
+                      <a:round/>
+                      <a:headEnd type="none" w="med" len="med"/>
+                      <a:tailEnd type="none" w="med" len="med"/>
+                    </a:lnL>
+                    <a:lnR w="6350" cap="flat" cmpd="sng" algn="ctr">
+                      <a:solidFill>
+                        <a:srgbClr val="E2E8F0"/>
+                      </a:solidFill>
+                      <a:prstDash val="solid"/>
+                      <a:round/>
+                      <a:headEnd type="none" w="med" len="med"/>
+                      <a:tailEnd type="none" w="med" len="med"/>
+                    </a:lnR>
+                    <a:lnT w="6350" cap="flat" cmpd="sng" algn="ctr">
+                      <a:solidFill>
+                        <a:srgbClr val="E2E8F0"/>
+                      </a:solidFill>
+                      <a:prstDash val="solid"/>
+                      <a:round/>
+                      <a:headEnd type="none" w="med" len="med"/>
+                      <a:tailEnd type="none" w="med" len="med"/>
+                    </a:lnT>
+                    <a:lnB w="6350" cap="flat" cmpd="sng" algn="ctr">
+                      <a:solidFill>
+                        <a:srgbClr val="E2E8F0"/>
+                      </a:solidFill>
+                      <a:prstDash val="solid"/>
+                      <a:round/>
+                      <a:headEnd type="none" w="med" len="med"/>
+                      <a:tailEnd type="none" w="med" len="med"/>
+                    </a:lnB>
+                    <a:solidFill>
+                      <a:srgbClr val="FFFBEB"/>
+                    </a:solidFill>
+                  </a:tcPr>
+                </a:tc>
+                <a:tc>
+                  <a:txBody>
+                    <a:bodyPr/>
+                    <a:lstStyle/>
+                    <a:p>
+                      <a:pPr algn="l" indent="0" marL="0">
+                        <a:buNone/>
+                      </a:pPr>
+                      <a:r>
+                        <a:rPr lang="en-US" sz="1000" dirty="0">
+                          <a:solidFill>
+                            <a:srgbClr val="0B1530"/>
+                          </a:solidFill>
+                          <a:latin typeface="Calibri" pitchFamily="34" charset="0"/>
+                          <a:ea typeface="Calibri" pitchFamily="34" charset="-122"/>
+                          <a:cs typeface="Calibri" pitchFamily="34" charset="-120"/>
+                        </a:rPr>
+                        <a:t>CIO-mandated parallel engagement model with checkpoints and stage-by-stage evidence packs.</a:t>
+                      </a:r>
+                      <a:endParaRPr lang="en-US" sz="1000" dirty="0">
+                        <a:latin typeface="Calibri" charset="0"/>
+                        <a:ea typeface="Calibri" charset="0"/>
+                        <a:cs typeface="Calibri" charset="0"/>
+                      </a:endParaRPr>
+                    </a:p>
+                  </a:txBody>
+                  <a:tcPr marL="73152" marR="73152" marT="73152" marB="73152" anchor="ctr">
+                    <a:lnL w="6350" cap="flat" cmpd="sng" algn="ctr">
+                      <a:solidFill>
+                        <a:srgbClr val="E2E8F0"/>
+                      </a:solidFill>
+                      <a:prstDash val="solid"/>
+                      <a:round/>
+                      <a:headEnd type="none" w="med" len="med"/>
+                      <a:tailEnd type="none" w="med" len="med"/>
+                    </a:lnL>
+                    <a:lnR w="6350" cap="flat" cmpd="sng" algn="ctr">
+                      <a:solidFill>
+                        <a:srgbClr val="E2E8F0"/>
+                      </a:solidFill>
+                      <a:prstDash val="solid"/>
+                      <a:round/>
+                      <a:headEnd type="none" w="med" len="med"/>
+                      <a:tailEnd type="none" w="med" len="med"/>
+                    </a:lnR>
+                    <a:lnT w="6350" cap="flat" cmpd="sng" algn="ctr">
+                      <a:solidFill>
+                        <a:srgbClr val="E2E8F0"/>
+                      </a:solidFill>
+                      <a:prstDash val="solid"/>
+                      <a:round/>
+                      <a:headEnd type="none" w="med" len="med"/>
+                      <a:tailEnd type="none" w="med" len="med"/>
+                    </a:lnT>
+                    <a:lnB w="6350" cap="flat" cmpd="sng" algn="ctr">
+                      <a:solidFill>
+                        <a:srgbClr val="E2E8F0"/>
+                      </a:solidFill>
+                      <a:prstDash val="solid"/>
+                      <a:round/>
+                      <a:headEnd type="none" w="med" len="med"/>
+                      <a:tailEnd type="none" w="med" len="med"/>
+                    </a:lnB>
+                    <a:solidFill>
+                      <a:srgbClr val="FFFBEB"/>
+                    </a:solidFill>
+                  </a:tcPr>
+                </a:tc>
+                <a:tc>
+                  <a:txBody>
+                    <a:bodyPr/>
+                    <a:lstStyle/>
+                    <a:p>
+                      <a:pPr algn="l" indent="0" marL="0">
+                        <a:buNone/>
+                      </a:pPr>
+                      <a:r>
+                        <a:rPr lang="en-US" sz="1000" i="1" dirty="0">
+                          <a:solidFill>
+                            <a:srgbClr val="475569"/>
+                          </a:solidFill>
+                          <a:latin typeface="Calibri" pitchFamily="34" charset="0"/>
+                          <a:ea typeface="Calibri" pitchFamily="34" charset="-122"/>
+                          <a:cs typeface="Calibri" pitchFamily="34" charset="-120"/>
+                        </a:rPr>
+                        <a:t>Reduces approval delay and late-stage redesign risk.</a:t>
+                      </a:r>
+                      <a:endParaRPr lang="en-US" sz="1000" dirty="0">
+                        <a:latin typeface="Calibri" charset="0"/>
+                        <a:ea typeface="Calibri" charset="0"/>
+                        <a:cs typeface="Calibri" charset="0"/>
+                      </a:endParaRPr>
+                    </a:p>
+                  </a:txBody>
+                  <a:tcPr marL="73152" marR="73152" marT="73152" marB="73152" anchor="ctr">
+                    <a:lnL w="6350" cap="flat" cmpd="sng" algn="ctr">
+                      <a:solidFill>
+                        <a:srgbClr val="E2E8F0"/>
+                      </a:solidFill>
+                      <a:prstDash val="solid"/>
+                      <a:round/>
+                      <a:headEnd type="none" w="med" len="med"/>
+                      <a:tailEnd type="none" w="med" len="med"/>
+                    </a:lnL>
+                    <a:lnR w="6350" cap="flat" cmpd="sng" algn="ctr">
+                      <a:solidFill>
+                        <a:srgbClr val="E2E8F0"/>
+                      </a:solidFill>
+                      <a:prstDash val="solid"/>
+                      <a:round/>
+                      <a:headEnd type="none" w="med" len="med"/>
+                      <a:tailEnd type="none" w="med" len="med"/>
+                    </a:lnR>
+                    <a:lnT w="6350" cap="flat" cmpd="sng" algn="ctr">
+                      <a:solidFill>
+                        <a:srgbClr val="E2E8F0"/>
+                      </a:solidFill>
+                      <a:prstDash val="solid"/>
+                      <a:round/>
+                      <a:headEnd type="none" w="med" len="med"/>
+                      <a:tailEnd type="none" w="med" len="med"/>
+                    </a:lnT>
+                    <a:lnB w="6350" cap="flat" cmpd="sng" algn="ctr">
+                      <a:solidFill>
+                        <a:srgbClr val="E2E8F0"/>
+                      </a:solidFill>
+                      <a:prstDash val="solid"/>
+                      <a:round/>
+                      <a:headEnd type="none" w="med" len="med"/>
+                      <a:tailEnd type="none" w="med" len="med"/>
+                    </a:lnB>
+                    <a:solidFill>
+                      <a:srgbClr val="FFFBEB"/>
+                    </a:solidFill>
+                  </a:tcPr>
+                </a:tc>
+                <a:tc>
+                  <a:txBody>
+                    <a:bodyPr/>
+                    <a:lstStyle/>
+                    <a:p>
+                      <a:pPr algn="ctr" indent="0" marL="0">
+                        <a:buNone/>
+                      </a:pPr>
+                      <a:r>
+                        <a:rPr lang="en-US" sz="1000" b="1" dirty="0">
+                          <a:solidFill>
+                            <a:srgbClr val="92400E"/>
+                          </a:solidFill>
+                          <a:latin typeface="Calibri" pitchFamily="34" charset="0"/>
+                          <a:ea typeface="Calibri" pitchFamily="34" charset="-122"/>
+                          <a:cs typeface="Calibri" pitchFamily="34" charset="-120"/>
+                        </a:rPr>
+                        <a:t>Stage 0</a:t>
+                      </a:r>
+                      <a:endParaRPr lang="en-US" sz="1000" dirty="0">
+                        <a:latin typeface="Calibri" charset="0"/>
+                        <a:ea typeface="Calibri" charset="0"/>
+                        <a:cs typeface="Calibri" charset="0"/>
+                      </a:endParaRPr>
+                    </a:p>
+                  </a:txBody>
+                  <a:tcPr marL="73152" marR="73152" marT="73152" marB="73152" anchor="ctr">
+                    <a:lnL w="6350" cap="flat" cmpd="sng" algn="ctr">
+                      <a:solidFill>
+                        <a:srgbClr val="E2E8F0"/>
+                      </a:solidFill>
+                      <a:prstDash val="solid"/>
+                      <a:round/>
+                      <a:headEnd type="none" w="med" len="med"/>
+                      <a:tailEnd type="none" w="med" len="med"/>
+                    </a:lnL>
+                    <a:lnR w="6350" cap="flat" cmpd="sng" algn="ctr">
+                      <a:solidFill>
+                        <a:srgbClr val="E2E8F0"/>
+                      </a:solidFill>
+                      <a:prstDash val="solid"/>
+                      <a:round/>
+                      <a:headEnd type="none" w="med" len="med"/>
+                      <a:tailEnd type="none" w="med" len="med"/>
+                    </a:lnR>
+                    <a:lnT w="6350" cap="flat" cmpd="sng" algn="ctr">
+                      <a:solidFill>
+                        <a:srgbClr val="E2E8F0"/>
+                      </a:solidFill>
+                      <a:prstDash val="solid"/>
+                      <a:round/>
+                      <a:headEnd type="none" w="med" len="med"/>
+                      <a:tailEnd type="none" w="med" len="med"/>
+                    </a:lnT>
+                    <a:lnB w="6350" cap="flat" cmpd="sng" algn="ctr">
+                      <a:solidFill>
+                        <a:srgbClr val="E2E8F0"/>
+                      </a:solidFill>
+                      <a:prstDash val="solid"/>
+                      <a:round/>
+                      <a:headEnd type="none" w="med" len="med"/>
+                      <a:tailEnd type="none" w="med" len="med"/>
+                    </a:lnB>
+                    <a:solidFill>
+                      <a:srgbClr val="FFFBEB"/>
+                    </a:solidFill>
+                  </a:tcPr>
+                </a:tc>
+                <a:tc>
+                  <a:txBody>
+                    <a:bodyPr/>
+                    <a:lstStyle/>
+                    <a:p>
+                      <a:pPr algn="l" indent="0" marL="0">
+                        <a:buNone/>
+                      </a:pPr>
+                      <a:r>
+                        <a:rPr lang="en-US" sz="1000" b="1" dirty="0">
+                          <a:solidFill>
+                            <a:srgbClr val="0B1530"/>
+                          </a:solidFill>
+                          <a:latin typeface="Calibri" pitchFamily="34" charset="0"/>
+                          <a:ea typeface="Calibri" pitchFamily="34" charset="-122"/>
+                          <a:cs typeface="Calibri" pitchFamily="34" charset="-120"/>
+                        </a:rPr>
+                        <a:t>CIO sponsor</a:t>
+                      </a:r>
+                      <a:endParaRPr lang="en-US" sz="1000" dirty="0">
+                        <a:latin typeface="Calibri" charset="0"/>
+                        <a:ea typeface="Calibri" charset="0"/>
+                        <a:cs typeface="Calibri" charset="0"/>
+                      </a:endParaRPr>
+                    </a:p>
+                  </a:txBody>
+                  <a:tcPr marL="73152" marR="73152" marT="73152" marB="73152" anchor="ctr">
+                    <a:lnL w="6350" cap="flat" cmpd="sng" algn="ctr">
+                      <a:solidFill>
+                        <a:srgbClr val="E2E8F0"/>
+                      </a:solidFill>
+                      <a:prstDash val="solid"/>
+                      <a:round/>
+                      <a:headEnd type="none" w="med" len="med"/>
+                      <a:tailEnd type="none" w="med" len="med"/>
+                    </a:lnL>
+                    <a:lnR w="6350" cap="flat" cmpd="sng" algn="ctr">
+                      <a:solidFill>
+                        <a:srgbClr val="E2E8F0"/>
+                      </a:solidFill>
+                      <a:prstDash val="solid"/>
+                      <a:round/>
+                      <a:headEnd type="none" w="med" len="med"/>
+                      <a:tailEnd type="none" w="med" len="med"/>
+                    </a:lnR>
+                    <a:lnT w="6350" cap="flat" cmpd="sng" algn="ctr">
+                      <a:solidFill>
+                        <a:srgbClr val="E2E8F0"/>
+                      </a:solidFill>
+                      <a:prstDash val="solid"/>
+                      <a:round/>
+                      <a:headEnd type="none" w="med" len="med"/>
+                      <a:tailEnd type="none" w="med" len="med"/>
+                    </a:lnT>
+                    <a:lnB w="6350" cap="flat" cmpd="sng" algn="ctr">
+                      <a:solidFill>
+                        <a:srgbClr val="E2E8F0"/>
+                      </a:solidFill>
+                      <a:prstDash val="solid"/>
+                      <a:round/>
+                      <a:headEnd type="none" w="med" len="med"/>
+                      <a:tailEnd type="none" w="med" len="med"/>
+                    </a:lnB>
+                    <a:solidFill>
+                      <a:srgbClr val="FFFBEB"/>
+                    </a:solidFill>
+                  </a:tcPr>
+                </a:tc>
+              </a:tr>
+              <a:tr h="566928">
+                <a:tc>
+                  <a:txBody>
+                    <a:bodyPr/>
+                    <a:lstStyle/>
+                    <a:p>
+                      <a:pPr algn="l" indent="0" marL="0">
+                        <a:buNone/>
+                      </a:pPr>
+                      <a:r>
+                        <a:rPr lang="en-US" sz="1000" b="1" dirty="0">
+                          <a:solidFill>
+                            <a:srgbClr val="0B1530"/>
+                          </a:solidFill>
+                          <a:latin typeface="Calibri" pitchFamily="34" charset="0"/>
+                          <a:ea typeface="Calibri" pitchFamily="34" charset="-122"/>
+                          <a:cs typeface="Calibri" pitchFamily="34" charset="-120"/>
+                        </a:rPr>
+                        <a:t>Use-case readiness inconsistency</a:t>
+                      </a:r>
+                      <a:endParaRPr lang="en-US" sz="1000" dirty="0">
+                        <a:latin typeface="Calibri" charset="0"/>
+                        <a:ea typeface="Calibri" charset="0"/>
+                        <a:cs typeface="Calibri" charset="0"/>
+                      </a:endParaRPr>
+                    </a:p>
+                  </a:txBody>
+                  <a:tcPr marL="73152" marR="73152" marT="73152" marB="73152" anchor="ctr">
+                    <a:lnL w="6350" cap="flat" cmpd="sng" algn="ctr">
+                      <a:solidFill>
+                        <a:srgbClr val="E2E8F0"/>
+                      </a:solidFill>
+                      <a:prstDash val="solid"/>
+                      <a:round/>
+                      <a:headEnd type="none" w="med" len="med"/>
+                      <a:tailEnd type="none" w="med" len="med"/>
+                    </a:lnL>
+                    <a:lnR w="6350" cap="flat" cmpd="sng" algn="ctr">
+                      <a:solidFill>
+                        <a:srgbClr val="E2E8F0"/>
+                      </a:solidFill>
+                      <a:prstDash val="solid"/>
+                      <a:round/>
+                      <a:headEnd type="none" w="med" len="med"/>
+                      <a:tailEnd type="none" w="med" len="med"/>
+                    </a:lnR>
+                    <a:lnT w="6350" cap="flat" cmpd="sng" algn="ctr">
+                      <a:solidFill>
+                        <a:srgbClr val="E2E8F0"/>
+                      </a:solidFill>
+                      <a:prstDash val="solid"/>
+                      <a:round/>
+                      <a:headEnd type="none" w="med" len="med"/>
+                      <a:tailEnd type="none" w="med" len="med"/>
+                    </a:lnT>
+                    <a:lnB w="6350" cap="flat" cmpd="sng" algn="ctr">
+                      <a:solidFill>
+                        <a:srgbClr val="E2E8F0"/>
+                      </a:solidFill>
+                      <a:prstDash val="solid"/>
+                      <a:round/>
+                      <a:headEnd type="none" w="med" len="med"/>
+                      <a:tailEnd type="none" w="med" len="med"/>
+                    </a:lnB>
+                    <a:solidFill>
+                      <a:srgbClr val="ECFDF5"/>
+                    </a:solidFill>
+                  </a:tcPr>
+                </a:tc>
+                <a:tc>
+                  <a:txBody>
+                    <a:bodyPr/>
+                    <a:lstStyle/>
+                    <a:p>
+                      <a:pPr algn="l" indent="0" marL="0">
+                        <a:buNone/>
+                      </a:pPr>
+                      <a:r>
+                        <a:rPr lang="en-US" sz="1000" dirty="0">
+                          <a:solidFill>
+                            <a:srgbClr val="475569"/>
+                          </a:solidFill>
+                          <a:latin typeface="Calibri" pitchFamily="34" charset="0"/>
+                          <a:ea typeface="Calibri" pitchFamily="34" charset="-122"/>
+                          <a:cs typeface="Calibri" pitchFamily="34" charset="-120"/>
+                        </a:rPr>
+                        <a:t>16 shortlisted use cases at different maturity; may lack source clarity, classification or acceptance criteria.</a:t>
+                      </a:r>
+                      <a:endParaRPr lang="en-US" sz="1000" dirty="0">
+                        <a:latin typeface="Calibri" charset="0"/>
+                        <a:ea typeface="Calibri" charset="0"/>
+                        <a:cs typeface="Calibri" charset="0"/>
+                      </a:endParaRPr>
+                    </a:p>
+                  </a:txBody>
+                  <a:tcPr marL="73152" marR="73152" marT="73152" marB="73152" anchor="ctr">
+                    <a:lnL w="6350" cap="flat" cmpd="sng" algn="ctr">
+                      <a:solidFill>
+                        <a:srgbClr val="E2E8F0"/>
+                      </a:solidFill>
+                      <a:prstDash val="solid"/>
+                      <a:round/>
+                      <a:headEnd type="none" w="med" len="med"/>
+                      <a:tailEnd type="none" w="med" len="med"/>
+                    </a:lnL>
+                    <a:lnR w="6350" cap="flat" cmpd="sng" algn="ctr">
+                      <a:solidFill>
+                        <a:srgbClr val="E2E8F0"/>
+                      </a:solidFill>
+                      <a:prstDash val="solid"/>
+                      <a:round/>
+                      <a:headEnd type="none" w="med" len="med"/>
+                      <a:tailEnd type="none" w="med" len="med"/>
+                    </a:lnR>
+                    <a:lnT w="6350" cap="flat" cmpd="sng" algn="ctr">
+                      <a:solidFill>
+                        <a:srgbClr val="E2E8F0"/>
+                      </a:solidFill>
+                      <a:prstDash val="solid"/>
+                      <a:round/>
+                      <a:headEnd type="none" w="med" len="med"/>
+                      <a:tailEnd type="none" w="med" len="med"/>
+                    </a:lnT>
+                    <a:lnB w="6350" cap="flat" cmpd="sng" algn="ctr">
+                      <a:solidFill>
+                        <a:srgbClr val="E2E8F0"/>
+                      </a:solidFill>
+                      <a:prstDash val="solid"/>
+                      <a:round/>
+                      <a:headEnd type="none" w="med" len="med"/>
+                      <a:tailEnd type="none" w="med" len="med"/>
+                    </a:lnB>
+                    <a:solidFill>
+                      <a:srgbClr val="ECFDF5"/>
+                    </a:solidFill>
+                  </a:tcPr>
+                </a:tc>
+                <a:tc>
+                  <a:txBody>
+                    <a:bodyPr/>
+                    <a:lstStyle/>
+                    <a:p>
+                      <a:pPr algn="l" indent="0" marL="0">
+                        <a:buNone/>
+                      </a:pPr>
+                      <a:r>
+                        <a:rPr lang="en-US" sz="1000" dirty="0">
+                          <a:solidFill>
+                            <a:srgbClr val="0B1530"/>
+                          </a:solidFill>
+                          <a:latin typeface="Calibri" pitchFamily="34" charset="0"/>
+                          <a:ea typeface="Calibri" pitchFamily="34" charset="-122"/>
+                          <a:cs typeface="Calibri" pitchFamily="34" charset="-120"/>
+                        </a:rPr>
+                        <a:t>BA-led structured intake against the standard discovery template; prioritise 2–3 architecture-aligned candidates.</a:t>
+                      </a:r>
+                      <a:endParaRPr lang="en-US" sz="1000" dirty="0">
+                        <a:latin typeface="Calibri" charset="0"/>
+                        <a:ea typeface="Calibri" charset="0"/>
+                        <a:cs typeface="Calibri" charset="0"/>
+                      </a:endParaRPr>
+                    </a:p>
+                  </a:txBody>
+                  <a:tcPr marL="73152" marR="73152" marT="73152" marB="73152" anchor="ctr">
+                    <a:lnL w="6350" cap="flat" cmpd="sng" algn="ctr">
+                      <a:solidFill>
+                        <a:srgbClr val="E2E8F0"/>
+                      </a:solidFill>
+                      <a:prstDash val="solid"/>
+                      <a:round/>
+                      <a:headEnd type="none" w="med" len="med"/>
+                      <a:tailEnd type="none" w="med" len="med"/>
+                    </a:lnL>
+                    <a:lnR w="6350" cap="flat" cmpd="sng" algn="ctr">
+                      <a:solidFill>
+                        <a:srgbClr val="E2E8F0"/>
+                      </a:solidFill>
+                      <a:prstDash val="solid"/>
+                      <a:round/>
+                      <a:headEnd type="none" w="med" len="med"/>
+                      <a:tailEnd type="none" w="med" len="med"/>
+                    </a:lnR>
+                    <a:lnT w="6350" cap="flat" cmpd="sng" algn="ctr">
+                      <a:solidFill>
+                        <a:srgbClr val="E2E8F0"/>
+                      </a:solidFill>
+                      <a:prstDash val="solid"/>
+                      <a:round/>
+                      <a:headEnd type="none" w="med" len="med"/>
+                      <a:tailEnd type="none" w="med" len="med"/>
+                    </a:lnT>
+                    <a:lnB w="6350" cap="flat" cmpd="sng" algn="ctr">
+                      <a:solidFill>
+                        <a:srgbClr val="E2E8F0"/>
+                      </a:solidFill>
+                      <a:prstDash val="solid"/>
+                      <a:round/>
+                      <a:headEnd type="none" w="med" len="med"/>
+                      <a:tailEnd type="none" w="med" len="med"/>
+                    </a:lnB>
+                    <a:solidFill>
+                      <a:srgbClr val="ECFDF5"/>
+                    </a:solidFill>
+                  </a:tcPr>
+                </a:tc>
+                <a:tc>
+                  <a:txBody>
+                    <a:bodyPr/>
+                    <a:lstStyle/>
+                    <a:p>
+                      <a:pPr algn="l" indent="0" marL="0">
+                        <a:buNone/>
+                      </a:pPr>
+                      <a:r>
+                        <a:rPr lang="en-US" sz="1000" i="1" dirty="0">
+                          <a:solidFill>
+                            <a:srgbClr val="475569"/>
+                          </a:solidFill>
+                          <a:latin typeface="Calibri" pitchFamily="34" charset="0"/>
+                          <a:ea typeface="Calibri" pitchFamily="34" charset="-122"/>
+                          <a:cs typeface="Calibri" pitchFamily="34" charset="-120"/>
+                        </a:rPr>
+                        <a:t>Replaces lobbying with evidence; focuses scarce architect time on credible MVP candidates.</a:t>
+                      </a:r>
+                      <a:endParaRPr lang="en-US" sz="1000" dirty="0">
+                        <a:latin typeface="Calibri" charset="0"/>
+                        <a:ea typeface="Calibri" charset="0"/>
+                        <a:cs typeface="Calibri" charset="0"/>
+                      </a:endParaRPr>
+                    </a:p>
+                  </a:txBody>
+                  <a:tcPr marL="73152" marR="73152" marT="73152" marB="73152" anchor="ctr">
+                    <a:lnL w="6350" cap="flat" cmpd="sng" algn="ctr">
+                      <a:solidFill>
+                        <a:srgbClr val="E2E8F0"/>
+                      </a:solidFill>
+                      <a:prstDash val="solid"/>
+                      <a:round/>
+                      <a:headEnd type="none" w="med" len="med"/>
+                      <a:tailEnd type="none" w="med" len="med"/>
+                    </a:lnL>
+                    <a:lnR w="6350" cap="flat" cmpd="sng" algn="ctr">
+                      <a:solidFill>
+                        <a:srgbClr val="E2E8F0"/>
+                      </a:solidFill>
+                      <a:prstDash val="solid"/>
+                      <a:round/>
+                      <a:headEnd type="none" w="med" len="med"/>
+                      <a:tailEnd type="none" w="med" len="med"/>
+                    </a:lnR>
+                    <a:lnT w="6350" cap="flat" cmpd="sng" algn="ctr">
+                      <a:solidFill>
+                        <a:srgbClr val="E2E8F0"/>
+                      </a:solidFill>
+                      <a:prstDash val="solid"/>
+                      <a:round/>
+                      <a:headEnd type="none" w="med" len="med"/>
+                      <a:tailEnd type="none" w="med" len="med"/>
+                    </a:lnT>
+                    <a:lnB w="6350" cap="flat" cmpd="sng" algn="ctr">
+                      <a:solidFill>
+                        <a:srgbClr val="E2E8F0"/>
+                      </a:solidFill>
+                      <a:prstDash val="solid"/>
+                      <a:round/>
+                      <a:headEnd type="none" w="med" len="med"/>
+                      <a:tailEnd type="none" w="med" len="med"/>
+                    </a:lnB>
+                    <a:solidFill>
+                      <a:srgbClr val="ECFDF5"/>
+                    </a:solidFill>
+                  </a:tcPr>
+                </a:tc>
+                <a:tc>
+                  <a:txBody>
+                    <a:bodyPr/>
+                    <a:lstStyle/>
+                    <a:p>
+                      <a:pPr algn="ctr" indent="0" marL="0">
+                        <a:buNone/>
+                      </a:pPr>
+                      <a:r>
+                        <a:rPr lang="en-US" sz="1000" b="1" dirty="0">
+                          <a:solidFill>
+                            <a:srgbClr val="065F46"/>
+                          </a:solidFill>
+                          <a:latin typeface="Calibri" pitchFamily="34" charset="0"/>
+                          <a:ea typeface="Calibri" pitchFamily="34" charset="-122"/>
+                          <a:cs typeface="Calibri" pitchFamily="34" charset="-120"/>
+                        </a:rPr>
+                        <a:t>Stage 0–1</a:t>
+                      </a:r>
+                      <a:endParaRPr lang="en-US" sz="1000" dirty="0">
+                        <a:latin typeface="Calibri" charset="0"/>
+                        <a:ea typeface="Calibri" charset="0"/>
+                        <a:cs typeface="Calibri" charset="0"/>
+                      </a:endParaRPr>
+                    </a:p>
+                  </a:txBody>
+                  <a:tcPr marL="73152" marR="73152" marT="73152" marB="73152" anchor="ctr">
+                    <a:lnL w="6350" cap="flat" cmpd="sng" algn="ctr">
+                      <a:solidFill>
+                        <a:srgbClr val="E2E8F0"/>
+                      </a:solidFill>
+                      <a:prstDash val="solid"/>
+                      <a:round/>
+                      <a:headEnd type="none" w="med" len="med"/>
+                      <a:tailEnd type="none" w="med" len="med"/>
+                    </a:lnL>
+                    <a:lnR w="6350" cap="flat" cmpd="sng" algn="ctr">
+                      <a:solidFill>
+                        <a:srgbClr val="E2E8F0"/>
+                      </a:solidFill>
+                      <a:prstDash val="solid"/>
+                      <a:round/>
+                      <a:headEnd type="none" w="med" len="med"/>
+                      <a:tailEnd type="none" w="med" len="med"/>
+                    </a:lnR>
+                    <a:lnT w="6350" cap="flat" cmpd="sng" algn="ctr">
+                      <a:solidFill>
+                        <a:srgbClr val="E2E8F0"/>
+                      </a:solidFill>
+                      <a:prstDash val="solid"/>
+                      <a:round/>
+                      <a:headEnd type="none" w="med" len="med"/>
+                      <a:tailEnd type="none" w="med" len="med"/>
+                    </a:lnT>
+                    <a:lnB w="6350" cap="flat" cmpd="sng" algn="ctr">
+                      <a:solidFill>
+                        <a:srgbClr val="E2E8F0"/>
+                      </a:solidFill>
+                      <a:prstDash val="solid"/>
+                      <a:round/>
+                      <a:headEnd type="none" w="med" len="med"/>
+                      <a:tailEnd type="none" w="med" len="med"/>
+                    </a:lnB>
+                    <a:solidFill>
+                      <a:srgbClr val="ECFDF5"/>
+                    </a:solidFill>
+                  </a:tcPr>
+                </a:tc>
+                <a:tc>
+                  <a:txBody>
+                    <a:bodyPr/>
+                    <a:lstStyle/>
+                    <a:p>
+                      <a:pPr algn="l" indent="0" marL="0">
+                        <a:buNone/>
+                      </a:pPr>
+                      <a:r>
+                        <a:rPr lang="en-US" sz="1000" b="1" dirty="0">
+                          <a:solidFill>
+                            <a:srgbClr val="0B1530"/>
+                          </a:solidFill>
+                          <a:latin typeface="Calibri" pitchFamily="34" charset="0"/>
+                          <a:ea typeface="Calibri" pitchFamily="34" charset="-122"/>
+                          <a:cs typeface="Calibri" pitchFamily="34" charset="-120"/>
+                        </a:rPr>
+                        <a:t>Lead Architect + Technical BA</a:t>
+                      </a:r>
+                      <a:endParaRPr lang="en-US" sz="1000" dirty="0">
+                        <a:latin typeface="Calibri" charset="0"/>
+                        <a:ea typeface="Calibri" charset="0"/>
+                        <a:cs typeface="Calibri" charset="0"/>
+                      </a:endParaRPr>
+                    </a:p>
+                  </a:txBody>
+                  <a:tcPr marL="73152" marR="73152" marT="73152" marB="73152" anchor="ctr">
+                    <a:lnL w="6350" cap="flat" cmpd="sng" algn="ctr">
+                      <a:solidFill>
+                        <a:srgbClr val="E2E8F0"/>
+                      </a:solidFill>
+                      <a:prstDash val="solid"/>
+                      <a:round/>
+                      <a:headEnd type="none" w="med" len="med"/>
+                      <a:tailEnd type="none" w="med" len="med"/>
+                    </a:lnL>
+                    <a:lnR w="6350" cap="flat" cmpd="sng" algn="ctr">
+                      <a:solidFill>
+                        <a:srgbClr val="E2E8F0"/>
+                      </a:solidFill>
+                      <a:prstDash val="solid"/>
+                      <a:round/>
+                      <a:headEnd type="none" w="med" len="med"/>
+                      <a:tailEnd type="none" w="med" len="med"/>
+                    </a:lnR>
+                    <a:lnT w="6350" cap="flat" cmpd="sng" algn="ctr">
+                      <a:solidFill>
+                        <a:srgbClr val="E2E8F0"/>
+                      </a:solidFill>
+                      <a:prstDash val="solid"/>
+                      <a:round/>
+                      <a:headEnd type="none" w="med" len="med"/>
+                      <a:tailEnd type="none" w="med" len="med"/>
+                    </a:lnT>
+                    <a:lnB w="6350" cap="flat" cmpd="sng" algn="ctr">
+                      <a:solidFill>
+                        <a:srgbClr val="E2E8F0"/>
+                      </a:solidFill>
+                      <a:prstDash val="solid"/>
+                      <a:round/>
+                      <a:headEnd type="none" w="med" len="med"/>
+                      <a:tailEnd type="none" w="med" len="med"/>
+                    </a:lnB>
+                    <a:solidFill>
+                      <a:srgbClr val="ECFDF5"/>
+                    </a:solidFill>
+                  </a:tcPr>
+                </a:tc>
+              </a:tr>
+              <a:tr h="566928">
+                <a:tc>
+                  <a:txBody>
+                    <a:bodyPr/>
+                    <a:lstStyle/>
+                    <a:p>
+                      <a:pPr algn="l" indent="0" marL="0">
+                        <a:buNone/>
+                      </a:pPr>
+                      <a:r>
+                        <a:rPr lang="en-US" sz="1000" b="1" dirty="0">
+                          <a:solidFill>
+                            <a:srgbClr val="0B1530"/>
+                          </a:solidFill>
+                          <a:latin typeface="Calibri" pitchFamily="34" charset="0"/>
+                          <a:ea typeface="Calibri" pitchFamily="34" charset="-122"/>
+                          <a:cs typeface="Calibri" pitchFamily="34" charset="-120"/>
+                        </a:rPr>
+                        <a:t>Retrieval quality risk</a:t>
+                      </a:r>
+                      <a:endParaRPr lang="en-US" sz="1000" dirty="0">
+                        <a:latin typeface="Calibri" charset="0"/>
+                        <a:ea typeface="Calibri" charset="0"/>
+                        <a:cs typeface="Calibri" charset="0"/>
+                      </a:endParaRPr>
+                    </a:p>
+                  </a:txBody>
+                  <a:tcPr marL="73152" marR="73152" marT="73152" marB="73152" anchor="ctr">
+                    <a:lnL w="6350" cap="flat" cmpd="sng" algn="ctr">
+                      <a:solidFill>
+                        <a:srgbClr val="E2E8F0"/>
+                      </a:solidFill>
+                      <a:prstDash val="solid"/>
+                      <a:round/>
+                      <a:headEnd type="none" w="med" len="med"/>
+                      <a:tailEnd type="none" w="med" len="med"/>
+                    </a:lnL>
+                    <a:lnR w="6350" cap="flat" cmpd="sng" algn="ctr">
+                      <a:solidFill>
+                        <a:srgbClr val="E2E8F0"/>
+                      </a:solidFill>
+                      <a:prstDash val="solid"/>
+                      <a:round/>
+                      <a:headEnd type="none" w="med" len="med"/>
+                      <a:tailEnd type="none" w="med" len="med"/>
+                    </a:lnR>
+                    <a:lnT w="6350" cap="flat" cmpd="sng" algn="ctr">
+                      <a:solidFill>
+                        <a:srgbClr val="E2E8F0"/>
+                      </a:solidFill>
+                      <a:prstDash val="solid"/>
+                      <a:round/>
+                      <a:headEnd type="none" w="med" len="med"/>
+                      <a:tailEnd type="none" w="med" len="med"/>
+                    </a:lnT>
+                    <a:lnB w="6350" cap="flat" cmpd="sng" algn="ctr">
+                      <a:solidFill>
+                        <a:srgbClr val="E2E8F0"/>
+                      </a:solidFill>
+                      <a:prstDash val="solid"/>
+                      <a:round/>
+                      <a:headEnd type="none" w="med" len="med"/>
+                      <a:tailEnd type="none" w="med" len="med"/>
+                    </a:lnB>
+                    <a:solidFill>
+                      <a:srgbClr val="ECFDF5"/>
+                    </a:solidFill>
+                  </a:tcPr>
+                </a:tc>
+                <a:tc>
+                  <a:txBody>
+                    <a:bodyPr/>
+                    <a:lstStyle/>
+                    <a:p>
+                      <a:pPr algn="l" indent="0" marL="0">
+                        <a:buNone/>
+                      </a:pPr>
+                      <a:r>
+                        <a:rPr lang="en-US" sz="1000" dirty="0">
+                          <a:solidFill>
+                            <a:srgbClr val="475569"/>
+                          </a:solidFill>
+                          <a:latin typeface="Calibri" pitchFamily="34" charset="0"/>
+                          <a:ea typeface="Calibri" pitchFamily="34" charset="-122"/>
+                          <a:cs typeface="Calibri" pitchFamily="34" charset="-120"/>
+                        </a:rPr>
+                        <a:t>A technically compliant service may still fail if relevance is weak or benchmark sets are absent.</a:t>
+                      </a:r>
+                      <a:endParaRPr lang="en-US" sz="1000" dirty="0">
+                        <a:latin typeface="Calibri" charset="0"/>
+                        <a:ea typeface="Calibri" charset="0"/>
+                        <a:cs typeface="Calibri" charset="0"/>
+                      </a:endParaRPr>
+                    </a:p>
+                  </a:txBody>
+                  <a:tcPr marL="73152" marR="73152" marT="73152" marB="73152" anchor="ctr">
+                    <a:lnL w="6350" cap="flat" cmpd="sng" algn="ctr">
+                      <a:solidFill>
+                        <a:srgbClr val="E2E8F0"/>
+                      </a:solidFill>
+                      <a:prstDash val="solid"/>
+                      <a:round/>
+                      <a:headEnd type="none" w="med" len="med"/>
+                      <a:tailEnd type="none" w="med" len="med"/>
+                    </a:lnL>
+                    <a:lnR w="6350" cap="flat" cmpd="sng" algn="ctr">
+                      <a:solidFill>
+                        <a:srgbClr val="E2E8F0"/>
+                      </a:solidFill>
+                      <a:prstDash val="solid"/>
+                      <a:round/>
+                      <a:headEnd type="none" w="med" len="med"/>
+                      <a:tailEnd type="none" w="med" len="med"/>
+                    </a:lnR>
+                    <a:lnT w="6350" cap="flat" cmpd="sng" algn="ctr">
+                      <a:solidFill>
+                        <a:srgbClr val="E2E8F0"/>
+                      </a:solidFill>
+                      <a:prstDash val="solid"/>
+                      <a:round/>
+                      <a:headEnd type="none" w="med" len="med"/>
+                      <a:tailEnd type="none" w="med" len="med"/>
+                    </a:lnT>
+                    <a:lnB w="6350" cap="flat" cmpd="sng" algn="ctr">
+                      <a:solidFill>
+                        <a:srgbClr val="E2E8F0"/>
+                      </a:solidFill>
+                      <a:prstDash val="solid"/>
+                      <a:round/>
+                      <a:headEnd type="none" w="med" len="med"/>
+                      <a:tailEnd type="none" w="med" len="med"/>
+                    </a:lnB>
+                    <a:solidFill>
+                      <a:srgbClr val="ECFDF5"/>
+                    </a:solidFill>
+                  </a:tcPr>
+                </a:tc>
+                <a:tc>
+                  <a:txBody>
+                    <a:bodyPr/>
+                    <a:lstStyle/>
+                    <a:p>
+                      <a:pPr algn="l" indent="0" marL="0">
+                        <a:buNone/>
+                      </a:pPr>
+                      <a:r>
+                        <a:rPr lang="en-US" sz="1000" dirty="0">
+                          <a:solidFill>
+                            <a:srgbClr val="0B1530"/>
+                          </a:solidFill>
+                          <a:latin typeface="Calibri" pitchFamily="34" charset="0"/>
+                          <a:ea typeface="Calibri" pitchFamily="34" charset="-122"/>
+                          <a:cs typeface="Calibri" pitchFamily="34" charset="-120"/>
+                        </a:rPr>
+                        <a:t>Define benchmark expectations, quality baselines, tenant acceptance criteria early. Service owns framework; tenant owns benchmarks.</a:t>
+                      </a:r>
+                      <a:endParaRPr lang="en-US" sz="1000" dirty="0">
+                        <a:latin typeface="Calibri" charset="0"/>
+                        <a:ea typeface="Calibri" charset="0"/>
+                        <a:cs typeface="Calibri" charset="0"/>
+                      </a:endParaRPr>
+                    </a:p>
+                  </a:txBody>
+                  <a:tcPr marL="73152" marR="73152" marT="73152" marB="73152" anchor="ctr">
+                    <a:lnL w="6350" cap="flat" cmpd="sng" algn="ctr">
+                      <a:solidFill>
+                        <a:srgbClr val="E2E8F0"/>
+                      </a:solidFill>
+                      <a:prstDash val="solid"/>
+                      <a:round/>
+                      <a:headEnd type="none" w="med" len="med"/>
+                      <a:tailEnd type="none" w="med" len="med"/>
+                    </a:lnL>
+                    <a:lnR w="6350" cap="flat" cmpd="sng" algn="ctr">
+                      <a:solidFill>
+                        <a:srgbClr val="E2E8F0"/>
+                      </a:solidFill>
+                      <a:prstDash val="solid"/>
+                      <a:round/>
+                      <a:headEnd type="none" w="med" len="med"/>
+                      <a:tailEnd type="none" w="med" len="med"/>
+                    </a:lnR>
+                    <a:lnT w="6350" cap="flat" cmpd="sng" algn="ctr">
+                      <a:solidFill>
+                        <a:srgbClr val="E2E8F0"/>
+                      </a:solidFill>
+                      <a:prstDash val="solid"/>
+                      <a:round/>
+                      <a:headEnd type="none" w="med" len="med"/>
+                      <a:tailEnd type="none" w="med" len="med"/>
+                    </a:lnT>
+                    <a:lnB w="6350" cap="flat" cmpd="sng" algn="ctr">
+                      <a:solidFill>
+                        <a:srgbClr val="E2E8F0"/>
+                      </a:solidFill>
+                      <a:prstDash val="solid"/>
+                      <a:round/>
+                      <a:headEnd type="none" w="med" len="med"/>
+                      <a:tailEnd type="none" w="med" len="med"/>
+                    </a:lnB>
+                    <a:solidFill>
+                      <a:srgbClr val="ECFDF5"/>
+                    </a:solidFill>
+                  </a:tcPr>
+                </a:tc>
+                <a:tc>
+                  <a:txBody>
+                    <a:bodyPr/>
+                    <a:lstStyle/>
+                    <a:p>
+                      <a:pPr algn="l" indent="0" marL="0">
+                        <a:buNone/>
+                      </a:pPr>
+                      <a:r>
+                        <a:rPr lang="en-US" sz="1000" i="1" dirty="0">
+                          <a:solidFill>
+                            <a:srgbClr val="475569"/>
+                          </a:solidFill>
+                          <a:latin typeface="Calibri" pitchFamily="34" charset="0"/>
+                          <a:ea typeface="Calibri" pitchFamily="34" charset="-122"/>
+                          <a:cs typeface="Calibri" pitchFamily="34" charset="-120"/>
+                        </a:rPr>
+                        <a:t>Avoids building a service that is governance-compliant but low-value.</a:t>
+                      </a:r>
+                      <a:endParaRPr lang="en-US" sz="1000" dirty="0">
+                        <a:latin typeface="Calibri" charset="0"/>
+                        <a:ea typeface="Calibri" charset="0"/>
+                        <a:cs typeface="Calibri" charset="0"/>
+                      </a:endParaRPr>
+                    </a:p>
+                  </a:txBody>
+                  <a:tcPr marL="73152" marR="73152" marT="73152" marB="73152" anchor="ctr">
+                    <a:lnL w="6350" cap="flat" cmpd="sng" algn="ctr">
+                      <a:solidFill>
+                        <a:srgbClr val="E2E8F0"/>
+                      </a:solidFill>
+                      <a:prstDash val="solid"/>
+                      <a:round/>
+                      <a:headEnd type="none" w="med" len="med"/>
+                      <a:tailEnd type="none" w="med" len="med"/>
+                    </a:lnL>
+                    <a:lnR w="6350" cap="flat" cmpd="sng" algn="ctr">
+                      <a:solidFill>
+                        <a:srgbClr val="E2E8F0"/>
+                      </a:solidFill>
+                      <a:prstDash val="solid"/>
+                      <a:round/>
+                      <a:headEnd type="none" w="med" len="med"/>
+                      <a:tailEnd type="none" w="med" len="med"/>
+                    </a:lnR>
+                    <a:lnT w="6350" cap="flat" cmpd="sng" algn="ctr">
+                      <a:solidFill>
+                        <a:srgbClr val="E2E8F0"/>
+                      </a:solidFill>
+                      <a:prstDash val="solid"/>
+                      <a:round/>
+                      <a:headEnd type="none" w="med" len="med"/>
+                      <a:tailEnd type="none" w="med" len="med"/>
+                    </a:lnT>
+                    <a:lnB w="6350" cap="flat" cmpd="sng" algn="ctr">
+                      <a:solidFill>
+                        <a:srgbClr val="E2E8F0"/>
+                      </a:solidFill>
+                      <a:prstDash val="solid"/>
+                      <a:round/>
+                      <a:headEnd type="none" w="med" len="med"/>
+                      <a:tailEnd type="none" w="med" len="med"/>
+                    </a:lnB>
+                    <a:solidFill>
+                      <a:srgbClr val="ECFDF5"/>
+                    </a:solidFill>
+                  </a:tcPr>
+                </a:tc>
+                <a:tc>
+                  <a:txBody>
+                    <a:bodyPr/>
+                    <a:lstStyle/>
+                    <a:p>
+                      <a:pPr algn="ctr" indent="0" marL="0">
+                        <a:buNone/>
+                      </a:pPr>
+                      <a:r>
+                        <a:rPr lang="en-US" sz="1000" b="1" dirty="0">
+                          <a:solidFill>
+                            <a:srgbClr val="065F46"/>
+                          </a:solidFill>
+                          <a:latin typeface="Calibri" pitchFamily="34" charset="0"/>
+                          <a:ea typeface="Calibri" pitchFamily="34" charset="-122"/>
+                          <a:cs typeface="Calibri" pitchFamily="34" charset="-120"/>
+                        </a:rPr>
+                        <a:t>Stage 1–2</a:t>
+                      </a:r>
+                      <a:endParaRPr lang="en-US" sz="1000" dirty="0">
+                        <a:latin typeface="Calibri" charset="0"/>
+                        <a:ea typeface="Calibri" charset="0"/>
+                        <a:cs typeface="Calibri" charset="0"/>
+                      </a:endParaRPr>
+                    </a:p>
+                  </a:txBody>
+                  <a:tcPr marL="73152" marR="73152" marT="73152" marB="73152" anchor="ctr">
+                    <a:lnL w="6350" cap="flat" cmpd="sng" algn="ctr">
+                      <a:solidFill>
+                        <a:srgbClr val="E2E8F0"/>
+                      </a:solidFill>
+                      <a:prstDash val="solid"/>
+                      <a:round/>
+                      <a:headEnd type="none" w="med" len="med"/>
+                      <a:tailEnd type="none" w="med" len="med"/>
+                    </a:lnL>
+                    <a:lnR w="6350" cap="flat" cmpd="sng" algn="ctr">
+                      <a:solidFill>
+                        <a:srgbClr val="E2E8F0"/>
+                      </a:solidFill>
+                      <a:prstDash val="solid"/>
+                      <a:round/>
+                      <a:headEnd type="none" w="med" len="med"/>
+                      <a:tailEnd type="none" w="med" len="med"/>
+                    </a:lnR>
+                    <a:lnT w="6350" cap="flat" cmpd="sng" algn="ctr">
+                      <a:solidFill>
+                        <a:srgbClr val="E2E8F0"/>
+                      </a:solidFill>
+                      <a:prstDash val="solid"/>
+                      <a:round/>
+                      <a:headEnd type="none" w="med" len="med"/>
+                      <a:tailEnd type="none" w="med" len="med"/>
+                    </a:lnT>
+                    <a:lnB w="6350" cap="flat" cmpd="sng" algn="ctr">
+                      <a:solidFill>
+                        <a:srgbClr val="E2E8F0"/>
+                      </a:solidFill>
+                      <a:prstDash val="solid"/>
+                      <a:round/>
+                      <a:headEnd type="none" w="med" len="med"/>
+                      <a:tailEnd type="none" w="med" len="med"/>
+                    </a:lnB>
+                    <a:solidFill>
+                      <a:srgbClr val="ECFDF5"/>
+                    </a:solidFill>
+                  </a:tcPr>
+                </a:tc>
+                <a:tc>
+                  <a:txBody>
+                    <a:bodyPr/>
+                    <a:lstStyle/>
+                    <a:p>
+                      <a:pPr algn="l" indent="0" marL="0">
+                        <a:buNone/>
+                      </a:pPr>
+                      <a:r>
+                        <a:rPr lang="en-US" sz="1000" b="1" dirty="0">
+                          <a:solidFill>
+                            <a:srgbClr val="0B1530"/>
+                          </a:solidFill>
+                          <a:latin typeface="Calibri" pitchFamily="34" charset="0"/>
+                          <a:ea typeface="Calibri" pitchFamily="34" charset="-122"/>
+                          <a:cs typeface="Calibri" pitchFamily="34" charset="-120"/>
+                        </a:rPr>
+                        <a:t>AI for Tech + Use-case owners</a:t>
+                      </a:r>
+                      <a:endParaRPr lang="en-US" sz="1000" dirty="0">
+                        <a:latin typeface="Calibri" charset="0"/>
+                        <a:ea typeface="Calibri" charset="0"/>
+                        <a:cs typeface="Calibri" charset="0"/>
+                      </a:endParaRPr>
+                    </a:p>
+                  </a:txBody>
+                  <a:tcPr marL="73152" marR="73152" marT="73152" marB="73152" anchor="ctr">
+                    <a:lnL w="6350" cap="flat" cmpd="sng" algn="ctr">
+                      <a:solidFill>
+                        <a:srgbClr val="E2E8F0"/>
+                      </a:solidFill>
+                      <a:prstDash val="solid"/>
+                      <a:round/>
+                      <a:headEnd type="none" w="med" len="med"/>
+                      <a:tailEnd type="none" w="med" len="med"/>
+                    </a:lnL>
+                    <a:lnR w="6350" cap="flat" cmpd="sng" algn="ctr">
+                      <a:solidFill>
+                        <a:srgbClr val="E2E8F0"/>
+                      </a:solidFill>
+                      <a:prstDash val="solid"/>
+                      <a:round/>
+                      <a:headEnd type="none" w="med" len="med"/>
+                      <a:tailEnd type="none" w="med" len="med"/>
+                    </a:lnR>
+                    <a:lnT w="6350" cap="flat" cmpd="sng" algn="ctr">
+                      <a:solidFill>
+                        <a:srgbClr val="E2E8F0"/>
+                      </a:solidFill>
+                      <a:prstDash val="solid"/>
+                      <a:round/>
+                      <a:headEnd type="none" w="med" len="med"/>
+                      <a:tailEnd type="none" w="med" len="med"/>
+                    </a:lnT>
+                    <a:lnB w="6350" cap="flat" cmpd="sng" algn="ctr">
+                      <a:solidFill>
+                        <a:srgbClr val="E2E8F0"/>
+                      </a:solidFill>
+                      <a:prstDash val="solid"/>
+                      <a:round/>
+                      <a:headEnd type="none" w="med" len="med"/>
+                      <a:tailEnd type="none" w="med" len="med"/>
+                    </a:lnB>
+                    <a:solidFill>
+                      <a:srgbClr val="ECFDF5"/>
+                    </a:solidFill>
+                  </a:tcPr>
+                </a:tc>
+              </a:tr>
+            </a:tbl>
+          </a:graphicData>
+        </a:graphic>
+      </p:graphicFrame>
+      <p:sp>
+        <p:nvSpPr>
+          <p:cNvPr id="7" name="Shape 4"/>
+          <p:cNvSpPr/>
+          <p:nvPr/>
+        </p:nvSpPr>
+        <p:spPr>
+          <a:xfrm>
+            <a:off x="594360" y="6446520"/>
+            <a:ext cx="502920" cy="22860"/>
           </a:xfrm>
           <a:prstGeom prst="rect">
             <a:avLst/>
@@ -3936,1798 +6417,7 @@
       </p:sp>
       <p:sp>
         <p:nvSpPr>
-          <p:cNvPr id="16" name="Text 14"/>
-          <p:cNvSpPr/>
-          <p:nvPr/>
-        </p:nvSpPr>
-        <p:spPr>
-          <a:xfrm>
-            <a:off x="704088" y="3081528"/>
-            <a:ext cx="2029968" cy="475488"/>
-          </a:xfrm>
-          <a:prstGeom prst="rect">
-            <a:avLst/>
-          </a:prstGeom>
-          <a:noFill/>
-          <a:ln/>
-        </p:spPr>
-        <p:txBody>
-          <a:bodyPr wrap="square" lIns="0" tIns="0" rIns="0" bIns="0" rtlCol="0" anchor="ctr"/>
-          <a:lstStyle/>
-          <a:p>
-            <a:pPr indent="0" marL="0">
-              <a:buNone/>
-            </a:pPr>
-            <a:r>
-              <a:rPr lang="en-US" sz="1100" b="1" dirty="0">
-                <a:solidFill>
-                  <a:srgbClr val="0B1530"/>
-                </a:solidFill>
-                <a:latin typeface="Calibri" pitchFamily="34" charset="0"/>
-                <a:ea typeface="Calibri" pitchFamily="34" charset="-122"/>
-                <a:cs typeface="Calibri" pitchFamily="34" charset="-120"/>
-              </a:rPr>
-              <a:t>Reference platform not confirmed</a:t>
-            </a:r>
-            <a:endParaRPr lang="en-US" sz="1100" dirty="0"/>
-          </a:p>
-        </p:txBody>
-      </p:sp>
-      <p:sp>
-        <p:nvSpPr>
-          <p:cNvPr id="17" name="Text 15"/>
-          <p:cNvSpPr/>
-          <p:nvPr/>
-        </p:nvSpPr>
-        <p:spPr>
-          <a:xfrm>
-            <a:off x="2898648" y="3081528"/>
-            <a:ext cx="2240280" cy="475488"/>
-          </a:xfrm>
-          <a:prstGeom prst="rect">
-            <a:avLst/>
-          </a:prstGeom>
-          <a:noFill/>
-          <a:ln/>
-        </p:spPr>
-        <p:txBody>
-          <a:bodyPr wrap="square" lIns="0" tIns="0" rIns="0" bIns="0" rtlCol="0" anchor="ctr"/>
-          <a:lstStyle/>
-          <a:p>
-            <a:pPr indent="0" marL="0">
-              <a:buNone/>
-            </a:pPr>
-            <a:r>
-              <a:rPr lang="en-US" sz="1000" dirty="0">
-                <a:solidFill>
-                  <a:srgbClr val="475569"/>
-                </a:solidFill>
-                <a:latin typeface="Calibri" pitchFamily="34" charset="0"/>
-                <a:ea typeface="Calibri" pitchFamily="34" charset="-122"/>
-                <a:cs typeface="Calibri" pitchFamily="34" charset="-120"/>
-              </a:rPr>
-              <a:t>No named platform has been agreed to host the first MVP-aligned data plane.</a:t>
-            </a:r>
-            <a:endParaRPr lang="en-US" sz="1000" dirty="0"/>
-          </a:p>
-        </p:txBody>
-      </p:sp>
-      <p:sp>
-        <p:nvSpPr>
-          <p:cNvPr id="18" name="Text 16"/>
-          <p:cNvSpPr/>
-          <p:nvPr/>
-        </p:nvSpPr>
-        <p:spPr>
-          <a:xfrm>
-            <a:off x="5230368" y="3081528"/>
-            <a:ext cx="2651760" cy="475488"/>
-          </a:xfrm>
-          <a:prstGeom prst="rect">
-            <a:avLst/>
-          </a:prstGeom>
-          <a:noFill/>
-          <a:ln/>
-        </p:spPr>
-        <p:txBody>
-          <a:bodyPr wrap="square" lIns="0" tIns="0" rIns="0" bIns="0" rtlCol="0" anchor="ctr"/>
-          <a:lstStyle/>
-          <a:p>
-            <a:pPr indent="0" marL="0">
-              <a:buNone/>
-            </a:pPr>
-            <a:r>
-              <a:rPr lang="en-US" sz="1000" dirty="0">
-                <a:solidFill>
-                  <a:srgbClr val="0B1530"/>
-                </a:solidFill>
-                <a:latin typeface="Calibri" pitchFamily="34" charset="0"/>
-                <a:ea typeface="Calibri" pitchFamily="34" charset="-122"/>
-                <a:cs typeface="Calibri" pitchFamily="34" charset="-120"/>
-              </a:rPr>
-              <a:t>Confirm the first reference data platform and accountable sponsor.</a:t>
-            </a:r>
-            <a:endParaRPr lang="en-US" sz="1000" dirty="0"/>
-          </a:p>
-        </p:txBody>
-      </p:sp>
-      <p:sp>
-        <p:nvSpPr>
-          <p:cNvPr id="19" name="Text 17"/>
-          <p:cNvSpPr/>
-          <p:nvPr/>
-        </p:nvSpPr>
-        <p:spPr>
-          <a:xfrm>
-            <a:off x="7973568" y="3081528"/>
-            <a:ext cx="1783080" cy="475488"/>
-          </a:xfrm>
-          <a:prstGeom prst="rect">
-            <a:avLst/>
-          </a:prstGeom>
-          <a:noFill/>
-          <a:ln/>
-        </p:spPr>
-        <p:txBody>
-          <a:bodyPr wrap="square" lIns="0" tIns="0" rIns="0" bIns="0" rtlCol="0" anchor="ctr"/>
-          <a:lstStyle/>
-          <a:p>
-            <a:pPr indent="0" marL="0">
-              <a:buNone/>
-            </a:pPr>
-            <a:r>
-              <a:rPr lang="en-US" sz="1000" i="1" dirty="0">
-                <a:solidFill>
-                  <a:srgbClr val="475569"/>
-                </a:solidFill>
-                <a:latin typeface="Calibri" pitchFamily="34" charset="0"/>
-                <a:ea typeface="Calibri" pitchFamily="34" charset="-122"/>
-                <a:cs typeface="Calibri" pitchFamily="34" charset="-120"/>
-              </a:rPr>
-              <a:t>Moves the workstream from theoretical design into executable build.</a:t>
-            </a:r>
-            <a:endParaRPr lang="en-US" sz="1000" dirty="0"/>
-          </a:p>
-        </p:txBody>
-      </p:sp>
-      <p:sp>
-        <p:nvSpPr>
-          <p:cNvPr id="20" name="Shape 18"/>
-          <p:cNvSpPr/>
-          <p:nvPr/>
-        </p:nvSpPr>
-        <p:spPr>
-          <a:xfrm>
-            <a:off x="9848088" y="3200400"/>
-            <a:ext cx="914400" cy="237744"/>
-          </a:xfrm>
-          <a:prstGeom prst="roundRect">
-            <a:avLst>
-              <a:gd name="adj" fmla="val 50000"/>
-            </a:avLst>
-          </a:prstGeom>
-          <a:solidFill>
-            <a:srgbClr val="FFFBEB"/>
-          </a:solidFill>
-          <a:ln w="6350">
-            <a:solidFill>
-              <a:srgbClr val="92400E"/>
-            </a:solidFill>
-            <a:prstDash val="solid"/>
-          </a:ln>
-        </p:spPr>
-      </p:sp>
-      <p:sp>
-        <p:nvSpPr>
-          <p:cNvPr id="21" name="Text 19"/>
-          <p:cNvSpPr/>
-          <p:nvPr/>
-        </p:nvSpPr>
-        <p:spPr>
-          <a:xfrm>
-            <a:off x="9848088" y="3200400"/>
-            <a:ext cx="914400" cy="237744"/>
-          </a:xfrm>
-          <a:prstGeom prst="rect">
-            <a:avLst/>
-          </a:prstGeom>
-          <a:noFill/>
-          <a:ln/>
-        </p:spPr>
-        <p:txBody>
-          <a:bodyPr wrap="square" lIns="0" tIns="0" rIns="0" bIns="0" rtlCol="0" anchor="ctr"/>
-          <a:lstStyle/>
-          <a:p>
-            <a:pPr algn="ctr" indent="0" marL="0">
-              <a:buNone/>
-            </a:pPr>
-            <a:r>
-              <a:rPr lang="en-US" sz="850" b="1" spc="300" kern="0" dirty="0">
-                <a:solidFill>
-                  <a:srgbClr val="92400E"/>
-                </a:solidFill>
-                <a:latin typeface="Calibri" pitchFamily="34" charset="0"/>
-                <a:ea typeface="Calibri" pitchFamily="34" charset="-122"/>
-                <a:cs typeface="Calibri" pitchFamily="34" charset="-120"/>
-              </a:rPr>
-              <a:t>IMMEDIATE</a:t>
-            </a:r>
-            <a:endParaRPr lang="en-US" sz="850" dirty="0"/>
-          </a:p>
-        </p:txBody>
-      </p:sp>
-      <p:sp>
-        <p:nvSpPr>
-          <p:cNvPr id="22" name="Text 20"/>
-          <p:cNvSpPr/>
-          <p:nvPr/>
-        </p:nvSpPr>
-        <p:spPr>
-          <a:xfrm>
-            <a:off x="10853928" y="3081528"/>
-            <a:ext cx="914400" cy="475488"/>
-          </a:xfrm>
-          <a:prstGeom prst="rect">
-            <a:avLst/>
-          </a:prstGeom>
-          <a:noFill/>
-          <a:ln/>
-        </p:spPr>
-        <p:txBody>
-          <a:bodyPr wrap="square" lIns="0" tIns="0" rIns="0" bIns="0" rtlCol="0" anchor="ctr"/>
-          <a:lstStyle/>
-          <a:p>
-            <a:pPr indent="0" marL="0">
-              <a:buNone/>
-            </a:pPr>
-            <a:r>
-              <a:rPr lang="en-US" sz="1000" b="1" dirty="0">
-                <a:solidFill>
-                  <a:srgbClr val="0B1530"/>
-                </a:solidFill>
-                <a:latin typeface="Calibri" pitchFamily="34" charset="0"/>
-                <a:ea typeface="Calibri" pitchFamily="34" charset="-122"/>
-                <a:cs typeface="Calibri" pitchFamily="34" charset="-120"/>
-              </a:rPr>
-              <a:t>CTO + Platform sponsor</a:t>
-            </a:r>
-            <a:endParaRPr lang="en-US" sz="1000" dirty="0"/>
-          </a:p>
-        </p:txBody>
-      </p:sp>
-      <p:sp>
-        <p:nvSpPr>
-          <p:cNvPr id="23" name="Shape 21"/>
-          <p:cNvSpPr/>
-          <p:nvPr/>
-        </p:nvSpPr>
-        <p:spPr>
-          <a:xfrm>
-            <a:off x="594360" y="3630168"/>
-            <a:ext cx="11155680" cy="530352"/>
-          </a:xfrm>
-          <a:prstGeom prst="rect">
-            <a:avLst/>
-          </a:prstGeom>
-          <a:solidFill>
-            <a:srgbClr val="F8FAFC"/>
-          </a:solidFill>
-          <a:ln w="12700">
-            <a:solidFill>
-              <a:srgbClr val="F8FAFC"/>
-            </a:solidFill>
-            <a:prstDash val="solid"/>
-          </a:ln>
-        </p:spPr>
-      </p:sp>
-      <p:sp>
-        <p:nvSpPr>
-          <p:cNvPr id="24" name="Shape 22"/>
-          <p:cNvSpPr/>
-          <p:nvPr/>
-        </p:nvSpPr>
-        <p:spPr>
-          <a:xfrm>
-            <a:off x="594360" y="3648456"/>
-            <a:ext cx="45720" cy="475488"/>
-          </a:xfrm>
-          <a:prstGeom prst="rect">
-            <a:avLst/>
-          </a:prstGeom>
-          <a:solidFill>
-            <a:srgbClr val="B45309"/>
-          </a:solidFill>
-          <a:ln w="12700">
-            <a:solidFill>
-              <a:srgbClr val="B45309"/>
-            </a:solidFill>
-            <a:prstDash val="solid"/>
-          </a:ln>
-        </p:spPr>
-      </p:sp>
-      <p:sp>
-        <p:nvSpPr>
-          <p:cNvPr id="25" name="Text 23"/>
-          <p:cNvSpPr/>
-          <p:nvPr/>
-        </p:nvSpPr>
-        <p:spPr>
-          <a:xfrm>
-            <a:off x="704088" y="3648456"/>
-            <a:ext cx="2029968" cy="475488"/>
-          </a:xfrm>
-          <a:prstGeom prst="rect">
-            <a:avLst/>
-          </a:prstGeom>
-          <a:noFill/>
-          <a:ln/>
-        </p:spPr>
-        <p:txBody>
-          <a:bodyPr wrap="square" lIns="0" tIns="0" rIns="0" bIns="0" rtlCol="0" anchor="ctr"/>
-          <a:lstStyle/>
-          <a:p>
-            <a:pPr indent="0" marL="0">
-              <a:buNone/>
-            </a:pPr>
-            <a:r>
-              <a:rPr lang="en-US" sz="1100" b="1" dirty="0">
-                <a:solidFill>
-                  <a:srgbClr val="0B1530"/>
-                </a:solidFill>
-                <a:latin typeface="Calibri" pitchFamily="34" charset="0"/>
-                <a:ea typeface="Calibri" pitchFamily="34" charset="-122"/>
-                <a:cs typeface="Calibri" pitchFamily="34" charset="-120"/>
-              </a:rPr>
-              <a:t>Group AI embedding dependency</a:t>
-            </a:r>
-            <a:endParaRPr lang="en-US" sz="1100" dirty="0"/>
-          </a:p>
-        </p:txBody>
-      </p:sp>
-      <p:sp>
-        <p:nvSpPr>
-          <p:cNvPr id="26" name="Text 24"/>
-          <p:cNvSpPr/>
-          <p:nvPr/>
-        </p:nvSpPr>
-        <p:spPr>
-          <a:xfrm>
-            <a:off x="2898648" y="3648456"/>
-            <a:ext cx="2240280" cy="475488"/>
-          </a:xfrm>
-          <a:prstGeom prst="rect">
-            <a:avLst/>
-          </a:prstGeom>
-          <a:noFill/>
-          <a:ln/>
-        </p:spPr>
-        <p:txBody>
-          <a:bodyPr wrap="square" lIns="0" tIns="0" rIns="0" bIns="0" rtlCol="0" anchor="ctr"/>
-          <a:lstStyle/>
-          <a:p>
-            <a:pPr indent="0" marL="0">
-              <a:buNone/>
-            </a:pPr>
-            <a:r>
-              <a:rPr lang="en-US" sz="1000" dirty="0">
-                <a:solidFill>
-                  <a:srgbClr val="475569"/>
-                </a:solidFill>
-                <a:latin typeface="Calibri" pitchFamily="34" charset="0"/>
-                <a:ea typeface="Calibri" pitchFamily="34" charset="-122"/>
-                <a:cs typeface="Calibri" pitchFamily="34" charset="-120"/>
-              </a:rPr>
-              <a:t>Approved embedding path, lifecycle ownership and service commitment not yet formalised.</a:t>
-            </a:r>
-            <a:endParaRPr lang="en-US" sz="1000" dirty="0"/>
-          </a:p>
-        </p:txBody>
-      </p:sp>
-      <p:sp>
-        <p:nvSpPr>
-          <p:cNvPr id="27" name="Text 25"/>
-          <p:cNvSpPr/>
-          <p:nvPr/>
-        </p:nvSpPr>
-        <p:spPr>
-          <a:xfrm>
-            <a:off x="5230368" y="3648456"/>
-            <a:ext cx="2651760" cy="475488"/>
-          </a:xfrm>
-          <a:prstGeom prst="rect">
-            <a:avLst/>
-          </a:prstGeom>
-          <a:noFill/>
-          <a:ln/>
-        </p:spPr>
-        <p:txBody>
-          <a:bodyPr wrap="square" lIns="0" tIns="0" rIns="0" bIns="0" rtlCol="0" anchor="ctr"/>
-          <a:lstStyle/>
-          <a:p>
-            <a:pPr indent="0" marL="0">
-              <a:buNone/>
-            </a:pPr>
-            <a:r>
-              <a:rPr lang="en-US" sz="1000" dirty="0">
-                <a:solidFill>
-                  <a:srgbClr val="0B1530"/>
-                </a:solidFill>
-                <a:latin typeface="Calibri" pitchFamily="34" charset="0"/>
-                <a:ea typeface="Calibri" pitchFamily="34" charset="-122"/>
-                <a:cs typeface="Calibri" pitchFamily="34" charset="-120"/>
-              </a:rPr>
-              <a:t>Confirm Group AI as model-lifecycle owner; approved model; MCP access path; refresh model + MVP SLA.</a:t>
-            </a:r>
-            <a:endParaRPr lang="en-US" sz="1000" dirty="0"/>
-          </a:p>
-        </p:txBody>
-      </p:sp>
-      <p:sp>
-        <p:nvSpPr>
-          <p:cNvPr id="28" name="Text 26"/>
-          <p:cNvSpPr/>
-          <p:nvPr/>
-        </p:nvSpPr>
-        <p:spPr>
-          <a:xfrm>
-            <a:off x="7973568" y="3648456"/>
-            <a:ext cx="1783080" cy="475488"/>
-          </a:xfrm>
-          <a:prstGeom prst="rect">
-            <a:avLst/>
-          </a:prstGeom>
-          <a:noFill/>
-          <a:ln/>
-        </p:spPr>
-        <p:txBody>
-          <a:bodyPr wrap="square" lIns="0" tIns="0" rIns="0" bIns="0" rtlCol="0" anchor="ctr"/>
-          <a:lstStyle/>
-          <a:p>
-            <a:pPr indent="0" marL="0">
-              <a:buNone/>
-            </a:pPr>
-            <a:r>
-              <a:rPr lang="en-US" sz="1000" i="1" dirty="0">
-                <a:solidFill>
-                  <a:srgbClr val="475569"/>
-                </a:solidFill>
-                <a:latin typeface="Calibri" pitchFamily="34" charset="0"/>
-                <a:ea typeface="Calibri" pitchFamily="34" charset="-122"/>
-                <a:cs typeface="Calibri" pitchFamily="34" charset="-120"/>
-              </a:rPr>
-              <a:t>Removes the keystone dependency for VectorDBaaS and any semantic service.</a:t>
-            </a:r>
-            <a:endParaRPr lang="en-US" sz="1000" dirty="0"/>
-          </a:p>
-        </p:txBody>
-      </p:sp>
-      <p:sp>
-        <p:nvSpPr>
-          <p:cNvPr id="29" name="Shape 27"/>
-          <p:cNvSpPr/>
-          <p:nvPr/>
-        </p:nvSpPr>
-        <p:spPr>
-          <a:xfrm>
-            <a:off x="9848088" y="3767328"/>
-            <a:ext cx="914400" cy="237744"/>
-          </a:xfrm>
-          <a:prstGeom prst="roundRect">
-            <a:avLst>
-              <a:gd name="adj" fmla="val 50000"/>
-            </a:avLst>
-          </a:prstGeom>
-          <a:solidFill>
-            <a:srgbClr val="FFFBEB"/>
-          </a:solidFill>
-          <a:ln w="6350">
-            <a:solidFill>
-              <a:srgbClr val="92400E"/>
-            </a:solidFill>
-            <a:prstDash val="solid"/>
-          </a:ln>
-        </p:spPr>
-      </p:sp>
-      <p:sp>
-        <p:nvSpPr>
-          <p:cNvPr id="30" name="Text 28"/>
-          <p:cNvSpPr/>
-          <p:nvPr/>
-        </p:nvSpPr>
-        <p:spPr>
-          <a:xfrm>
-            <a:off x="9848088" y="3767328"/>
-            <a:ext cx="914400" cy="237744"/>
-          </a:xfrm>
-          <a:prstGeom prst="rect">
-            <a:avLst/>
-          </a:prstGeom>
-          <a:noFill/>
-          <a:ln/>
-        </p:spPr>
-        <p:txBody>
-          <a:bodyPr wrap="square" lIns="0" tIns="0" rIns="0" bIns="0" rtlCol="0" anchor="ctr"/>
-          <a:lstStyle/>
-          <a:p>
-            <a:pPr algn="ctr" indent="0" marL="0">
-              <a:buNone/>
-            </a:pPr>
-            <a:r>
-              <a:rPr lang="en-US" sz="850" b="1" spc="300" kern="0" dirty="0">
-                <a:solidFill>
-                  <a:srgbClr val="92400E"/>
-                </a:solidFill>
-                <a:latin typeface="Calibri" pitchFamily="34" charset="0"/>
-                <a:ea typeface="Calibri" pitchFamily="34" charset="-122"/>
-                <a:cs typeface="Calibri" pitchFamily="34" charset="-120"/>
-              </a:rPr>
-              <a:t>IMMEDIATE</a:t>
-            </a:r>
-            <a:endParaRPr lang="en-US" sz="850" dirty="0"/>
-          </a:p>
-        </p:txBody>
-      </p:sp>
-      <p:sp>
-        <p:nvSpPr>
-          <p:cNvPr id="31" name="Text 29"/>
-          <p:cNvSpPr/>
-          <p:nvPr/>
-        </p:nvSpPr>
-        <p:spPr>
-          <a:xfrm>
-            <a:off x="10853928" y="3648456"/>
-            <a:ext cx="914400" cy="475488"/>
-          </a:xfrm>
-          <a:prstGeom prst="rect">
-            <a:avLst/>
-          </a:prstGeom>
-          <a:noFill/>
-          <a:ln/>
-        </p:spPr>
-        <p:txBody>
-          <a:bodyPr wrap="square" lIns="0" tIns="0" rIns="0" bIns="0" rtlCol="0" anchor="ctr"/>
-          <a:lstStyle/>
-          <a:p>
-            <a:pPr indent="0" marL="0">
-              <a:buNone/>
-            </a:pPr>
-            <a:r>
-              <a:rPr lang="en-US" sz="1000" b="1" dirty="0">
-                <a:solidFill>
-                  <a:srgbClr val="0B1530"/>
-                </a:solidFill>
-                <a:latin typeface="Calibri" pitchFamily="34" charset="0"/>
-                <a:ea typeface="Calibri" pitchFamily="34" charset="-122"/>
-                <a:cs typeface="Calibri" pitchFamily="34" charset="-120"/>
-              </a:rPr>
-              <a:t>CTO + Group AI Head</a:t>
-            </a:r>
-            <a:endParaRPr lang="en-US" sz="1000" dirty="0"/>
-          </a:p>
-        </p:txBody>
-      </p:sp>
-      <p:sp>
-        <p:nvSpPr>
-          <p:cNvPr id="32" name="Shape 30"/>
-          <p:cNvSpPr/>
-          <p:nvPr/>
-        </p:nvSpPr>
-        <p:spPr>
-          <a:xfrm>
-            <a:off x="594360" y="4215384"/>
-            <a:ext cx="45720" cy="475488"/>
-          </a:xfrm>
-          <a:prstGeom prst="rect">
-            <a:avLst/>
-          </a:prstGeom>
-          <a:solidFill>
-            <a:srgbClr val="B45309"/>
-          </a:solidFill>
-          <a:ln w="12700">
-            <a:solidFill>
-              <a:srgbClr val="B45309"/>
-            </a:solidFill>
-            <a:prstDash val="solid"/>
-          </a:ln>
-        </p:spPr>
-      </p:sp>
-      <p:sp>
-        <p:nvSpPr>
-          <p:cNvPr id="33" name="Text 31"/>
-          <p:cNvSpPr/>
-          <p:nvPr/>
-        </p:nvSpPr>
-        <p:spPr>
-          <a:xfrm>
-            <a:off x="704088" y="4215384"/>
-            <a:ext cx="2029968" cy="475488"/>
-          </a:xfrm>
-          <a:prstGeom prst="rect">
-            <a:avLst/>
-          </a:prstGeom>
-          <a:noFill/>
-          <a:ln/>
-        </p:spPr>
-        <p:txBody>
-          <a:bodyPr wrap="square" lIns="0" tIns="0" rIns="0" bIns="0" rtlCol="0" anchor="ctr"/>
-          <a:lstStyle/>
-          <a:p>
-            <a:pPr indent="0" marL="0">
-              <a:buNone/>
-            </a:pPr>
-            <a:r>
-              <a:rPr lang="en-US" sz="1100" b="1" dirty="0">
-                <a:solidFill>
-                  <a:srgbClr val="0B1530"/>
-                </a:solidFill>
-                <a:latin typeface="Calibri" pitchFamily="34" charset="0"/>
-                <a:ea typeface="Calibri" pitchFamily="34" charset="-122"/>
-                <a:cs typeface="Calibri" pitchFamily="34" charset="-120"/>
-              </a:rPr>
-              <a:t>Platform engineering capacity</a:t>
-            </a:r>
-            <a:endParaRPr lang="en-US" sz="1100" dirty="0"/>
-          </a:p>
-        </p:txBody>
-      </p:sp>
-      <p:sp>
-        <p:nvSpPr>
-          <p:cNvPr id="34" name="Text 32"/>
-          <p:cNvSpPr/>
-          <p:nvPr/>
-        </p:nvSpPr>
-        <p:spPr>
-          <a:xfrm>
-            <a:off x="2898648" y="4215384"/>
-            <a:ext cx="2240280" cy="475488"/>
-          </a:xfrm>
-          <a:prstGeom prst="rect">
-            <a:avLst/>
-          </a:prstGeom>
-          <a:noFill/>
-          <a:ln/>
-        </p:spPr>
-        <p:txBody>
-          <a:bodyPr wrap="square" lIns="0" tIns="0" rIns="0" bIns="0" rtlCol="0" anchor="ctr"/>
-          <a:lstStyle/>
-          <a:p>
-            <a:pPr indent="0" marL="0">
-              <a:buNone/>
-            </a:pPr>
-            <a:r>
-              <a:rPr lang="en-US" sz="1000" dirty="0">
-                <a:solidFill>
-                  <a:srgbClr val="475569"/>
-                </a:solidFill>
-                <a:latin typeface="Calibri" pitchFamily="34" charset="0"/>
-                <a:ea typeface="Calibri" pitchFamily="34" charset="-122"/>
-                <a:cs typeface="Calibri" pitchFamily="34" charset="-120"/>
-              </a:rPr>
-              <a:t>Delivery will stall if no platform engineering team is assigned to the reference platform.</a:t>
-            </a:r>
-            <a:endParaRPr lang="en-US" sz="1000" dirty="0"/>
-          </a:p>
-        </p:txBody>
-      </p:sp>
-      <p:sp>
-        <p:nvSpPr>
-          <p:cNvPr id="35" name="Text 33"/>
-          <p:cNvSpPr/>
-          <p:nvPr/>
-        </p:nvSpPr>
-        <p:spPr>
-          <a:xfrm>
-            <a:off x="5230368" y="4215384"/>
-            <a:ext cx="2651760" cy="475488"/>
-          </a:xfrm>
-          <a:prstGeom prst="rect">
-            <a:avLst/>
-          </a:prstGeom>
-          <a:noFill/>
-          <a:ln/>
-        </p:spPr>
-        <p:txBody>
-          <a:bodyPr wrap="square" lIns="0" tIns="0" rIns="0" bIns="0" rtlCol="0" anchor="ctr"/>
-          <a:lstStyle/>
-          <a:p>
-            <a:pPr indent="0" marL="0">
-              <a:buNone/>
-            </a:pPr>
-            <a:r>
-              <a:rPr lang="en-US" sz="1000" dirty="0">
-                <a:solidFill>
-                  <a:srgbClr val="0B1530"/>
-                </a:solidFill>
-                <a:latin typeface="Calibri" pitchFamily="34" charset="0"/>
-                <a:ea typeface="Calibri" pitchFamily="34" charset="-122"/>
-                <a:cs typeface="Calibri" pitchFamily="34" charset="-120"/>
-              </a:rPr>
-              <a:t>Commit named platform engineering capacity for the MVP.</a:t>
-            </a:r>
-            <a:endParaRPr lang="en-US" sz="1000" dirty="0"/>
-          </a:p>
-        </p:txBody>
-      </p:sp>
-      <p:sp>
-        <p:nvSpPr>
-          <p:cNvPr id="36" name="Text 34"/>
-          <p:cNvSpPr/>
-          <p:nvPr/>
-        </p:nvSpPr>
-        <p:spPr>
-          <a:xfrm>
-            <a:off x="7973568" y="4215384"/>
-            <a:ext cx="1783080" cy="475488"/>
-          </a:xfrm>
-          <a:prstGeom prst="rect">
-            <a:avLst/>
-          </a:prstGeom>
-          <a:noFill/>
-          <a:ln/>
-        </p:spPr>
-        <p:txBody>
-          <a:bodyPr wrap="square" lIns="0" tIns="0" rIns="0" bIns="0" rtlCol="0" anchor="ctr"/>
-          <a:lstStyle/>
-          <a:p>
-            <a:pPr indent="0" marL="0">
-              <a:buNone/>
-            </a:pPr>
-            <a:r>
-              <a:rPr lang="en-US" sz="1000" i="1" dirty="0">
-                <a:solidFill>
-                  <a:srgbClr val="475569"/>
-                </a:solidFill>
-                <a:latin typeface="Calibri" pitchFamily="34" charset="0"/>
-                <a:ea typeface="Calibri" pitchFamily="34" charset="-122"/>
-                <a:cs typeface="Calibri" pitchFamily="34" charset="-120"/>
-              </a:rPr>
-              <a:t>Without committed engineering hands, the roadmap remains a paper plan.</a:t>
-            </a:r>
-            <a:endParaRPr lang="en-US" sz="1000" dirty="0"/>
-          </a:p>
-        </p:txBody>
-      </p:sp>
-      <p:sp>
-        <p:nvSpPr>
-          <p:cNvPr id="37" name="Shape 35"/>
-          <p:cNvSpPr/>
-          <p:nvPr/>
-        </p:nvSpPr>
-        <p:spPr>
-          <a:xfrm>
-            <a:off x="9848088" y="4334256"/>
-            <a:ext cx="914400" cy="237744"/>
-          </a:xfrm>
-          <a:prstGeom prst="roundRect">
-            <a:avLst>
-              <a:gd name="adj" fmla="val 50000"/>
-            </a:avLst>
-          </a:prstGeom>
-          <a:solidFill>
-            <a:srgbClr val="FFFBEB"/>
-          </a:solidFill>
-          <a:ln w="6350">
-            <a:solidFill>
-              <a:srgbClr val="92400E"/>
-            </a:solidFill>
-            <a:prstDash val="solid"/>
-          </a:ln>
-        </p:spPr>
-      </p:sp>
-      <p:sp>
-        <p:nvSpPr>
-          <p:cNvPr id="38" name="Text 36"/>
-          <p:cNvSpPr/>
-          <p:nvPr/>
-        </p:nvSpPr>
-        <p:spPr>
-          <a:xfrm>
-            <a:off x="9848088" y="4334256"/>
-            <a:ext cx="914400" cy="237744"/>
-          </a:xfrm>
-          <a:prstGeom prst="rect">
-            <a:avLst/>
-          </a:prstGeom>
-          <a:noFill/>
-          <a:ln/>
-        </p:spPr>
-        <p:txBody>
-          <a:bodyPr wrap="square" lIns="0" tIns="0" rIns="0" bIns="0" rtlCol="0" anchor="ctr"/>
-          <a:lstStyle/>
-          <a:p>
-            <a:pPr algn="ctr" indent="0" marL="0">
-              <a:buNone/>
-            </a:pPr>
-            <a:r>
-              <a:rPr lang="en-US" sz="850" b="1" spc="300" kern="0" dirty="0">
-                <a:solidFill>
-                  <a:srgbClr val="92400E"/>
-                </a:solidFill>
-                <a:latin typeface="Calibri" pitchFamily="34" charset="0"/>
-                <a:ea typeface="Calibri" pitchFamily="34" charset="-122"/>
-                <a:cs typeface="Calibri" pitchFamily="34" charset="-120"/>
-              </a:rPr>
-              <a:t>IMMEDIATE</a:t>
-            </a:r>
-            <a:endParaRPr lang="en-US" sz="850" dirty="0"/>
-          </a:p>
-        </p:txBody>
-      </p:sp>
-      <p:sp>
-        <p:nvSpPr>
-          <p:cNvPr id="39" name="Text 37"/>
-          <p:cNvSpPr/>
-          <p:nvPr/>
-        </p:nvSpPr>
-        <p:spPr>
-          <a:xfrm>
-            <a:off x="10853928" y="4215384"/>
-            <a:ext cx="914400" cy="475488"/>
-          </a:xfrm>
-          <a:prstGeom prst="rect">
-            <a:avLst/>
-          </a:prstGeom>
-          <a:noFill/>
-          <a:ln/>
-        </p:spPr>
-        <p:txBody>
-          <a:bodyPr wrap="square" lIns="0" tIns="0" rIns="0" bIns="0" rtlCol="0" anchor="ctr"/>
-          <a:lstStyle/>
-          <a:p>
-            <a:pPr indent="0" marL="0">
-              <a:buNone/>
-            </a:pPr>
-            <a:r>
-              <a:rPr lang="en-US" sz="1000" b="1" dirty="0">
-                <a:solidFill>
-                  <a:srgbClr val="0B1530"/>
-                </a:solidFill>
-                <a:latin typeface="Calibri" pitchFamily="34" charset="0"/>
-                <a:ea typeface="Calibri" pitchFamily="34" charset="-122"/>
-                <a:cs typeface="Calibri" pitchFamily="34" charset="-120"/>
-              </a:rPr>
-              <a:t>Platform sponsor + CTO</a:t>
-            </a:r>
-            <a:endParaRPr lang="en-US" sz="1000" dirty="0"/>
-          </a:p>
-        </p:txBody>
-      </p:sp>
-      <p:sp>
-        <p:nvSpPr>
-          <p:cNvPr id="40" name="Shape 38"/>
-          <p:cNvSpPr/>
-          <p:nvPr/>
-        </p:nvSpPr>
-        <p:spPr>
-          <a:xfrm>
-            <a:off x="594360" y="4764024"/>
-            <a:ext cx="11155680" cy="530352"/>
-          </a:xfrm>
-          <a:prstGeom prst="rect">
-            <a:avLst/>
-          </a:prstGeom>
-          <a:solidFill>
-            <a:srgbClr val="F8FAFC"/>
-          </a:solidFill>
-          <a:ln w="12700">
-            <a:solidFill>
-              <a:srgbClr val="F8FAFC"/>
-            </a:solidFill>
-            <a:prstDash val="solid"/>
-          </a:ln>
-        </p:spPr>
-      </p:sp>
-      <p:sp>
-        <p:nvSpPr>
-          <p:cNvPr id="41" name="Shape 39"/>
-          <p:cNvSpPr/>
-          <p:nvPr/>
-        </p:nvSpPr>
-        <p:spPr>
-          <a:xfrm>
-            <a:off x="594360" y="4782312"/>
-            <a:ext cx="45720" cy="475488"/>
-          </a:xfrm>
-          <a:prstGeom prst="rect">
-            <a:avLst/>
-          </a:prstGeom>
-          <a:solidFill>
-            <a:srgbClr val="B45309"/>
-          </a:solidFill>
-          <a:ln w="12700">
-            <a:solidFill>
-              <a:srgbClr val="B45309"/>
-            </a:solidFill>
-            <a:prstDash val="solid"/>
-          </a:ln>
-        </p:spPr>
-      </p:sp>
-      <p:sp>
-        <p:nvSpPr>
-          <p:cNvPr id="42" name="Text 40"/>
-          <p:cNvSpPr/>
-          <p:nvPr/>
-        </p:nvSpPr>
-        <p:spPr>
-          <a:xfrm>
-            <a:off x="704088" y="4782312"/>
-            <a:ext cx="2029968" cy="475488"/>
-          </a:xfrm>
-          <a:prstGeom prst="rect">
-            <a:avLst/>
-          </a:prstGeom>
-          <a:noFill/>
-          <a:ln/>
-        </p:spPr>
-        <p:txBody>
-          <a:bodyPr wrap="square" lIns="0" tIns="0" rIns="0" bIns="0" rtlCol="0" anchor="ctr"/>
-          <a:lstStyle/>
-          <a:p>
-            <a:pPr indent="0" marL="0">
-              <a:buNone/>
-            </a:pPr>
-            <a:r>
-              <a:rPr lang="en-US" sz="1100" b="1" dirty="0">
-                <a:solidFill>
-                  <a:srgbClr val="0B1530"/>
-                </a:solidFill>
-                <a:latin typeface="Calibri" pitchFamily="34" charset="0"/>
-                <a:ea typeface="Calibri" pitchFamily="34" charset="-122"/>
-                <a:cs typeface="Calibri" pitchFamily="34" charset="-120"/>
-              </a:rPr>
-              <a:t>Sequential control-function engagement</a:t>
-            </a:r>
-            <a:endParaRPr lang="en-US" sz="1100" dirty="0"/>
-          </a:p>
-        </p:txBody>
-      </p:sp>
-      <p:sp>
-        <p:nvSpPr>
-          <p:cNvPr id="43" name="Text 41"/>
-          <p:cNvSpPr/>
-          <p:nvPr/>
-        </p:nvSpPr>
-        <p:spPr>
-          <a:xfrm>
-            <a:off x="2898648" y="4782312"/>
-            <a:ext cx="2240280" cy="475488"/>
-          </a:xfrm>
-          <a:prstGeom prst="rect">
-            <a:avLst/>
-          </a:prstGeom>
-          <a:noFill/>
-          <a:ln/>
-        </p:spPr>
-        <p:txBody>
-          <a:bodyPr wrap="square" lIns="0" tIns="0" rIns="0" bIns="0" rtlCol="0" anchor="ctr"/>
-          <a:lstStyle/>
-          <a:p>
-            <a:pPr indent="0" marL="0">
-              <a:buNone/>
-            </a:pPr>
-            <a:r>
-              <a:rPr lang="en-US" sz="1000" dirty="0">
-                <a:solidFill>
-                  <a:srgbClr val="475569"/>
-                </a:solidFill>
-                <a:latin typeface="Calibri" pitchFamily="34" charset="0"/>
-                <a:ea typeface="Calibri" pitchFamily="34" charset="-122"/>
-                <a:cs typeface="Calibri" pitchFamily="34" charset="-120"/>
-              </a:rPr>
-              <a:t>Privacy, security, model risk, audit, resilience and TPRM may engage in series, not parallel.</a:t>
-            </a:r>
-            <a:endParaRPr lang="en-US" sz="1000" dirty="0"/>
-          </a:p>
-        </p:txBody>
-      </p:sp>
-      <p:sp>
-        <p:nvSpPr>
-          <p:cNvPr id="44" name="Text 42"/>
-          <p:cNvSpPr/>
-          <p:nvPr/>
-        </p:nvSpPr>
-        <p:spPr>
-          <a:xfrm>
-            <a:off x="5230368" y="4782312"/>
-            <a:ext cx="2651760" cy="475488"/>
-          </a:xfrm>
-          <a:prstGeom prst="rect">
-            <a:avLst/>
-          </a:prstGeom>
-          <a:noFill/>
-          <a:ln/>
-        </p:spPr>
-        <p:txBody>
-          <a:bodyPr wrap="square" lIns="0" tIns="0" rIns="0" bIns="0" rtlCol="0" anchor="ctr"/>
-          <a:lstStyle/>
-          <a:p>
-            <a:pPr indent="0" marL="0">
-              <a:buNone/>
-            </a:pPr>
-            <a:r>
-              <a:rPr lang="en-US" sz="1000" dirty="0">
-                <a:solidFill>
-                  <a:srgbClr val="0B1530"/>
-                </a:solidFill>
-                <a:latin typeface="Calibri" pitchFamily="34" charset="0"/>
-                <a:ea typeface="Calibri" pitchFamily="34" charset="-122"/>
-                <a:cs typeface="Calibri" pitchFamily="34" charset="-120"/>
-              </a:rPr>
-              <a:t>CIO-mandated parallel engagement model with checkpoints and stage-by-stage evidence packs.</a:t>
-            </a:r>
-            <a:endParaRPr lang="en-US" sz="1000" dirty="0"/>
-          </a:p>
-        </p:txBody>
-      </p:sp>
-      <p:sp>
-        <p:nvSpPr>
-          <p:cNvPr id="45" name="Text 43"/>
-          <p:cNvSpPr/>
-          <p:nvPr/>
-        </p:nvSpPr>
-        <p:spPr>
-          <a:xfrm>
-            <a:off x="7973568" y="4782312"/>
-            <a:ext cx="1783080" cy="475488"/>
-          </a:xfrm>
-          <a:prstGeom prst="rect">
-            <a:avLst/>
-          </a:prstGeom>
-          <a:noFill/>
-          <a:ln/>
-        </p:spPr>
-        <p:txBody>
-          <a:bodyPr wrap="square" lIns="0" tIns="0" rIns="0" bIns="0" rtlCol="0" anchor="ctr"/>
-          <a:lstStyle/>
-          <a:p>
-            <a:pPr indent="0" marL="0">
-              <a:buNone/>
-            </a:pPr>
-            <a:r>
-              <a:rPr lang="en-US" sz="1000" i="1" dirty="0">
-                <a:solidFill>
-                  <a:srgbClr val="475569"/>
-                </a:solidFill>
-                <a:latin typeface="Calibri" pitchFamily="34" charset="0"/>
-                <a:ea typeface="Calibri" pitchFamily="34" charset="-122"/>
-                <a:cs typeface="Calibri" pitchFamily="34" charset="-120"/>
-              </a:rPr>
-              <a:t>Reduces approval delay and late-stage redesign risk.</a:t>
-            </a:r>
-            <a:endParaRPr lang="en-US" sz="1000" dirty="0"/>
-          </a:p>
-        </p:txBody>
-      </p:sp>
-      <p:sp>
-        <p:nvSpPr>
-          <p:cNvPr id="46" name="Shape 44"/>
-          <p:cNvSpPr/>
-          <p:nvPr/>
-        </p:nvSpPr>
-        <p:spPr>
-          <a:xfrm>
-            <a:off x="9848088" y="4901184"/>
-            <a:ext cx="914400" cy="237744"/>
-          </a:xfrm>
-          <a:prstGeom prst="roundRect">
-            <a:avLst>
-              <a:gd name="adj" fmla="val 50000"/>
-            </a:avLst>
-          </a:prstGeom>
-          <a:solidFill>
-            <a:srgbClr val="FFFBEB"/>
-          </a:solidFill>
-          <a:ln w="6350">
-            <a:solidFill>
-              <a:srgbClr val="92400E"/>
-            </a:solidFill>
-            <a:prstDash val="solid"/>
-          </a:ln>
-        </p:spPr>
-      </p:sp>
-      <p:sp>
-        <p:nvSpPr>
-          <p:cNvPr id="47" name="Text 45"/>
-          <p:cNvSpPr/>
-          <p:nvPr/>
-        </p:nvSpPr>
-        <p:spPr>
-          <a:xfrm>
-            <a:off x="9848088" y="4901184"/>
-            <a:ext cx="914400" cy="237744"/>
-          </a:xfrm>
-          <a:prstGeom prst="rect">
-            <a:avLst/>
-          </a:prstGeom>
-          <a:noFill/>
-          <a:ln/>
-        </p:spPr>
-        <p:txBody>
-          <a:bodyPr wrap="square" lIns="0" tIns="0" rIns="0" bIns="0" rtlCol="0" anchor="ctr"/>
-          <a:lstStyle/>
-          <a:p>
-            <a:pPr algn="ctr" indent="0" marL="0">
-              <a:buNone/>
-            </a:pPr>
-            <a:r>
-              <a:rPr lang="en-US" sz="850" b="1" spc="300" kern="0" dirty="0">
-                <a:solidFill>
-                  <a:srgbClr val="92400E"/>
-                </a:solidFill>
-                <a:latin typeface="Calibri" pitchFamily="34" charset="0"/>
-                <a:ea typeface="Calibri" pitchFamily="34" charset="-122"/>
-                <a:cs typeface="Calibri" pitchFamily="34" charset="-120"/>
-              </a:rPr>
-              <a:t>STAGE 0</a:t>
-            </a:r>
-            <a:endParaRPr lang="en-US" sz="850" dirty="0"/>
-          </a:p>
-        </p:txBody>
-      </p:sp>
-      <p:sp>
-        <p:nvSpPr>
-          <p:cNvPr id="48" name="Text 46"/>
-          <p:cNvSpPr/>
-          <p:nvPr/>
-        </p:nvSpPr>
-        <p:spPr>
-          <a:xfrm>
-            <a:off x="10853928" y="4782312"/>
-            <a:ext cx="914400" cy="475488"/>
-          </a:xfrm>
-          <a:prstGeom prst="rect">
-            <a:avLst/>
-          </a:prstGeom>
-          <a:noFill/>
-          <a:ln/>
-        </p:spPr>
-        <p:txBody>
-          <a:bodyPr wrap="square" lIns="0" tIns="0" rIns="0" bIns="0" rtlCol="0" anchor="ctr"/>
-          <a:lstStyle/>
-          <a:p>
-            <a:pPr indent="0" marL="0">
-              <a:buNone/>
-            </a:pPr>
-            <a:r>
-              <a:rPr lang="en-US" sz="1000" b="1" dirty="0">
-                <a:solidFill>
-                  <a:srgbClr val="0B1530"/>
-                </a:solidFill>
-                <a:latin typeface="Calibri" pitchFamily="34" charset="0"/>
-                <a:ea typeface="Calibri" pitchFamily="34" charset="-122"/>
-                <a:cs typeface="Calibri" pitchFamily="34" charset="-120"/>
-              </a:rPr>
-              <a:t>CIO sponsor</a:t>
-            </a:r>
-            <a:endParaRPr lang="en-US" sz="1000" dirty="0"/>
-          </a:p>
-        </p:txBody>
-      </p:sp>
-      <p:sp>
-        <p:nvSpPr>
-          <p:cNvPr id="49" name="Shape 47"/>
-          <p:cNvSpPr/>
-          <p:nvPr/>
-        </p:nvSpPr>
-        <p:spPr>
-          <a:xfrm>
-            <a:off x="594360" y="5349240"/>
-            <a:ext cx="45720" cy="475488"/>
-          </a:xfrm>
-          <a:prstGeom prst="rect">
-            <a:avLst/>
-          </a:prstGeom>
-          <a:solidFill>
-            <a:srgbClr val="047857"/>
-          </a:solidFill>
-          <a:ln w="12700">
-            <a:solidFill>
-              <a:srgbClr val="047857"/>
-            </a:solidFill>
-            <a:prstDash val="solid"/>
-          </a:ln>
-        </p:spPr>
-      </p:sp>
-      <p:sp>
-        <p:nvSpPr>
-          <p:cNvPr id="50" name="Text 48"/>
-          <p:cNvSpPr/>
-          <p:nvPr/>
-        </p:nvSpPr>
-        <p:spPr>
-          <a:xfrm>
-            <a:off x="704088" y="5349240"/>
-            <a:ext cx="2029968" cy="475488"/>
-          </a:xfrm>
-          <a:prstGeom prst="rect">
-            <a:avLst/>
-          </a:prstGeom>
-          <a:noFill/>
-          <a:ln/>
-        </p:spPr>
-        <p:txBody>
-          <a:bodyPr wrap="square" lIns="0" tIns="0" rIns="0" bIns="0" rtlCol="0" anchor="ctr"/>
-          <a:lstStyle/>
-          <a:p>
-            <a:pPr indent="0" marL="0">
-              <a:buNone/>
-            </a:pPr>
-            <a:r>
-              <a:rPr lang="en-US" sz="1100" b="1" dirty="0">
-                <a:solidFill>
-                  <a:srgbClr val="0B1530"/>
-                </a:solidFill>
-                <a:latin typeface="Calibri" pitchFamily="34" charset="0"/>
-                <a:ea typeface="Calibri" pitchFamily="34" charset="-122"/>
-                <a:cs typeface="Calibri" pitchFamily="34" charset="-120"/>
-              </a:rPr>
-              <a:t>Use-case readiness inconsistency</a:t>
-            </a:r>
-            <a:endParaRPr lang="en-US" sz="1100" dirty="0"/>
-          </a:p>
-        </p:txBody>
-      </p:sp>
-      <p:sp>
-        <p:nvSpPr>
-          <p:cNvPr id="51" name="Text 49"/>
-          <p:cNvSpPr/>
-          <p:nvPr/>
-        </p:nvSpPr>
-        <p:spPr>
-          <a:xfrm>
-            <a:off x="2898648" y="5349240"/>
-            <a:ext cx="2240280" cy="475488"/>
-          </a:xfrm>
-          <a:prstGeom prst="rect">
-            <a:avLst/>
-          </a:prstGeom>
-          <a:noFill/>
-          <a:ln/>
-        </p:spPr>
-        <p:txBody>
-          <a:bodyPr wrap="square" lIns="0" tIns="0" rIns="0" bIns="0" rtlCol="0" anchor="ctr"/>
-          <a:lstStyle/>
-          <a:p>
-            <a:pPr indent="0" marL="0">
-              <a:buNone/>
-            </a:pPr>
-            <a:r>
-              <a:rPr lang="en-US" sz="1000" dirty="0">
-                <a:solidFill>
-                  <a:srgbClr val="475569"/>
-                </a:solidFill>
-                <a:latin typeface="Calibri" pitchFamily="34" charset="0"/>
-                <a:ea typeface="Calibri" pitchFamily="34" charset="-122"/>
-                <a:cs typeface="Calibri" pitchFamily="34" charset="-120"/>
-              </a:rPr>
-              <a:t>16 shortlisted use cases at different maturity; may lack source clarity, classification or acceptance criteria.</a:t>
-            </a:r>
-            <a:endParaRPr lang="en-US" sz="1000" dirty="0"/>
-          </a:p>
-        </p:txBody>
-      </p:sp>
-      <p:sp>
-        <p:nvSpPr>
-          <p:cNvPr id="52" name="Text 50"/>
-          <p:cNvSpPr/>
-          <p:nvPr/>
-        </p:nvSpPr>
-        <p:spPr>
-          <a:xfrm>
-            <a:off x="5230368" y="5349240"/>
-            <a:ext cx="2651760" cy="475488"/>
-          </a:xfrm>
-          <a:prstGeom prst="rect">
-            <a:avLst/>
-          </a:prstGeom>
-          <a:noFill/>
-          <a:ln/>
-        </p:spPr>
-        <p:txBody>
-          <a:bodyPr wrap="square" lIns="0" tIns="0" rIns="0" bIns="0" rtlCol="0" anchor="ctr"/>
-          <a:lstStyle/>
-          <a:p>
-            <a:pPr indent="0" marL="0">
-              <a:buNone/>
-            </a:pPr>
-            <a:r>
-              <a:rPr lang="en-US" sz="1000" dirty="0">
-                <a:solidFill>
-                  <a:srgbClr val="0B1530"/>
-                </a:solidFill>
-                <a:latin typeface="Calibri" pitchFamily="34" charset="0"/>
-                <a:ea typeface="Calibri" pitchFamily="34" charset="-122"/>
-                <a:cs typeface="Calibri" pitchFamily="34" charset="-120"/>
-              </a:rPr>
-              <a:t>BA-led structured intake against the standard discovery template; prioritise 2–3 architecture-aligned candidates.</a:t>
-            </a:r>
-            <a:endParaRPr lang="en-US" sz="1000" dirty="0"/>
-          </a:p>
-        </p:txBody>
-      </p:sp>
-      <p:sp>
-        <p:nvSpPr>
-          <p:cNvPr id="53" name="Text 51"/>
-          <p:cNvSpPr/>
-          <p:nvPr/>
-        </p:nvSpPr>
-        <p:spPr>
-          <a:xfrm>
-            <a:off x="7973568" y="5349240"/>
-            <a:ext cx="1783080" cy="475488"/>
-          </a:xfrm>
-          <a:prstGeom prst="rect">
-            <a:avLst/>
-          </a:prstGeom>
-          <a:noFill/>
-          <a:ln/>
-        </p:spPr>
-        <p:txBody>
-          <a:bodyPr wrap="square" lIns="0" tIns="0" rIns="0" bIns="0" rtlCol="0" anchor="ctr"/>
-          <a:lstStyle/>
-          <a:p>
-            <a:pPr indent="0" marL="0">
-              <a:buNone/>
-            </a:pPr>
-            <a:r>
-              <a:rPr lang="en-US" sz="1000" i="1" dirty="0">
-                <a:solidFill>
-                  <a:srgbClr val="475569"/>
-                </a:solidFill>
-                <a:latin typeface="Calibri" pitchFamily="34" charset="0"/>
-                <a:ea typeface="Calibri" pitchFamily="34" charset="-122"/>
-                <a:cs typeface="Calibri" pitchFamily="34" charset="-120"/>
-              </a:rPr>
-              <a:t>Replaces lobbying with evidence; focuses scarce architect time on credible MVP candidates.</a:t>
-            </a:r>
-            <a:endParaRPr lang="en-US" sz="1000" dirty="0"/>
-          </a:p>
-        </p:txBody>
-      </p:sp>
-      <p:sp>
-        <p:nvSpPr>
-          <p:cNvPr id="54" name="Shape 52"/>
-          <p:cNvSpPr/>
-          <p:nvPr/>
-        </p:nvSpPr>
-        <p:spPr>
-          <a:xfrm>
-            <a:off x="9848088" y="5468112"/>
-            <a:ext cx="914400" cy="237744"/>
-          </a:xfrm>
-          <a:prstGeom prst="roundRect">
-            <a:avLst>
-              <a:gd name="adj" fmla="val 50000"/>
-            </a:avLst>
-          </a:prstGeom>
-          <a:solidFill>
-            <a:srgbClr val="ECFDF5"/>
-          </a:solidFill>
-          <a:ln w="6350">
-            <a:solidFill>
-              <a:srgbClr val="065F46"/>
-            </a:solidFill>
-            <a:prstDash val="solid"/>
-          </a:ln>
-        </p:spPr>
-      </p:sp>
-      <p:sp>
-        <p:nvSpPr>
-          <p:cNvPr id="55" name="Text 53"/>
-          <p:cNvSpPr/>
-          <p:nvPr/>
-        </p:nvSpPr>
-        <p:spPr>
-          <a:xfrm>
-            <a:off x="9848088" y="5468112"/>
-            <a:ext cx="914400" cy="237744"/>
-          </a:xfrm>
-          <a:prstGeom prst="rect">
-            <a:avLst/>
-          </a:prstGeom>
-          <a:noFill/>
-          <a:ln/>
-        </p:spPr>
-        <p:txBody>
-          <a:bodyPr wrap="square" lIns="0" tIns="0" rIns="0" bIns="0" rtlCol="0" anchor="ctr"/>
-          <a:lstStyle/>
-          <a:p>
-            <a:pPr algn="ctr" indent="0" marL="0">
-              <a:buNone/>
-            </a:pPr>
-            <a:r>
-              <a:rPr lang="en-US" sz="850" b="1" spc="300" kern="0" dirty="0">
-                <a:solidFill>
-                  <a:srgbClr val="065F46"/>
-                </a:solidFill>
-                <a:latin typeface="Calibri" pitchFamily="34" charset="0"/>
-                <a:ea typeface="Calibri" pitchFamily="34" charset="-122"/>
-                <a:cs typeface="Calibri" pitchFamily="34" charset="-120"/>
-              </a:rPr>
-              <a:t>STAGE 0–1</a:t>
-            </a:r>
-            <a:endParaRPr lang="en-US" sz="850" dirty="0"/>
-          </a:p>
-        </p:txBody>
-      </p:sp>
-      <p:sp>
-        <p:nvSpPr>
-          <p:cNvPr id="56" name="Text 54"/>
-          <p:cNvSpPr/>
-          <p:nvPr/>
-        </p:nvSpPr>
-        <p:spPr>
-          <a:xfrm>
-            <a:off x="10853928" y="5349240"/>
-            <a:ext cx="914400" cy="475488"/>
-          </a:xfrm>
-          <a:prstGeom prst="rect">
-            <a:avLst/>
-          </a:prstGeom>
-          <a:noFill/>
-          <a:ln/>
-        </p:spPr>
-        <p:txBody>
-          <a:bodyPr wrap="square" lIns="0" tIns="0" rIns="0" bIns="0" rtlCol="0" anchor="ctr"/>
-          <a:lstStyle/>
-          <a:p>
-            <a:pPr indent="0" marL="0">
-              <a:buNone/>
-            </a:pPr>
-            <a:r>
-              <a:rPr lang="en-US" sz="1000" b="1" dirty="0">
-                <a:solidFill>
-                  <a:srgbClr val="0B1530"/>
-                </a:solidFill>
-                <a:latin typeface="Calibri" pitchFamily="34" charset="0"/>
-                <a:ea typeface="Calibri" pitchFamily="34" charset="-122"/>
-                <a:cs typeface="Calibri" pitchFamily="34" charset="-120"/>
-              </a:rPr>
-              <a:t>Lead Architect + Technical BA</a:t>
-            </a:r>
-            <a:endParaRPr lang="en-US" sz="1000" dirty="0"/>
-          </a:p>
-        </p:txBody>
-      </p:sp>
-      <p:sp>
-        <p:nvSpPr>
-          <p:cNvPr id="57" name="Shape 55"/>
-          <p:cNvSpPr/>
-          <p:nvPr/>
-        </p:nvSpPr>
-        <p:spPr>
-          <a:xfrm>
-            <a:off x="594360" y="5897880"/>
-            <a:ext cx="11155680" cy="530352"/>
-          </a:xfrm>
-          <a:prstGeom prst="rect">
-            <a:avLst/>
-          </a:prstGeom>
-          <a:solidFill>
-            <a:srgbClr val="F8FAFC"/>
-          </a:solidFill>
-          <a:ln w="12700">
-            <a:solidFill>
-              <a:srgbClr val="F8FAFC"/>
-            </a:solidFill>
-            <a:prstDash val="solid"/>
-          </a:ln>
-        </p:spPr>
-      </p:sp>
-      <p:sp>
-        <p:nvSpPr>
-          <p:cNvPr id="58" name="Shape 56"/>
-          <p:cNvSpPr/>
-          <p:nvPr/>
-        </p:nvSpPr>
-        <p:spPr>
-          <a:xfrm>
-            <a:off x="594360" y="5916168"/>
-            <a:ext cx="45720" cy="475488"/>
-          </a:xfrm>
-          <a:prstGeom prst="rect">
-            <a:avLst/>
-          </a:prstGeom>
-          <a:solidFill>
-            <a:srgbClr val="047857"/>
-          </a:solidFill>
-          <a:ln w="12700">
-            <a:solidFill>
-              <a:srgbClr val="047857"/>
-            </a:solidFill>
-            <a:prstDash val="solid"/>
-          </a:ln>
-        </p:spPr>
-      </p:sp>
-      <p:sp>
-        <p:nvSpPr>
-          <p:cNvPr id="59" name="Text 57"/>
-          <p:cNvSpPr/>
-          <p:nvPr/>
-        </p:nvSpPr>
-        <p:spPr>
-          <a:xfrm>
-            <a:off x="704088" y="5916168"/>
-            <a:ext cx="2029968" cy="475488"/>
-          </a:xfrm>
-          <a:prstGeom prst="rect">
-            <a:avLst/>
-          </a:prstGeom>
-          <a:noFill/>
-          <a:ln/>
-        </p:spPr>
-        <p:txBody>
-          <a:bodyPr wrap="square" lIns="0" tIns="0" rIns="0" bIns="0" rtlCol="0" anchor="ctr"/>
-          <a:lstStyle/>
-          <a:p>
-            <a:pPr indent="0" marL="0">
-              <a:buNone/>
-            </a:pPr>
-            <a:r>
-              <a:rPr lang="en-US" sz="1100" b="1" dirty="0">
-                <a:solidFill>
-                  <a:srgbClr val="0B1530"/>
-                </a:solidFill>
-                <a:latin typeface="Calibri" pitchFamily="34" charset="0"/>
-                <a:ea typeface="Calibri" pitchFamily="34" charset="-122"/>
-                <a:cs typeface="Calibri" pitchFamily="34" charset="-120"/>
-              </a:rPr>
-              <a:t>Retrieval quality risk</a:t>
-            </a:r>
-            <a:endParaRPr lang="en-US" sz="1100" dirty="0"/>
-          </a:p>
-        </p:txBody>
-      </p:sp>
-      <p:sp>
-        <p:nvSpPr>
-          <p:cNvPr id="60" name="Text 58"/>
-          <p:cNvSpPr/>
-          <p:nvPr/>
-        </p:nvSpPr>
-        <p:spPr>
-          <a:xfrm>
-            <a:off x="2898648" y="5916168"/>
-            <a:ext cx="2240280" cy="475488"/>
-          </a:xfrm>
-          <a:prstGeom prst="rect">
-            <a:avLst/>
-          </a:prstGeom>
-          <a:noFill/>
-          <a:ln/>
-        </p:spPr>
-        <p:txBody>
-          <a:bodyPr wrap="square" lIns="0" tIns="0" rIns="0" bIns="0" rtlCol="0" anchor="ctr"/>
-          <a:lstStyle/>
-          <a:p>
-            <a:pPr indent="0" marL="0">
-              <a:buNone/>
-            </a:pPr>
-            <a:r>
-              <a:rPr lang="en-US" sz="1000" dirty="0">
-                <a:solidFill>
-                  <a:srgbClr val="475569"/>
-                </a:solidFill>
-                <a:latin typeface="Calibri" pitchFamily="34" charset="0"/>
-                <a:ea typeface="Calibri" pitchFamily="34" charset="-122"/>
-                <a:cs typeface="Calibri" pitchFamily="34" charset="-120"/>
-              </a:rPr>
-              <a:t>A technically compliant service may still fail if relevance is weak or benchmark sets are absent.</a:t>
-            </a:r>
-            <a:endParaRPr lang="en-US" sz="1000" dirty="0"/>
-          </a:p>
-        </p:txBody>
-      </p:sp>
-      <p:sp>
-        <p:nvSpPr>
-          <p:cNvPr id="61" name="Text 59"/>
-          <p:cNvSpPr/>
-          <p:nvPr/>
-        </p:nvSpPr>
-        <p:spPr>
-          <a:xfrm>
-            <a:off x="5230368" y="5916168"/>
-            <a:ext cx="2651760" cy="475488"/>
-          </a:xfrm>
-          <a:prstGeom prst="rect">
-            <a:avLst/>
-          </a:prstGeom>
-          <a:noFill/>
-          <a:ln/>
-        </p:spPr>
-        <p:txBody>
-          <a:bodyPr wrap="square" lIns="0" tIns="0" rIns="0" bIns="0" rtlCol="0" anchor="ctr"/>
-          <a:lstStyle/>
-          <a:p>
-            <a:pPr indent="0" marL="0">
-              <a:buNone/>
-            </a:pPr>
-            <a:r>
-              <a:rPr lang="en-US" sz="1000" dirty="0">
-                <a:solidFill>
-                  <a:srgbClr val="0B1530"/>
-                </a:solidFill>
-                <a:latin typeface="Calibri" pitchFamily="34" charset="0"/>
-                <a:ea typeface="Calibri" pitchFamily="34" charset="-122"/>
-                <a:cs typeface="Calibri" pitchFamily="34" charset="-120"/>
-              </a:rPr>
-              <a:t>Define benchmark expectations, quality baselines, tenant acceptance criteria early. Service owns framework; tenant owns benchmarks.</a:t>
-            </a:r>
-            <a:endParaRPr lang="en-US" sz="1000" dirty="0"/>
-          </a:p>
-        </p:txBody>
-      </p:sp>
-      <p:sp>
-        <p:nvSpPr>
-          <p:cNvPr id="62" name="Text 60"/>
-          <p:cNvSpPr/>
-          <p:nvPr/>
-        </p:nvSpPr>
-        <p:spPr>
-          <a:xfrm>
-            <a:off x="7973568" y="5916168"/>
-            <a:ext cx="1783080" cy="475488"/>
-          </a:xfrm>
-          <a:prstGeom prst="rect">
-            <a:avLst/>
-          </a:prstGeom>
-          <a:noFill/>
-          <a:ln/>
-        </p:spPr>
-        <p:txBody>
-          <a:bodyPr wrap="square" lIns="0" tIns="0" rIns="0" bIns="0" rtlCol="0" anchor="ctr"/>
-          <a:lstStyle/>
-          <a:p>
-            <a:pPr indent="0" marL="0">
-              <a:buNone/>
-            </a:pPr>
-            <a:r>
-              <a:rPr lang="en-US" sz="1000" i="1" dirty="0">
-                <a:solidFill>
-                  <a:srgbClr val="475569"/>
-                </a:solidFill>
-                <a:latin typeface="Calibri" pitchFamily="34" charset="0"/>
-                <a:ea typeface="Calibri" pitchFamily="34" charset="-122"/>
-                <a:cs typeface="Calibri" pitchFamily="34" charset="-120"/>
-              </a:rPr>
-              <a:t>Avoids building a service that is governance-compliant but low-value.</a:t>
-            </a:r>
-            <a:endParaRPr lang="en-US" sz="1000" dirty="0"/>
-          </a:p>
-        </p:txBody>
-      </p:sp>
-      <p:sp>
-        <p:nvSpPr>
-          <p:cNvPr id="63" name="Shape 61"/>
-          <p:cNvSpPr/>
-          <p:nvPr/>
-        </p:nvSpPr>
-        <p:spPr>
-          <a:xfrm>
-            <a:off x="9848088" y="6035040"/>
-            <a:ext cx="914400" cy="237744"/>
-          </a:xfrm>
-          <a:prstGeom prst="roundRect">
-            <a:avLst>
-              <a:gd name="adj" fmla="val 50000"/>
-            </a:avLst>
-          </a:prstGeom>
-          <a:solidFill>
-            <a:srgbClr val="ECFDF5"/>
-          </a:solidFill>
-          <a:ln w="6350">
-            <a:solidFill>
-              <a:srgbClr val="065F46"/>
-            </a:solidFill>
-            <a:prstDash val="solid"/>
-          </a:ln>
-        </p:spPr>
-      </p:sp>
-      <p:sp>
-        <p:nvSpPr>
-          <p:cNvPr id="64" name="Text 62"/>
-          <p:cNvSpPr/>
-          <p:nvPr/>
-        </p:nvSpPr>
-        <p:spPr>
-          <a:xfrm>
-            <a:off x="9848088" y="6035040"/>
-            <a:ext cx="914400" cy="237744"/>
-          </a:xfrm>
-          <a:prstGeom prst="rect">
-            <a:avLst/>
-          </a:prstGeom>
-          <a:noFill/>
-          <a:ln/>
-        </p:spPr>
-        <p:txBody>
-          <a:bodyPr wrap="square" lIns="0" tIns="0" rIns="0" bIns="0" rtlCol="0" anchor="ctr"/>
-          <a:lstStyle/>
-          <a:p>
-            <a:pPr algn="ctr" indent="0" marL="0">
-              <a:buNone/>
-            </a:pPr>
-            <a:r>
-              <a:rPr lang="en-US" sz="850" b="1" spc="300" kern="0" dirty="0">
-                <a:solidFill>
-                  <a:srgbClr val="065F46"/>
-                </a:solidFill>
-                <a:latin typeface="Calibri" pitchFamily="34" charset="0"/>
-                <a:ea typeface="Calibri" pitchFamily="34" charset="-122"/>
-                <a:cs typeface="Calibri" pitchFamily="34" charset="-120"/>
-              </a:rPr>
-              <a:t>STAGE 1–2</a:t>
-            </a:r>
-            <a:endParaRPr lang="en-US" sz="850" dirty="0"/>
-          </a:p>
-        </p:txBody>
-      </p:sp>
-      <p:sp>
-        <p:nvSpPr>
-          <p:cNvPr id="65" name="Text 63"/>
-          <p:cNvSpPr/>
-          <p:nvPr/>
-        </p:nvSpPr>
-        <p:spPr>
-          <a:xfrm>
-            <a:off x="10853928" y="5916168"/>
-            <a:ext cx="914400" cy="475488"/>
-          </a:xfrm>
-          <a:prstGeom prst="rect">
-            <a:avLst/>
-          </a:prstGeom>
-          <a:noFill/>
-          <a:ln/>
-        </p:spPr>
-        <p:txBody>
-          <a:bodyPr wrap="square" lIns="0" tIns="0" rIns="0" bIns="0" rtlCol="0" anchor="ctr"/>
-          <a:lstStyle/>
-          <a:p>
-            <a:pPr indent="0" marL="0">
-              <a:buNone/>
-            </a:pPr>
-            <a:r>
-              <a:rPr lang="en-US" sz="1000" b="1" dirty="0">
-                <a:solidFill>
-                  <a:srgbClr val="0B1530"/>
-                </a:solidFill>
-                <a:latin typeface="Calibri" pitchFamily="34" charset="0"/>
-                <a:ea typeface="Calibri" pitchFamily="34" charset="-122"/>
-                <a:cs typeface="Calibri" pitchFamily="34" charset="-120"/>
-              </a:rPr>
-              <a:t>AI for Tech + Use-case owners</a:t>
-            </a:r>
-            <a:endParaRPr lang="en-US" sz="1000" dirty="0"/>
-          </a:p>
-        </p:txBody>
-      </p:sp>
-      <p:sp>
-        <p:nvSpPr>
-          <p:cNvPr id="66" name="Shape 64"/>
-          <p:cNvSpPr/>
-          <p:nvPr/>
-        </p:nvSpPr>
-        <p:spPr>
-          <a:xfrm>
-            <a:off x="594360" y="6446520"/>
-            <a:ext cx="502920" cy="22860"/>
-          </a:xfrm>
-          <a:prstGeom prst="rect">
-            <a:avLst/>
-          </a:prstGeom>
-          <a:solidFill>
-            <a:srgbClr val="B45309"/>
-          </a:solidFill>
-          <a:ln w="12700">
-            <a:solidFill>
-              <a:srgbClr val="B45309"/>
-            </a:solidFill>
-            <a:prstDash val="solid"/>
-          </a:ln>
-        </p:spPr>
-      </p:sp>
-      <p:sp>
-        <p:nvSpPr>
-          <p:cNvPr id="67" name="Text 65"/>
+          <p:cNvPr id="8" name="Text 5"/>
           <p:cNvSpPr/>
           <p:nvPr/>
         </p:nvSpPr>
@@ -5766,7 +6456,7 @@
       </p:sp>
       <p:sp>
         <p:nvSpPr>
-          <p:cNvPr id="68" name="Text 66"/>
+          <p:cNvPr id="9" name="Text 6"/>
           <p:cNvSpPr/>
           <p:nvPr/>
         </p:nvSpPr>
